--- a/decks/inner-circle-lesson-v2.pptx
+++ b/decks/inner-circle-lesson-v2.pptx
@@ -17,6 +17,7 @@
     <p:sldId id="265" r:id="rId17"/>
     <p:sldId id="266" r:id="rId18"/>
     <p:sldId id="267" r:id="rId19"/>
+    <p:sldId id="268" r:id="rId20"/>
   </p:sldIdLst>
   <p:sldSz cx="12192000" cy="6858000" type="screen4x3"/>
   <p:notesSz cx="6858000" cy="9144000"/>
@@ -513,7 +514,77 @@
           <a:lstStyle/>
           <a:p>
             <a:r>
-              <a:t>This page and the next three are hidden. They stay in the deck for you and are skipped when you present.</a:t>
+              <a:t>This page is hidden and skipped when you present. The full plan, care notes and research are on the hidden pages at the end of the deck, if you want them.</a:t>
+            </a:r>
+          </a:p>
+        </p:txBody>
+      </p:sp>
+      <p:sp>
+        <p:nvSpPr>
+          <p:cNvPr id="4" name="Slide Number Placeholder 3"/>
+          <p:cNvSpPr>
+            <a:spLocks noGrp="1"/>
+          </p:cNvSpPr>
+          <p:nvPr>
+            <p:ph type="sldNum" idx="5" sz="quarter"/>
+          </p:nvPr>
+        </p:nvSpPr>
+        <p:spPr/>
+      </p:sp>
+    </p:spTree>
+  </p:cSld>
+  <p:clrMapOvr>
+    <a:masterClrMapping/>
+  </p:clrMapOvr>
+</p:notes>
+</file>
+
+<file path=ppt/notesSlides/notesSlide10.xml><?xml version="1.0" encoding="utf-8"?>
+<p:notes xmlns:a="http://schemas.openxmlformats.org/drawingml/2006/main" xmlns:p="http://schemas.openxmlformats.org/presentationml/2006/main" xmlns:r="http://schemas.openxmlformats.org/officeDocument/2006/relationships">
+  <p:cSld>
+    <p:spTree>
+      <p:nvGrpSpPr>
+        <p:cNvPr id="1" name=""/>
+        <p:cNvGrpSpPr/>
+        <p:nvPr/>
+      </p:nvGrpSpPr>
+      <p:grpSpPr>
+        <a:xfrm>
+          <a:off x="0" y="0"/>
+          <a:ext cx="0" cy="0"/>
+          <a:chOff x="0" y="0"/>
+          <a:chExt cx="0" cy="0"/>
+        </a:xfrm>
+      </p:grpSpPr>
+      <p:sp>
+        <p:nvSpPr>
+          <p:cNvPr id="2" name="Slide Image Placeholder 1"/>
+          <p:cNvSpPr>
+            <a:spLocks noGrp="1"/>
+          </p:cNvSpPr>
+          <p:nvPr>
+            <p:ph type="sldImg" idx="2"/>
+          </p:nvPr>
+        </p:nvSpPr>
+        <p:spPr/>
+      </p:sp>
+      <p:sp>
+        <p:nvSpPr>
+          <p:cNvPr id="3" name="Notes Placeholder 2"/>
+          <p:cNvSpPr>
+            <a:spLocks noGrp="1"/>
+          </p:cNvSpPr>
+          <p:nvPr>
+            <p:ph type="body" idx="3" sz="quarter"/>
+          </p:nvPr>
+        </p:nvSpPr>
+        <p:spPr/>
+        <p:txBody>
+          <a:bodyPr/>
+          <a:lstStyle/>
+          <a:p>
+            <a:r>
+              <a:t>If you want more: this page and the next three are hidden and skipped when you present.</a:t>
             </a:r>
           </a:p>
         </p:txBody>
@@ -4165,7 +4236,7 @@
                 </a:solidFill>
                 <a:latin typeface="Inter Tight"/>
               </a:rPr>
-              <a:t>TEACHER PAGE  ·  skipped when you present  ·  Lesson plan</a:t>
+              <a:t>TEACHER PAGE  ·  skipped when you present  ·  Before you start</a:t>
             </a:r>
           </a:p>
         </p:txBody>
@@ -4256,8 +4327,8 @@
         </p:nvSpPr>
         <p:spPr>
           <a:xfrm>
-            <a:off x="548640" y="1828800"/>
-            <a:ext cx="5120640" cy="4389120"/>
+            <a:off x="548640" y="2011680"/>
+            <a:ext cx="11064240" cy="4206240"/>
           </a:xfrm>
           <a:prstGeom prst="rect">
             <a:avLst/>
@@ -4272,43 +4343,43 @@
           <a:p>
             <a:pPr algn="l">
               <a:spcAft>
-                <a:spcPts val="675"/>
-              </a:spcAft>
-            </a:pPr>
-            <a:r>
-              <a:rPr sz="1100" b="1" i="0">
+                <a:spcPts val="900"/>
+              </a:spcAft>
+            </a:pPr>
+            <a:r>
+              <a:rPr sz="1200" b="1" i="0">
                 <a:solidFill>
                   <a:srgbClr val="0B2D5B"/>
                 </a:solidFill>
                 <a:latin typeface="Inter Tight"/>
               </a:rPr>
-              <a:t>GOAL</a:t>
-            </a:r>
-          </a:p>
-          <a:p>
-            <a:pPr algn="l">
-              <a:spcAft>
-                <a:spcPts val="675"/>
-              </a:spcAft>
-            </a:pPr>
-            <a:r>
-              <a:rPr sz="1500" b="0" i="0">
+              <a:t>BEFORE YOU START</a:t>
+            </a:r>
+          </a:p>
+          <a:p>
+            <a:pPr algn="l">
+              <a:spcAft>
+                <a:spcPts val="900"/>
+              </a:spcAft>
+            </a:pPr>
+            <a:r>
+              <a:rPr sz="2000" b="0" i="0">
                 <a:solidFill>
                   <a:srgbClr val="1C1B19"/>
                 </a:solidFill>
                 <a:latin typeface="Source Serif 4"/>
               </a:rPr>
-              <a:t>Students can explain the difference between popular and liked, recognize the quiet and loud versions of the same power moves in any friend group, and name one assertive move they could use, for themselves or for someone on the outside. Nobody names a real person or group.</a:t>
-            </a:r>
-          </a:p>
-          <a:p>
-            <a:pPr algn="l">
-              <a:spcAft>
-                <a:spcPts val="675"/>
-              </a:spcAft>
-            </a:pPr>
-            <a:r>
-              <a:rPr sz="1500" b="0" i="0">
+              <a:t>Students learn the difference between popular and liked, spot the quiet and loud versions of the same power moves, and name one move that's assertive without being mean. Bring scrap paper, keep it to situations with no names, and treat outing or shared photos as a same-day counselor conversation.</a:t>
+            </a:r>
+          </a:p>
+          <a:p>
+            <a:pPr algn="l">
+              <a:spcAft>
+                <a:spcPts val="900"/>
+              </a:spcAft>
+            </a:pPr>
+            <a:r>
+              <a:rPr sz="2000" b="0" i="0">
                 <a:solidFill>
                   <a:srgbClr val="1C1B19"/>
                 </a:solidFill>
@@ -4320,327 +4391,33 @@
           <a:p>
             <a:pPr algn="l">
               <a:spcAft>
-                <a:spcPts val="675"/>
-              </a:spcAft>
-            </a:pPr>
-            <a:r>
-              <a:rPr sz="1100" b="1" i="0">
+                <a:spcPts val="900"/>
+              </a:spcAft>
+            </a:pPr>
+            <a:r>
+              <a:rPr sz="1200" b="1" i="0">
                 <a:solidFill>
                   <a:srgbClr val="0B2D5B"/>
                 </a:solidFill>
                 <a:latin typeface="Inter Tight"/>
               </a:rPr>
-              <a:t>MATERIALS</a:t>
-            </a:r>
-          </a:p>
-          <a:p>
-            <a:pPr algn="l">
-              <a:spcAft>
-                <a:spcPts val="675"/>
-              </a:spcAft>
-            </a:pPr>
-            <a:r>
-              <a:rPr sz="1500" b="0" i="0">
+              <a:t>EVERY STUDENT IN THE ROOM</a:t>
+            </a:r>
+          </a:p>
+          <a:p>
+            <a:pPr algn="l">
+              <a:spcAft>
+                <a:spcPts val="900"/>
+              </a:spcAft>
+            </a:pPr>
+            <a:r>
+              <a:rPr sz="2000" b="0" i="0">
                 <a:solidFill>
                   <a:srgbClr val="1C1B19"/>
                 </a:solidFill>
                 <a:latin typeface="Source Serif 4"/>
               </a:rPr>
-              <a:t>Scraps of paper for the anonymous yes/no cards</a:t>
-            </a:r>
-          </a:p>
-          <a:p>
-            <a:pPr algn="l">
-              <a:spcAft>
-                <a:spcPts val="675"/>
-              </a:spcAft>
-            </a:pPr>
-            <a:r>
-              <a:rPr sz="1500" b="0" i="0">
-                <a:solidFill>
-                  <a:srgbClr val="1C1B19"/>
-                </a:solidFill>
-                <a:latin typeface="Source Serif 4"/>
-              </a:rPr>
-              <a:t>Index cards or notebooks for the private one-move reflection</a:t>
-            </a:r>
-          </a:p>
-          <a:p>
-            <a:pPr algn="l">
-              <a:spcAft>
-                <a:spcPts val="675"/>
-              </a:spcAft>
-            </a:pPr>
-            <a:r>
-              <a:rPr sz="1500" b="0" i="0">
-                <a:solidFill>
-                  <a:srgbClr val="1C1B19"/>
-                </a:solidFill>
-                <a:latin typeface="Source Serif 4"/>
-              </a:rPr>
-              <a:t>The student page link (last slide) to share after advisory</a:t>
-            </a:r>
-          </a:p>
-        </p:txBody>
-      </p:sp>
-      <p:sp>
-        <p:nvSpPr>
-          <p:cNvPr id="7" name="TextBox 6"/>
-          <p:cNvSpPr txBox="1"/>
-          <p:nvPr/>
-        </p:nvSpPr>
-        <p:spPr>
-          <a:xfrm>
-            <a:off x="6126480" y="1828800"/>
-            <a:ext cx="5486400" cy="4389120"/>
-          </a:xfrm>
-          <a:prstGeom prst="rect">
-            <a:avLst/>
-          </a:prstGeom>
-          <a:noFill/>
-        </p:spPr>
-        <p:txBody>
-          <a:bodyPr wrap="square" anchor="t" lIns="0" rIns="0" tIns="0" bIns="0">
-            <a:spAutoFit/>
-          </a:bodyPr>
-          <a:lstStyle/>
-          <a:p>
-            <a:pPr algn="l">
-              <a:spcAft>
-                <a:spcPts val="630"/>
-              </a:spcAft>
-            </a:pPr>
-            <a:r>
-              <a:rPr sz="1100" b="1" i="0">
-                <a:solidFill>
-                  <a:srgbClr val="0B2D5B"/>
-                </a:solidFill>
-                <a:latin typeface="Inter Tight"/>
-              </a:rPr>
-              <a:t>FLOW</a:t>
-            </a:r>
-          </a:p>
-          <a:p>
-            <a:pPr algn="l">
-              <a:spcAft>
-                <a:spcPts val="630"/>
-              </a:spcAft>
-            </a:pPr>
-            <a:r>
-              <a:rPr sz="1300" b="1" i="0">
-                <a:solidFill>
-                  <a:srgbClr val="F47B20"/>
-                </a:solidFill>
-                <a:latin typeface="Inter Tight"/>
-              </a:rPr>
-              <a:t>2 min   </a:t>
-            </a:r>
-            <a:r>
-              <a:rPr sz="1400" b="0" i="0">
-                <a:solidFill>
-                  <a:srgbClr val="1C1B19"/>
-                </a:solidFill>
-                <a:latin typeface="Source Serif 4"/>
-              </a:rPr>
-              <a:t>Open: nobody said anything, everybody knew</a:t>
-            </a:r>
-          </a:p>
-          <a:p>
-            <a:pPr algn="l">
-              <a:spcAft>
-                <a:spcPts val="630"/>
-              </a:spcAft>
-            </a:pPr>
-            <a:r>
-              <a:rPr sz="1300" b="1" i="0">
-                <a:solidFill>
-                  <a:srgbClr val="F47B20"/>
-                </a:solidFill>
-                <a:latin typeface="Inter Tight"/>
-              </a:rPr>
-              <a:t>3 min   </a:t>
-            </a:r>
-            <a:r>
-              <a:rPr sz="1400" b="0" i="0">
-                <a:solidFill>
-                  <a:srgbClr val="1C1B19"/>
-                </a:solidFill>
-                <a:latin typeface="Source Serif 4"/>
-              </a:rPr>
-              <a:t>Popular or liked? (thumbs vote)</a:t>
-            </a:r>
-          </a:p>
-          <a:p>
-            <a:pPr algn="l">
-              <a:spcAft>
-                <a:spcPts val="630"/>
-              </a:spcAft>
-            </a:pPr>
-            <a:r>
-              <a:rPr sz="1300" b="1" i="0">
-                <a:solidFill>
-                  <a:srgbClr val="F47B20"/>
-                </a:solidFill>
-                <a:latin typeface="Inter Tight"/>
-              </a:rPr>
-              <a:t>4 min   </a:t>
-            </a:r>
-            <a:r>
-              <a:rPr sz="1400" b="0" i="0">
-                <a:solidFill>
-                  <a:srgbClr val="1C1B19"/>
-                </a:solidFill>
-                <a:latin typeface="Source Serif 4"/>
-              </a:rPr>
-              <a:t>Same game, different moves (discussion)</a:t>
-            </a:r>
-          </a:p>
-          <a:p>
-            <a:pPr algn="l">
-              <a:spcAft>
-                <a:spcPts val="630"/>
-              </a:spcAft>
-            </a:pPr>
-            <a:r>
-              <a:rPr sz="1300" b="1" i="0">
-                <a:solidFill>
-                  <a:srgbClr val="F47B20"/>
-                </a:solidFill>
-                <a:latin typeface="Inter Tight"/>
-              </a:rPr>
-              <a:t>3 min   </a:t>
-            </a:r>
-            <a:r>
-              <a:rPr sz="1400" b="0" i="0">
-                <a:solidFill>
-                  <a:srgbClr val="1C1B19"/>
-                </a:solidFill>
-                <a:latin typeface="Source Serif 4"/>
-              </a:rPr>
-              <a:t>Why nobody says anything (anonymous yes/no cards)</a:t>
-            </a:r>
-          </a:p>
-          <a:p>
-            <a:pPr algn="l">
-              <a:spcAft>
-                <a:spcPts val="630"/>
-              </a:spcAft>
-            </a:pPr>
-            <a:r>
-              <a:rPr sz="1300" b="1" i="0">
-                <a:solidFill>
-                  <a:srgbClr val="F47B20"/>
-                </a:solidFill>
-                <a:latin typeface="Inter Tight"/>
-              </a:rPr>
-              <a:t>2 min   </a:t>
-            </a:r>
-            <a:r>
-              <a:rPr sz="1400" b="0" i="0">
-                <a:solidFill>
-                  <a:srgbClr val="1C1B19"/>
-                </a:solidFill>
-                <a:latin typeface="Source Serif 4"/>
-              </a:rPr>
-              <a:t>Not a doormat, not a bully: assertive</a:t>
-            </a:r>
-          </a:p>
-          <a:p>
-            <a:pPr algn="l">
-              <a:spcAft>
-                <a:spcPts val="630"/>
-              </a:spcAft>
-            </a:pPr>
-            <a:r>
-              <a:rPr sz="1300" b="1" i="0">
-                <a:solidFill>
-                  <a:srgbClr val="F47B20"/>
-                </a:solidFill>
-                <a:latin typeface="Inter Tight"/>
-              </a:rPr>
-              <a:t>4 min   </a:t>
-            </a:r>
-            <a:r>
-              <a:rPr sz="1400" b="0" i="0">
-                <a:solidFill>
-                  <a:srgbClr val="1C1B19"/>
-                </a:solidFill>
-                <a:latin typeface="Source Serif 4"/>
-              </a:rPr>
-              <a:t>Three moments (pairs)</a:t>
-            </a:r>
-          </a:p>
-          <a:p>
-            <a:pPr algn="l">
-              <a:spcAft>
-                <a:spcPts val="630"/>
-              </a:spcAft>
-            </a:pPr>
-            <a:r>
-              <a:rPr sz="1300" b="1" i="0">
-                <a:solidFill>
-                  <a:srgbClr val="F47B20"/>
-                </a:solidFill>
-                <a:latin typeface="Inter Tight"/>
-              </a:rPr>
-              <a:t>2 min   </a:t>
-            </a:r>
-            <a:r>
-              <a:rPr sz="1400" b="0" i="0">
-                <a:solidFill>
-                  <a:srgbClr val="1C1B19"/>
-                </a:solidFill>
-                <a:latin typeface="Source Serif 4"/>
-              </a:rPr>
-              <a:t>One move (private) and the student page</a:t>
-            </a:r>
-          </a:p>
-          <a:p>
-            <a:pPr algn="l">
-              <a:spcAft>
-                <a:spcPts val="630"/>
-              </a:spcAft>
-            </a:pPr>
-            <a:r>
-              <a:rPr sz="1400" b="0" i="0">
-                <a:solidFill>
-                  <a:srgbClr val="1C1B19"/>
-                </a:solidFill>
-                <a:latin typeface="Source Serif 4"/>
-              </a:rPr>
-              <a:t/>
-            </a:r>
-          </a:p>
-          <a:p>
-            <a:pPr algn="l">
-              <a:spcAft>
-                <a:spcPts val="630"/>
-              </a:spcAft>
-            </a:pPr>
-            <a:r>
-              <a:rPr sz="1100" b="1" i="0">
-                <a:solidFill>
-                  <a:srgbClr val="0B2D5B"/>
-                </a:solidFill>
-                <a:latin typeface="Inter Tight"/>
-              </a:rPr>
-              <a:t>SHORT ON TIME (10-MINUTE CHECK-IN)</a:t>
-            </a:r>
-          </a:p>
-          <a:p>
-            <a:pPr algn="l">
-              <a:spcAft>
-                <a:spcPts val="630"/>
-              </a:spcAft>
-            </a:pPr>
-            <a:r>
-              <a:rPr sz="1400" b="0" i="0">
-                <a:solidFill>
-                  <a:srgbClr val="1C1B19"/>
-                </a:solidFill>
-                <a:latin typeface="Source Serif 4"/>
-              </a:rPr>
-              <a:t>Popular or liked? thumbs vote (3), anonymous yes/no cards (3), one moment in pairs, Maya or Dev (3), one move and the student page link (1). The student page has the rest of the moves and what to do if you're on the outside.</a:t>
+              <a:t>Present every move as something any gender does, and when insults like "soft" come up, name them as power moves that police every guy, gay or straight.</a:t>
             </a:r>
           </a:p>
         </p:txBody>
@@ -4654,6 +4431,2308 @@
 </file>
 
 <file path=ppt/slides/slide10.xml><?xml version="1.0" encoding="utf-8"?>
+<p:sld xmlns:a="http://schemas.openxmlformats.org/drawingml/2006/main" xmlns:p="http://schemas.openxmlformats.org/presentationml/2006/main" xmlns:r="http://schemas.openxmlformats.org/officeDocument/2006/relationships" show="0">
+  <p:cSld>
+    <p:bg>
+      <p:bgPr>
+        <a:solidFill>
+          <a:srgbClr val="EEEBE4"/>
+        </a:solidFill>
+        <a:effectLst/>
+      </p:bgPr>
+    </p:bg>
+    <p:spTree>
+      <p:nvGrpSpPr>
+        <p:cNvPr id="1" name=""/>
+        <p:cNvGrpSpPr/>
+        <p:nvPr/>
+      </p:nvGrpSpPr>
+      <p:grpSpPr/>
+      <p:sp>
+        <p:nvSpPr>
+          <p:cNvPr id="2" name="Rectangle 1"/>
+          <p:cNvSpPr/>
+          <p:nvPr/>
+        </p:nvSpPr>
+        <p:spPr>
+          <a:xfrm>
+            <a:off x="0" y="0"/>
+            <a:ext cx="12191695" cy="384048"/>
+          </a:xfrm>
+          <a:prstGeom prst="rect">
+            <a:avLst/>
+          </a:prstGeom>
+          <a:solidFill>
+            <a:srgbClr val="0B2D5B"/>
+          </a:solidFill>
+          <a:ln>
+            <a:noFill/>
+          </a:ln>
+          <a:effectLst/>
+        </p:spPr>
+        <p:style>
+          <a:lnRef idx="1">
+            <a:schemeClr val="accent1"/>
+          </a:lnRef>
+          <a:fillRef idx="3">
+            <a:schemeClr val="accent1"/>
+          </a:fillRef>
+          <a:effectRef idx="2">
+            <a:schemeClr val="accent1"/>
+          </a:effectRef>
+          <a:fontRef idx="minor">
+            <a:schemeClr val="lt1"/>
+          </a:fontRef>
+        </p:style>
+        <p:txBody>
+          <a:bodyPr rtlCol="0" anchor="ctr"/>
+          <a:lstStyle/>
+          <a:p>
+            <a:pPr algn="ctr"/>
+          </a:p>
+        </p:txBody>
+      </p:sp>
+      <p:sp>
+        <p:nvSpPr>
+          <p:cNvPr id="3" name="TextBox 2"/>
+          <p:cNvSpPr txBox="1"/>
+          <p:nvPr/>
+        </p:nvSpPr>
+        <p:spPr>
+          <a:xfrm>
+            <a:off x="548640" y="100584"/>
+            <a:ext cx="10972800" cy="274320"/>
+          </a:xfrm>
+          <a:prstGeom prst="rect">
+            <a:avLst/>
+          </a:prstGeom>
+          <a:noFill/>
+        </p:spPr>
+        <p:txBody>
+          <a:bodyPr wrap="square" anchor="t" lIns="0" rIns="0" tIns="0" bIns="0">
+            <a:spAutoFit/>
+          </a:bodyPr>
+          <a:lstStyle/>
+          <a:p>
+            <a:pPr algn="l">
+              <a:spcAft>
+                <a:spcPts val="495"/>
+              </a:spcAft>
+            </a:pPr>
+            <a:r>
+              <a:rPr sz="1100" b="1" i="0">
+                <a:solidFill>
+                  <a:srgbClr val="FFFFFF"/>
+                </a:solidFill>
+                <a:latin typeface="Inter Tight"/>
+              </a:rPr>
+              <a:t>TEACHER PAGE  ·  skipped when you present  ·  Lesson plan</a:t>
+            </a:r>
+          </a:p>
+        </p:txBody>
+      </p:sp>
+      <p:sp>
+        <p:nvSpPr>
+          <p:cNvPr id="4" name="TextBox 3"/>
+          <p:cNvSpPr txBox="1"/>
+          <p:nvPr/>
+        </p:nvSpPr>
+        <p:spPr>
+          <a:xfrm>
+            <a:off x="548640" y="685800"/>
+            <a:ext cx="10972800" cy="731520"/>
+          </a:xfrm>
+          <a:prstGeom prst="rect">
+            <a:avLst/>
+          </a:prstGeom>
+          <a:noFill/>
+        </p:spPr>
+        <p:txBody>
+          <a:bodyPr wrap="square" anchor="t" lIns="0" rIns="0" tIns="0" bIns="0">
+            <a:spAutoFit/>
+          </a:bodyPr>
+          <a:lstStyle/>
+          <a:p>
+            <a:pPr algn="l">
+              <a:spcAft>
+                <a:spcPts val="1530"/>
+              </a:spcAft>
+            </a:pPr>
+            <a:r>
+              <a:rPr sz="3400" b="1" i="0">
+                <a:solidFill>
+                  <a:srgbClr val="1C1B19"/>
+                </a:solidFill>
+                <a:latin typeface="Source Serif 4"/>
+              </a:rPr>
+              <a:t>Inner Circle</a:t>
+            </a:r>
+          </a:p>
+        </p:txBody>
+      </p:sp>
+      <p:sp>
+        <p:nvSpPr>
+          <p:cNvPr id="5" name="TextBox 4"/>
+          <p:cNvSpPr txBox="1"/>
+          <p:nvPr/>
+        </p:nvSpPr>
+        <p:spPr>
+          <a:xfrm>
+            <a:off x="548640" y="1325880"/>
+            <a:ext cx="10972800" cy="365760"/>
+          </a:xfrm>
+          <a:prstGeom prst="rect">
+            <a:avLst/>
+          </a:prstGeom>
+          <a:noFill/>
+        </p:spPr>
+        <p:txBody>
+          <a:bodyPr wrap="square" anchor="t" lIns="0" rIns="0" tIns="0" bIns="0">
+            <a:spAutoFit/>
+          </a:bodyPr>
+          <a:lstStyle/>
+          <a:p>
+            <a:pPr algn="l">
+              <a:spcAft>
+                <a:spcPts val="630"/>
+              </a:spcAft>
+            </a:pPr>
+            <a:r>
+              <a:rPr sz="1400" b="0" i="0">
+                <a:solidFill>
+                  <a:srgbClr val="5D5A54"/>
+                </a:solidFill>
+                <a:latin typeface="Inter Tight"/>
+              </a:rPr>
+              <a:t>Upper School  ·  20 minutes (fits a 30-minute advisory, with time for your opening check-in; 10-minute version below)  ·  Any grade</a:t>
+            </a:r>
+          </a:p>
+        </p:txBody>
+      </p:sp>
+      <p:sp>
+        <p:nvSpPr>
+          <p:cNvPr id="6" name="TextBox 5"/>
+          <p:cNvSpPr txBox="1"/>
+          <p:nvPr/>
+        </p:nvSpPr>
+        <p:spPr>
+          <a:xfrm>
+            <a:off x="548640" y="1828800"/>
+            <a:ext cx="5120640" cy="4389120"/>
+          </a:xfrm>
+          <a:prstGeom prst="rect">
+            <a:avLst/>
+          </a:prstGeom>
+          <a:noFill/>
+        </p:spPr>
+        <p:txBody>
+          <a:bodyPr wrap="square" anchor="t" lIns="0" rIns="0" tIns="0" bIns="0">
+            <a:spAutoFit/>
+          </a:bodyPr>
+          <a:lstStyle/>
+          <a:p>
+            <a:pPr algn="l">
+              <a:spcAft>
+                <a:spcPts val="675"/>
+              </a:spcAft>
+            </a:pPr>
+            <a:r>
+              <a:rPr sz="1100" b="1" i="0">
+                <a:solidFill>
+                  <a:srgbClr val="0B2D5B"/>
+                </a:solidFill>
+                <a:latin typeface="Inter Tight"/>
+              </a:rPr>
+              <a:t>GOAL</a:t>
+            </a:r>
+          </a:p>
+          <a:p>
+            <a:pPr algn="l">
+              <a:spcAft>
+                <a:spcPts val="675"/>
+              </a:spcAft>
+            </a:pPr>
+            <a:r>
+              <a:rPr sz="1500" b="0" i="0">
+                <a:solidFill>
+                  <a:srgbClr val="1C1B19"/>
+                </a:solidFill>
+                <a:latin typeface="Source Serif 4"/>
+              </a:rPr>
+              <a:t>Students can explain the difference between popular and liked, recognize the quiet and loud versions of the same power moves in any friend group, and name one assertive move they could use, for themselves or for someone on the outside. Nobody names a real person or group.</a:t>
+            </a:r>
+          </a:p>
+          <a:p>
+            <a:pPr algn="l">
+              <a:spcAft>
+                <a:spcPts val="675"/>
+              </a:spcAft>
+            </a:pPr>
+            <a:r>
+              <a:rPr sz="1500" b="0" i="0">
+                <a:solidFill>
+                  <a:srgbClr val="1C1B19"/>
+                </a:solidFill>
+                <a:latin typeface="Source Serif 4"/>
+              </a:rPr>
+              <a:t/>
+            </a:r>
+          </a:p>
+          <a:p>
+            <a:pPr algn="l">
+              <a:spcAft>
+                <a:spcPts val="675"/>
+              </a:spcAft>
+            </a:pPr>
+            <a:r>
+              <a:rPr sz="1100" b="1" i="0">
+                <a:solidFill>
+                  <a:srgbClr val="0B2D5B"/>
+                </a:solidFill>
+                <a:latin typeface="Inter Tight"/>
+              </a:rPr>
+              <a:t>MATERIALS</a:t>
+            </a:r>
+          </a:p>
+          <a:p>
+            <a:pPr algn="l">
+              <a:spcAft>
+                <a:spcPts val="675"/>
+              </a:spcAft>
+            </a:pPr>
+            <a:r>
+              <a:rPr sz="1500" b="0" i="0">
+                <a:solidFill>
+                  <a:srgbClr val="1C1B19"/>
+                </a:solidFill>
+                <a:latin typeface="Source Serif 4"/>
+              </a:rPr>
+              <a:t>Scraps of paper for the anonymous yes/no cards</a:t>
+            </a:r>
+          </a:p>
+          <a:p>
+            <a:pPr algn="l">
+              <a:spcAft>
+                <a:spcPts val="675"/>
+              </a:spcAft>
+            </a:pPr>
+            <a:r>
+              <a:rPr sz="1500" b="0" i="0">
+                <a:solidFill>
+                  <a:srgbClr val="1C1B19"/>
+                </a:solidFill>
+                <a:latin typeface="Source Serif 4"/>
+              </a:rPr>
+              <a:t>Index cards or notebooks for the private one-move reflection</a:t>
+            </a:r>
+          </a:p>
+          <a:p>
+            <a:pPr algn="l">
+              <a:spcAft>
+                <a:spcPts val="675"/>
+              </a:spcAft>
+            </a:pPr>
+            <a:r>
+              <a:rPr sz="1500" b="0" i="0">
+                <a:solidFill>
+                  <a:srgbClr val="1C1B19"/>
+                </a:solidFill>
+                <a:latin typeface="Source Serif 4"/>
+              </a:rPr>
+              <a:t>The student page link (last slide) to share after advisory</a:t>
+            </a:r>
+          </a:p>
+        </p:txBody>
+      </p:sp>
+      <p:sp>
+        <p:nvSpPr>
+          <p:cNvPr id="7" name="TextBox 6"/>
+          <p:cNvSpPr txBox="1"/>
+          <p:nvPr/>
+        </p:nvSpPr>
+        <p:spPr>
+          <a:xfrm>
+            <a:off x="6126480" y="1828800"/>
+            <a:ext cx="5486400" cy="4389120"/>
+          </a:xfrm>
+          <a:prstGeom prst="rect">
+            <a:avLst/>
+          </a:prstGeom>
+          <a:noFill/>
+        </p:spPr>
+        <p:txBody>
+          <a:bodyPr wrap="square" anchor="t" lIns="0" rIns="0" tIns="0" bIns="0">
+            <a:spAutoFit/>
+          </a:bodyPr>
+          <a:lstStyle/>
+          <a:p>
+            <a:pPr algn="l">
+              <a:spcAft>
+                <a:spcPts val="630"/>
+              </a:spcAft>
+            </a:pPr>
+            <a:r>
+              <a:rPr sz="1100" b="1" i="0">
+                <a:solidFill>
+                  <a:srgbClr val="0B2D5B"/>
+                </a:solidFill>
+                <a:latin typeface="Inter Tight"/>
+              </a:rPr>
+              <a:t>FLOW</a:t>
+            </a:r>
+          </a:p>
+          <a:p>
+            <a:pPr algn="l">
+              <a:spcAft>
+                <a:spcPts val="630"/>
+              </a:spcAft>
+            </a:pPr>
+            <a:r>
+              <a:rPr sz="1300" b="1" i="0">
+                <a:solidFill>
+                  <a:srgbClr val="F47B20"/>
+                </a:solidFill>
+                <a:latin typeface="Inter Tight"/>
+              </a:rPr>
+              <a:t>2 min   </a:t>
+            </a:r>
+            <a:r>
+              <a:rPr sz="1400" b="0" i="0">
+                <a:solidFill>
+                  <a:srgbClr val="1C1B19"/>
+                </a:solidFill>
+                <a:latin typeface="Source Serif 4"/>
+              </a:rPr>
+              <a:t>Open: nobody said anything, everybody knew</a:t>
+            </a:r>
+          </a:p>
+          <a:p>
+            <a:pPr algn="l">
+              <a:spcAft>
+                <a:spcPts val="630"/>
+              </a:spcAft>
+            </a:pPr>
+            <a:r>
+              <a:rPr sz="1300" b="1" i="0">
+                <a:solidFill>
+                  <a:srgbClr val="F47B20"/>
+                </a:solidFill>
+                <a:latin typeface="Inter Tight"/>
+              </a:rPr>
+              <a:t>3 min   </a:t>
+            </a:r>
+            <a:r>
+              <a:rPr sz="1400" b="0" i="0">
+                <a:solidFill>
+                  <a:srgbClr val="1C1B19"/>
+                </a:solidFill>
+                <a:latin typeface="Source Serif 4"/>
+              </a:rPr>
+              <a:t>Popular or liked? (thumbs vote)</a:t>
+            </a:r>
+          </a:p>
+          <a:p>
+            <a:pPr algn="l">
+              <a:spcAft>
+                <a:spcPts val="630"/>
+              </a:spcAft>
+            </a:pPr>
+            <a:r>
+              <a:rPr sz="1300" b="1" i="0">
+                <a:solidFill>
+                  <a:srgbClr val="F47B20"/>
+                </a:solidFill>
+                <a:latin typeface="Inter Tight"/>
+              </a:rPr>
+              <a:t>4 min   </a:t>
+            </a:r>
+            <a:r>
+              <a:rPr sz="1400" b="0" i="0">
+                <a:solidFill>
+                  <a:srgbClr val="1C1B19"/>
+                </a:solidFill>
+                <a:latin typeface="Source Serif 4"/>
+              </a:rPr>
+              <a:t>Same game, different moves (discussion)</a:t>
+            </a:r>
+          </a:p>
+          <a:p>
+            <a:pPr algn="l">
+              <a:spcAft>
+                <a:spcPts val="630"/>
+              </a:spcAft>
+            </a:pPr>
+            <a:r>
+              <a:rPr sz="1300" b="1" i="0">
+                <a:solidFill>
+                  <a:srgbClr val="F47B20"/>
+                </a:solidFill>
+                <a:latin typeface="Inter Tight"/>
+              </a:rPr>
+              <a:t>3 min   </a:t>
+            </a:r>
+            <a:r>
+              <a:rPr sz="1400" b="0" i="0">
+                <a:solidFill>
+                  <a:srgbClr val="1C1B19"/>
+                </a:solidFill>
+                <a:latin typeface="Source Serif 4"/>
+              </a:rPr>
+              <a:t>Why nobody says anything (anonymous yes/no cards)</a:t>
+            </a:r>
+          </a:p>
+          <a:p>
+            <a:pPr algn="l">
+              <a:spcAft>
+                <a:spcPts val="630"/>
+              </a:spcAft>
+            </a:pPr>
+            <a:r>
+              <a:rPr sz="1300" b="1" i="0">
+                <a:solidFill>
+                  <a:srgbClr val="F47B20"/>
+                </a:solidFill>
+                <a:latin typeface="Inter Tight"/>
+              </a:rPr>
+              <a:t>2 min   </a:t>
+            </a:r>
+            <a:r>
+              <a:rPr sz="1400" b="0" i="0">
+                <a:solidFill>
+                  <a:srgbClr val="1C1B19"/>
+                </a:solidFill>
+                <a:latin typeface="Source Serif 4"/>
+              </a:rPr>
+              <a:t>Not a doormat, not a bully: assertive</a:t>
+            </a:r>
+          </a:p>
+          <a:p>
+            <a:pPr algn="l">
+              <a:spcAft>
+                <a:spcPts val="630"/>
+              </a:spcAft>
+            </a:pPr>
+            <a:r>
+              <a:rPr sz="1300" b="1" i="0">
+                <a:solidFill>
+                  <a:srgbClr val="F47B20"/>
+                </a:solidFill>
+                <a:latin typeface="Inter Tight"/>
+              </a:rPr>
+              <a:t>4 min   </a:t>
+            </a:r>
+            <a:r>
+              <a:rPr sz="1400" b="0" i="0">
+                <a:solidFill>
+                  <a:srgbClr val="1C1B19"/>
+                </a:solidFill>
+                <a:latin typeface="Source Serif 4"/>
+              </a:rPr>
+              <a:t>Three moments (pairs)</a:t>
+            </a:r>
+          </a:p>
+          <a:p>
+            <a:pPr algn="l">
+              <a:spcAft>
+                <a:spcPts val="630"/>
+              </a:spcAft>
+            </a:pPr>
+            <a:r>
+              <a:rPr sz="1300" b="1" i="0">
+                <a:solidFill>
+                  <a:srgbClr val="F47B20"/>
+                </a:solidFill>
+                <a:latin typeface="Inter Tight"/>
+              </a:rPr>
+              <a:t>2 min   </a:t>
+            </a:r>
+            <a:r>
+              <a:rPr sz="1400" b="0" i="0">
+                <a:solidFill>
+                  <a:srgbClr val="1C1B19"/>
+                </a:solidFill>
+                <a:latin typeface="Source Serif 4"/>
+              </a:rPr>
+              <a:t>One move (private) and the student page</a:t>
+            </a:r>
+          </a:p>
+          <a:p>
+            <a:pPr algn="l">
+              <a:spcAft>
+                <a:spcPts val="630"/>
+              </a:spcAft>
+            </a:pPr>
+            <a:r>
+              <a:rPr sz="1400" b="0" i="0">
+                <a:solidFill>
+                  <a:srgbClr val="1C1B19"/>
+                </a:solidFill>
+                <a:latin typeface="Source Serif 4"/>
+              </a:rPr>
+              <a:t/>
+            </a:r>
+          </a:p>
+          <a:p>
+            <a:pPr algn="l">
+              <a:spcAft>
+                <a:spcPts val="630"/>
+              </a:spcAft>
+            </a:pPr>
+            <a:r>
+              <a:rPr sz="1100" b="1" i="0">
+                <a:solidFill>
+                  <a:srgbClr val="0B2D5B"/>
+                </a:solidFill>
+                <a:latin typeface="Inter Tight"/>
+              </a:rPr>
+              <a:t>SHORT ON TIME (10-MINUTE CHECK-IN)</a:t>
+            </a:r>
+          </a:p>
+          <a:p>
+            <a:pPr algn="l">
+              <a:spcAft>
+                <a:spcPts val="630"/>
+              </a:spcAft>
+            </a:pPr>
+            <a:r>
+              <a:rPr sz="1400" b="0" i="0">
+                <a:solidFill>
+                  <a:srgbClr val="1C1B19"/>
+                </a:solidFill>
+                <a:latin typeface="Source Serif 4"/>
+              </a:rPr>
+              <a:t>Popular or liked? thumbs vote (3), anonymous yes/no cards (3), one moment in pairs, Maya or Dev (3), one move and the student page link (1). The student page has the rest of the moves and what to do if you're on the outside.</a:t>
+            </a:r>
+          </a:p>
+        </p:txBody>
+      </p:sp>
+    </p:spTree>
+  </p:cSld>
+  <p:clrMapOvr>
+    <a:masterClrMapping/>
+  </p:clrMapOvr>
+</p:sld>
+</file>
+
+<file path=ppt/slides/slide11.xml><?xml version="1.0" encoding="utf-8"?>
+<p:sld xmlns:a="http://schemas.openxmlformats.org/drawingml/2006/main" xmlns:p="http://schemas.openxmlformats.org/presentationml/2006/main" xmlns:r="http://schemas.openxmlformats.org/officeDocument/2006/relationships" show="0">
+  <p:cSld>
+    <p:bg>
+      <p:bgPr>
+        <a:solidFill>
+          <a:srgbClr val="EEEBE4"/>
+        </a:solidFill>
+        <a:effectLst/>
+      </p:bgPr>
+    </p:bg>
+    <p:spTree>
+      <p:nvGrpSpPr>
+        <p:cNvPr id="1" name=""/>
+        <p:cNvGrpSpPr/>
+        <p:nvPr/>
+      </p:nvGrpSpPr>
+      <p:grpSpPr/>
+      <p:sp>
+        <p:nvSpPr>
+          <p:cNvPr id="2" name="Rectangle 1"/>
+          <p:cNvSpPr/>
+          <p:nvPr/>
+        </p:nvSpPr>
+        <p:spPr>
+          <a:xfrm>
+            <a:off x="0" y="0"/>
+            <a:ext cx="12191695" cy="384048"/>
+          </a:xfrm>
+          <a:prstGeom prst="rect">
+            <a:avLst/>
+          </a:prstGeom>
+          <a:solidFill>
+            <a:srgbClr val="0B2D5B"/>
+          </a:solidFill>
+          <a:ln>
+            <a:noFill/>
+          </a:ln>
+          <a:effectLst/>
+        </p:spPr>
+        <p:style>
+          <a:lnRef idx="1">
+            <a:schemeClr val="accent1"/>
+          </a:lnRef>
+          <a:fillRef idx="3">
+            <a:schemeClr val="accent1"/>
+          </a:fillRef>
+          <a:effectRef idx="2">
+            <a:schemeClr val="accent1"/>
+          </a:effectRef>
+          <a:fontRef idx="minor">
+            <a:schemeClr val="lt1"/>
+          </a:fontRef>
+        </p:style>
+        <p:txBody>
+          <a:bodyPr rtlCol="0" anchor="ctr"/>
+          <a:lstStyle/>
+          <a:p>
+            <a:pPr algn="ctr"/>
+          </a:p>
+        </p:txBody>
+      </p:sp>
+      <p:sp>
+        <p:nvSpPr>
+          <p:cNvPr id="3" name="TextBox 2"/>
+          <p:cNvSpPr txBox="1"/>
+          <p:nvPr/>
+        </p:nvSpPr>
+        <p:spPr>
+          <a:xfrm>
+            <a:off x="548640" y="100584"/>
+            <a:ext cx="10972800" cy="274320"/>
+          </a:xfrm>
+          <a:prstGeom prst="rect">
+            <a:avLst/>
+          </a:prstGeom>
+          <a:noFill/>
+        </p:spPr>
+        <p:txBody>
+          <a:bodyPr wrap="square" anchor="t" lIns="0" rIns="0" tIns="0" bIns="0">
+            <a:spAutoFit/>
+          </a:bodyPr>
+          <a:lstStyle/>
+          <a:p>
+            <a:pPr algn="l">
+              <a:spcAft>
+                <a:spcPts val="495"/>
+              </a:spcAft>
+            </a:pPr>
+            <a:r>
+              <a:rPr sz="1100" b="1" i="0">
+                <a:solidFill>
+                  <a:srgbClr val="FFFFFF"/>
+                </a:solidFill>
+                <a:latin typeface="Inter Tight"/>
+              </a:rPr>
+              <a:t>TEACHER PAGE  ·  skipped when you present  ·  Before you teach</a:t>
+            </a:r>
+          </a:p>
+        </p:txBody>
+      </p:sp>
+      <p:sp>
+        <p:nvSpPr>
+          <p:cNvPr id="4" name="TextBox 3"/>
+          <p:cNvSpPr txBox="1"/>
+          <p:nvPr/>
+        </p:nvSpPr>
+        <p:spPr>
+          <a:xfrm>
+            <a:off x="548640" y="685800"/>
+            <a:ext cx="10972800" cy="640080"/>
+          </a:xfrm>
+          <a:prstGeom prst="rect">
+            <a:avLst/>
+          </a:prstGeom>
+          <a:noFill/>
+        </p:spPr>
+        <p:txBody>
+          <a:bodyPr wrap="square" anchor="t" lIns="0" rIns="0" tIns="0" bIns="0">
+            <a:spAutoFit/>
+          </a:bodyPr>
+          <a:lstStyle/>
+          <a:p>
+            <a:pPr algn="l">
+              <a:spcAft>
+                <a:spcPts val="1350"/>
+              </a:spcAft>
+            </a:pPr>
+            <a:r>
+              <a:rPr sz="3000" b="1" i="0">
+                <a:solidFill>
+                  <a:srgbClr val="1C1B19"/>
+                </a:solidFill>
+                <a:latin typeface="Source Serif 4"/>
+              </a:rPr>
+              <a:t>Before you teach</a:t>
+            </a:r>
+          </a:p>
+        </p:txBody>
+      </p:sp>
+      <p:sp>
+        <p:nvSpPr>
+          <p:cNvPr id="5" name="TextBox 4"/>
+          <p:cNvSpPr txBox="1"/>
+          <p:nvPr/>
+        </p:nvSpPr>
+        <p:spPr>
+          <a:xfrm>
+            <a:off x="548640" y="1463040"/>
+            <a:ext cx="5394960" cy="4937760"/>
+          </a:xfrm>
+          <a:prstGeom prst="rect">
+            <a:avLst/>
+          </a:prstGeom>
+          <a:noFill/>
+        </p:spPr>
+        <p:txBody>
+          <a:bodyPr wrap="square" anchor="t" lIns="0" rIns="0" tIns="0" bIns="0">
+            <a:spAutoFit/>
+          </a:bodyPr>
+          <a:lstStyle/>
+          <a:p>
+            <a:pPr algn="l">
+              <a:spcAft>
+                <a:spcPts val="585"/>
+              </a:spcAft>
+            </a:pPr>
+            <a:r>
+              <a:rPr sz="1500" b="1" i="0">
+                <a:solidFill>
+                  <a:srgbClr val="1C1B19"/>
+                </a:solidFill>
+                <a:latin typeface="Source Serif 4"/>
+              </a:rPr>
+              <a:t>Situations only, never names.</a:t>
+            </a:r>
+          </a:p>
+          <a:p>
+            <a:pPr algn="l">
+              <a:spcAft>
+                <a:spcPts val="585"/>
+              </a:spcAft>
+            </a:pPr>
+            <a:r>
+              <a:rPr sz="1300" b="0" i="0">
+                <a:solidFill>
+                  <a:srgbClr val="1C1B19"/>
+                </a:solidFill>
+                <a:latin typeface="Source Serif 4"/>
+              </a:rPr>
+              <a:t>Keep every example about situations on the slides. Don't let students name classmates, groups or chats, and don't ask anyone where they sit or who they're with. Your advisory is a friend group too, and someone in the circle may be on the outside right now, maybe with the people doing it sitting across from them.</a:t>
+            </a:r>
+          </a:p>
+          <a:p>
+            <a:pPr algn="l">
+              <a:spcAft>
+                <a:spcPts val="585"/>
+              </a:spcAft>
+            </a:pPr>
+            <a:r>
+              <a:rPr sz="1300" b="0" i="0">
+                <a:solidFill>
+                  <a:srgbClr val="1C1B19"/>
+                </a:solidFill>
+                <a:latin typeface="Source Serif 4"/>
+              </a:rPr>
+              <a:t/>
+            </a:r>
+          </a:p>
+          <a:p>
+            <a:pPr algn="l">
+              <a:spcAft>
+                <a:spcPts val="585"/>
+              </a:spcAft>
+            </a:pPr>
+            <a:r>
+              <a:rPr sz="1500" b="1" i="0">
+                <a:solidFill>
+                  <a:srgbClr val="1C1B19"/>
+                </a:solidFill>
+                <a:latin typeface="Source Serif 4"/>
+              </a:rPr>
+              <a:t>Leave a way back for the one who's done it.</a:t>
+            </a:r>
+          </a:p>
+          <a:p>
+            <a:pPr algn="l">
+              <a:spcAft>
+                <a:spcPts val="585"/>
+              </a:spcAft>
+            </a:pPr>
+            <a:r>
+              <a:rPr sz="1300" b="0" i="0">
+                <a:solidFill>
+                  <a:srgbClr val="1C1B19"/>
+                </a:solidFill>
+                <a:latin typeface="Source Serif 4"/>
+              </a:rPr>
+              <a:t>Some students will recognize themselves as the one running the side chat. Keep shame out of it so they can use what they hear: change one thing, and keep the apology short. "I left you out, and that wasn't okay. I'm sorry."</a:t>
+            </a:r>
+          </a:p>
+          <a:p>
+            <a:pPr algn="l">
+              <a:spcAft>
+                <a:spcPts val="585"/>
+              </a:spcAft>
+            </a:pPr>
+            <a:r>
+              <a:rPr sz="1300" b="0" i="0">
+                <a:solidFill>
+                  <a:srgbClr val="1C1B19"/>
+                </a:solidFill>
+                <a:latin typeface="Source Serif 4"/>
+              </a:rPr>
+              <a:t/>
+            </a:r>
+          </a:p>
+          <a:p>
+            <a:pPr algn="l">
+              <a:spcAft>
+                <a:spcPts val="585"/>
+              </a:spcAft>
+            </a:pPr>
+            <a:r>
+              <a:rPr sz="1500" b="1" i="0">
+                <a:solidFill>
+                  <a:srgbClr val="1C1B19"/>
+                </a:solidFill>
+                <a:latin typeface="Source Serif 4"/>
+              </a:rPr>
+              <a:t>Know what goes to a counselor the same day.</a:t>
+            </a:r>
+          </a:p>
+          <a:p>
+            <a:pPr algn="l">
+              <a:spcAft>
+                <a:spcPts val="585"/>
+              </a:spcAft>
+            </a:pPr>
+            <a:r>
+              <a:rPr sz="1300" b="0" i="0">
+                <a:solidFill>
+                  <a:srgbClr val="1C1B19"/>
+                </a:solidFill>
+                <a:latin typeface="Source Serif 4"/>
+              </a:rPr>
+              <a:t>Someone being outed, photos of a person (real or AI-made) being shared, threats, or the same student targeted for weeks. Also a student who is dreading school, not eating or not sleeping because of a group. Don't ask about any of this in the circle. If a student brings up a real situation, thank them, say you'd like to help privately, and follow up with a counselor that day.</a:t>
+            </a:r>
+          </a:p>
+          <a:p>
+            <a:pPr algn="l">
+              <a:spcAft>
+                <a:spcPts val="585"/>
+              </a:spcAft>
+            </a:pPr>
+            <a:r>
+              <a:rPr sz="1300" b="0" i="0">
+                <a:solidFill>
+                  <a:srgbClr val="1C1B19"/>
+                </a:solidFill>
+                <a:latin typeface="Source Serif 4"/>
+              </a:rPr>
+              <a:t/>
+            </a:r>
+          </a:p>
+        </p:txBody>
+      </p:sp>
+      <p:sp>
+        <p:nvSpPr>
+          <p:cNvPr id="6" name="TextBox 5"/>
+          <p:cNvSpPr txBox="1"/>
+          <p:nvPr/>
+        </p:nvSpPr>
+        <p:spPr>
+          <a:xfrm>
+            <a:off x="6217920" y="1463040"/>
+            <a:ext cx="5394960" cy="4937760"/>
+          </a:xfrm>
+          <a:prstGeom prst="rect">
+            <a:avLst/>
+          </a:prstGeom>
+          <a:noFill/>
+        </p:spPr>
+        <p:txBody>
+          <a:bodyPr wrap="square" anchor="t" lIns="0" rIns="0" tIns="0" bIns="0">
+            <a:spAutoFit/>
+          </a:bodyPr>
+          <a:lstStyle/>
+          <a:p>
+            <a:pPr algn="l">
+              <a:spcAft>
+                <a:spcPts val="585"/>
+              </a:spcAft>
+            </a:pPr>
+            <a:r>
+              <a:rPr sz="1500" b="1" i="0">
+                <a:solidFill>
+                  <a:srgbClr val="1C1B19"/>
+                </a:solidFill>
+                <a:latin typeface="Source Serif 4"/>
+              </a:rPr>
+              <a:t>Outing is one of the most harmful moves there is.</a:t>
+            </a:r>
+          </a:p>
+          <a:p>
+            <a:pPr algn="l">
+              <a:spcAft>
+                <a:spcPts val="585"/>
+              </a:spcAft>
+            </a:pPr>
+            <a:r>
+              <a:rPr sz="1300" b="0" i="0">
+                <a:solidFill>
+                  <a:srgbClr val="1C1B19"/>
+                </a:solidFill>
+                <a:latin typeface="Source Serif 4"/>
+              </a:rPr>
+              <a:t>If a student's gender identity or orientation is being spread around, treat it as urgent and private, never a discussion topic. Know where to point students: a counselor, The Trevor Project (call 1-866-488-7386 or text START to 678-678), and Trans Lifeline (877-565-8860).</a:t>
+            </a:r>
+          </a:p>
+          <a:p>
+            <a:pPr algn="l">
+              <a:spcAft>
+                <a:spcPts val="585"/>
+              </a:spcAft>
+            </a:pPr>
+            <a:r>
+              <a:rPr sz="1300" b="0" i="0">
+                <a:solidFill>
+                  <a:srgbClr val="1C1B19"/>
+                </a:solidFill>
+                <a:latin typeface="Source Serif 4"/>
+              </a:rPr>
+              <a:t/>
+            </a:r>
+          </a:p>
+          <a:p>
+            <a:pPr algn="l">
+              <a:spcAft>
+                <a:spcPts val="585"/>
+              </a:spcAft>
+            </a:pPr>
+            <a:r>
+              <a:rPr sz="1500" b="1" i="0">
+                <a:solidFill>
+                  <a:srgbClr val="1C1B19"/>
+                </a:solidFill>
+                <a:latin typeface="Source Serif 4"/>
+              </a:rPr>
+              <a:t>When the talk turns to "girls are like this."</a:t>
+            </a:r>
+          </a:p>
+          <a:p>
+            <a:pPr algn="l">
+              <a:spcAft>
+                <a:spcPts val="585"/>
+              </a:spcAft>
+            </a:pPr>
+            <a:r>
+              <a:rPr sz="1300" b="0" i="0">
+                <a:solidFill>
+                  <a:srgbClr val="1C1B19"/>
+                </a:solidFill>
+                <a:latin typeface="Source Serif 4"/>
+              </a:rPr>
+              <a:t>Or "guys are like this." Bring in the research: across 148 studies the gender difference was trivial, and most people of every gender don't run their friendships this way. Students who hear their group mocked will stop talking.</a:t>
+            </a:r>
+          </a:p>
+          <a:p>
+            <a:pPr algn="l">
+              <a:spcAft>
+                <a:spcPts val="585"/>
+              </a:spcAft>
+            </a:pPr>
+            <a:r>
+              <a:rPr sz="1300" b="0" i="0">
+                <a:solidFill>
+                  <a:srgbClr val="1C1B19"/>
+                </a:solidFill>
+                <a:latin typeface="Source Serif 4"/>
+              </a:rPr>
+              <a:t/>
+            </a:r>
+          </a:p>
+          <a:p>
+            <a:pPr algn="l">
+              <a:spcAft>
+                <a:spcPts val="585"/>
+              </a:spcAft>
+            </a:pPr>
+            <a:r>
+              <a:rPr sz="1500" b="1" i="0">
+                <a:solidFill>
+                  <a:srgbClr val="1C1B19"/>
+                </a:solidFill>
+                <a:latin typeface="Source Serif 4"/>
+              </a:rPr>
+              <a:t>No self-harm questions in the circle.</a:t>
+            </a:r>
+          </a:p>
+          <a:p>
+            <a:pPr algn="l">
+              <a:spcAft>
+                <a:spcPts val="585"/>
+              </a:spcAft>
+            </a:pPr>
+            <a:r>
+              <a:rPr sz="1300" b="0" i="0">
+                <a:solidFill>
+                  <a:srgbClr val="1C1B19"/>
+                </a:solidFill>
+                <a:latin typeface="Source Serif 4"/>
+              </a:rPr>
+              <a:t>Being shut out can hit hard. If a student says something that worries you, check in privately after advisory and walk them to a counselor. Any disclosure goes to a counselor, and 988 (call or text) is open any time.</a:t>
+            </a:r>
+          </a:p>
+          <a:p>
+            <a:pPr algn="l">
+              <a:spcAft>
+                <a:spcPts val="585"/>
+              </a:spcAft>
+            </a:pPr>
+            <a:r>
+              <a:rPr sz="1300" b="0" i="0">
+                <a:solidFill>
+                  <a:srgbClr val="1C1B19"/>
+                </a:solidFill>
+                <a:latin typeface="Source Serif 4"/>
+              </a:rPr>
+              <a:t/>
+            </a:r>
+          </a:p>
+        </p:txBody>
+      </p:sp>
+    </p:spTree>
+  </p:cSld>
+  <p:clrMapOvr>
+    <a:masterClrMapping/>
+  </p:clrMapOvr>
+</p:sld>
+</file>
+
+<file path=ppt/slides/slide12.xml><?xml version="1.0" encoding="utf-8"?>
+<p:sld xmlns:a="http://schemas.openxmlformats.org/drawingml/2006/main" xmlns:p="http://schemas.openxmlformats.org/presentationml/2006/main" xmlns:r="http://schemas.openxmlformats.org/officeDocument/2006/relationships" show="0">
+  <p:cSld>
+    <p:bg>
+      <p:bgPr>
+        <a:solidFill>
+          <a:srgbClr val="EEEBE4"/>
+        </a:solidFill>
+        <a:effectLst/>
+      </p:bgPr>
+    </p:bg>
+    <p:spTree>
+      <p:nvGrpSpPr>
+        <p:cNvPr id="1" name=""/>
+        <p:cNvGrpSpPr/>
+        <p:nvPr/>
+      </p:nvGrpSpPr>
+      <p:grpSpPr/>
+      <p:sp>
+        <p:nvSpPr>
+          <p:cNvPr id="2" name="Rectangle 1"/>
+          <p:cNvSpPr/>
+          <p:nvPr/>
+        </p:nvSpPr>
+        <p:spPr>
+          <a:xfrm>
+            <a:off x="0" y="0"/>
+            <a:ext cx="12191695" cy="384048"/>
+          </a:xfrm>
+          <a:prstGeom prst="rect">
+            <a:avLst/>
+          </a:prstGeom>
+          <a:solidFill>
+            <a:srgbClr val="0B2D5B"/>
+          </a:solidFill>
+          <a:ln>
+            <a:noFill/>
+          </a:ln>
+          <a:effectLst/>
+        </p:spPr>
+        <p:style>
+          <a:lnRef idx="1">
+            <a:schemeClr val="accent1"/>
+          </a:lnRef>
+          <a:fillRef idx="3">
+            <a:schemeClr val="accent1"/>
+          </a:fillRef>
+          <a:effectRef idx="2">
+            <a:schemeClr val="accent1"/>
+          </a:effectRef>
+          <a:fontRef idx="minor">
+            <a:schemeClr val="lt1"/>
+          </a:fontRef>
+        </p:style>
+        <p:txBody>
+          <a:bodyPr rtlCol="0" anchor="ctr"/>
+          <a:lstStyle/>
+          <a:p>
+            <a:pPr algn="ctr"/>
+          </a:p>
+        </p:txBody>
+      </p:sp>
+      <p:sp>
+        <p:nvSpPr>
+          <p:cNvPr id="3" name="TextBox 2"/>
+          <p:cNvSpPr txBox="1"/>
+          <p:nvPr/>
+        </p:nvSpPr>
+        <p:spPr>
+          <a:xfrm>
+            <a:off x="548640" y="100584"/>
+            <a:ext cx="10972800" cy="274320"/>
+          </a:xfrm>
+          <a:prstGeom prst="rect">
+            <a:avLst/>
+          </a:prstGeom>
+          <a:noFill/>
+        </p:spPr>
+        <p:txBody>
+          <a:bodyPr wrap="square" anchor="t" lIns="0" rIns="0" tIns="0" bIns="0">
+            <a:spAutoFit/>
+          </a:bodyPr>
+          <a:lstStyle/>
+          <a:p>
+            <a:pPr algn="l">
+              <a:spcAft>
+                <a:spcPts val="495"/>
+              </a:spcAft>
+            </a:pPr>
+            <a:r>
+              <a:rPr sz="1100" b="1" i="0">
+                <a:solidFill>
+                  <a:srgbClr val="FFFFFF"/>
+                </a:solidFill>
+                <a:latin typeface="Inter Tight"/>
+              </a:rPr>
+              <a:t>TEACHER PAGE  ·  skipped when you present  ·  Every student in the room</a:t>
+            </a:r>
+          </a:p>
+        </p:txBody>
+      </p:sp>
+      <p:sp>
+        <p:nvSpPr>
+          <p:cNvPr id="4" name="TextBox 3"/>
+          <p:cNvSpPr txBox="1"/>
+          <p:nvPr/>
+        </p:nvSpPr>
+        <p:spPr>
+          <a:xfrm>
+            <a:off x="548640" y="685800"/>
+            <a:ext cx="10972800" cy="640080"/>
+          </a:xfrm>
+          <a:prstGeom prst="rect">
+            <a:avLst/>
+          </a:prstGeom>
+          <a:noFill/>
+        </p:spPr>
+        <p:txBody>
+          <a:bodyPr wrap="square" anchor="t" lIns="0" rIns="0" tIns="0" bIns="0">
+            <a:spAutoFit/>
+          </a:bodyPr>
+          <a:lstStyle/>
+          <a:p>
+            <a:pPr algn="l">
+              <a:spcAft>
+                <a:spcPts val="1350"/>
+              </a:spcAft>
+            </a:pPr>
+            <a:r>
+              <a:rPr sz="3000" b="1" i="0">
+                <a:solidFill>
+                  <a:srgbClr val="1C1B19"/>
+                </a:solidFill>
+                <a:latin typeface="Source Serif 4"/>
+              </a:rPr>
+              <a:t>Every student in the room</a:t>
+            </a:r>
+          </a:p>
+        </p:txBody>
+      </p:sp>
+      <p:sp>
+        <p:nvSpPr>
+          <p:cNvPr id="5" name="TextBox 4"/>
+          <p:cNvSpPr txBox="1"/>
+          <p:nvPr/>
+        </p:nvSpPr>
+        <p:spPr>
+          <a:xfrm>
+            <a:off x="548640" y="1325880"/>
+            <a:ext cx="10972800" cy="365760"/>
+          </a:xfrm>
+          <a:prstGeom prst="rect">
+            <a:avLst/>
+          </a:prstGeom>
+          <a:noFill/>
+        </p:spPr>
+        <p:txBody>
+          <a:bodyPr wrap="square" anchor="t" lIns="0" rIns="0" tIns="0" bIns="0">
+            <a:spAutoFit/>
+          </a:bodyPr>
+          <a:lstStyle/>
+          <a:p>
+            <a:pPr algn="l">
+              <a:spcAft>
+                <a:spcPts val="630"/>
+              </a:spcAft>
+            </a:pPr>
+            <a:r>
+              <a:rPr sz="1400" b="0" i="0">
+                <a:solidFill>
+                  <a:srgbClr val="5D5A54"/>
+                </a:solidFill>
+                <a:latin typeface="Inter Tight"/>
+              </a:rPr>
+              <a:t>Culture, family, identity, ability and money: what to keep in mind for this topic.</a:t>
+            </a:r>
+          </a:p>
+        </p:txBody>
+      </p:sp>
+      <p:sp>
+        <p:nvSpPr>
+          <p:cNvPr id="6" name="TextBox 5"/>
+          <p:cNvSpPr txBox="1"/>
+          <p:nvPr/>
+        </p:nvSpPr>
+        <p:spPr>
+          <a:xfrm>
+            <a:off x="548640" y="1828800"/>
+            <a:ext cx="5394960" cy="4572000"/>
+          </a:xfrm>
+          <a:prstGeom prst="rect">
+            <a:avLst/>
+          </a:prstGeom>
+          <a:noFill/>
+        </p:spPr>
+        <p:txBody>
+          <a:bodyPr wrap="square" anchor="t" lIns="0" rIns="0" tIns="0" bIns="0">
+            <a:spAutoFit/>
+          </a:bodyPr>
+          <a:lstStyle/>
+          <a:p>
+            <a:pPr algn="l">
+              <a:spcAft>
+                <a:spcPts val="585"/>
+              </a:spcAft>
+            </a:pPr>
+            <a:r>
+              <a:rPr sz="1500" b="1" i="0">
+                <a:solidFill>
+                  <a:srgbClr val="1C1B19"/>
+                </a:solidFill>
+                <a:latin typeface="Source Serif 4"/>
+              </a:rPr>
+              <a:t>Every gender plays, and none is the villain.</a:t>
+            </a:r>
+          </a:p>
+          <a:p>
+            <a:pPr algn="l">
+              <a:spcAft>
+                <a:spcPts val="585"/>
+              </a:spcAft>
+            </a:pPr>
+            <a:r>
+              <a:rPr sz="1300" b="0" i="0">
+                <a:solidFill>
+                  <a:srgbClr val="1C1B19"/>
+                </a:solidFill>
+                <a:latin typeface="Source Serif 4"/>
+              </a:rPr>
+              <a:t>Present the quiet moves and the loud moves as patterns that show up in any group. Girls can be loud, competitive and ambitious; guys can be gentle and close with their friends. If the circle starts sorting people into "mean girls" and "meathead guys," say so and point back to the 148 studies.</a:t>
+            </a:r>
+          </a:p>
+          <a:p>
+            <a:pPr algn="l">
+              <a:spcAft>
+                <a:spcPts val="585"/>
+              </a:spcAft>
+            </a:pPr>
+            <a:r>
+              <a:rPr sz="1300" b="0" i="0">
+                <a:solidFill>
+                  <a:srgbClr val="1C1B19"/>
+                </a:solidFill>
+                <a:latin typeface="Source Serif 4"/>
+              </a:rPr>
+              <a:t/>
+            </a:r>
+          </a:p>
+          <a:p>
+            <a:pPr algn="l">
+              <a:spcAft>
+                <a:spcPts val="585"/>
+              </a:spcAft>
+            </a:pPr>
+            <a:r>
+              <a:rPr sz="1500" b="1" i="0">
+                <a:solidFill>
+                  <a:srgbClr val="1C1B19"/>
+                </a:solidFill>
+                <a:latin typeface="Source Serif 4"/>
+              </a:rPr>
+              <a:t>Trans and nonbinary students can land outside both scripts.</a:t>
+            </a:r>
+          </a:p>
+          <a:p>
+            <a:pPr algn="l">
+              <a:spcAft>
+                <a:spcPts val="585"/>
+              </a:spcAft>
+            </a:pPr>
+            <a:r>
+              <a:rPr sz="1300" b="0" i="0">
+                <a:solidFill>
+                  <a:srgbClr val="1C1B19"/>
+                </a:solidFill>
+                <a:latin typeface="Source Serif 4"/>
+              </a:rPr>
+              <a:t>Many friend groups are quietly sorted by gender, so a trans or nonbinary student may feel the group deciding which "side" they belong on. Don't ask anyone to speak for that experience. Use the scenarios as written and keep identity talk general.</a:t>
+            </a:r>
+          </a:p>
+          <a:p>
+            <a:pPr algn="l">
+              <a:spcAft>
+                <a:spcPts val="585"/>
+              </a:spcAft>
+            </a:pPr>
+            <a:r>
+              <a:rPr sz="1300" b="0" i="0">
+                <a:solidFill>
+                  <a:srgbClr val="1C1B19"/>
+                </a:solidFill>
+                <a:latin typeface="Source Serif 4"/>
+              </a:rPr>
+              <a:t/>
+            </a:r>
+          </a:p>
+          <a:p>
+            <a:pPr algn="l">
+              <a:spcAft>
+                <a:spcPts val="585"/>
+              </a:spcAft>
+            </a:pPr>
+            <a:r>
+              <a:rPr sz="1500" b="1" i="0">
+                <a:solidFill>
+                  <a:srgbClr val="1C1B19"/>
+                </a:solidFill>
+                <a:latin typeface="Source Serif 4"/>
+              </a:rPr>
+              <a:t>"Soft" and anti-gay insults are power moves.</a:t>
+            </a:r>
+          </a:p>
+          <a:p>
+            <a:pPr algn="l">
+              <a:spcAft>
+                <a:spcPts val="585"/>
+              </a:spcAft>
+            </a:pPr>
+            <a:r>
+              <a:rPr sz="1300" b="0" i="0">
+                <a:solidFill>
+                  <a:srgbClr val="1C1B19"/>
+                </a:solidFill>
+                <a:latin typeface="Source Serif 4"/>
+              </a:rPr>
+              <a:t>Pascoe found these words were used mostly to police who counts as a "real guy," whatever anyone's orientation. Name that plainly so gay, bi and questioning students hear the adult in the room treat it as a power move.</a:t>
+            </a:r>
+          </a:p>
+          <a:p>
+            <a:pPr algn="l">
+              <a:spcAft>
+                <a:spcPts val="585"/>
+              </a:spcAft>
+            </a:pPr>
+            <a:r>
+              <a:rPr sz="1300" b="0" i="0">
+                <a:solidFill>
+                  <a:srgbClr val="1C1B19"/>
+                </a:solidFill>
+                <a:latin typeface="Source Serif 4"/>
+              </a:rPr>
+              <a:t/>
+            </a:r>
+          </a:p>
+        </p:txBody>
+      </p:sp>
+      <p:sp>
+        <p:nvSpPr>
+          <p:cNvPr id="7" name="TextBox 6"/>
+          <p:cNvSpPr txBox="1"/>
+          <p:nvPr/>
+        </p:nvSpPr>
+        <p:spPr>
+          <a:xfrm>
+            <a:off x="6217920" y="1828800"/>
+            <a:ext cx="5394960" cy="4572000"/>
+          </a:xfrm>
+          <a:prstGeom prst="rect">
+            <a:avLst/>
+          </a:prstGeom>
+          <a:noFill/>
+        </p:spPr>
+        <p:txBody>
+          <a:bodyPr wrap="square" anchor="t" lIns="0" rIns="0" tIns="0" bIns="0">
+            <a:spAutoFit/>
+          </a:bodyPr>
+          <a:lstStyle/>
+          <a:p>
+            <a:pPr algn="l">
+              <a:spcAft>
+                <a:spcPts val="585"/>
+              </a:spcAft>
+            </a:pPr>
+            <a:r>
+              <a:rPr sz="1500" b="1" i="0">
+                <a:solidFill>
+                  <a:srgbClr val="1C1B19"/>
+                </a:solidFill>
+                <a:latin typeface="Source Serif 4"/>
+              </a:rPr>
+              <a:t>Loyalty means different things in different families.</a:t>
+            </a:r>
+          </a:p>
+          <a:p>
+            <a:pPr algn="l">
+              <a:spcAft>
+                <a:spcPts val="585"/>
+              </a:spcAft>
+            </a:pPr>
+            <a:r>
+              <a:rPr sz="1300" b="0" i="0">
+                <a:solidFill>
+                  <a:srgbClr val="1C1B19"/>
+                </a:solidFill>
+                <a:latin typeface="Source Serif 4"/>
+              </a:rPr>
+              <a:t>In some families friends become family; in others private things stay private. Avoid "In X families" generalizations. Ask students what they were taught about loyalty, privately, and treat every answer as valid. Students of color in a mostly white grade, and students new to Beaver or new to the country, may carry extra pressure to fit the group's idea of how to act.</a:t>
+            </a:r>
+          </a:p>
+          <a:p>
+            <a:pPr algn="l">
+              <a:spcAft>
+                <a:spcPts val="585"/>
+              </a:spcAft>
+            </a:pPr>
+            <a:r>
+              <a:rPr sz="1300" b="0" i="0">
+                <a:solidFill>
+                  <a:srgbClr val="1C1B19"/>
+                </a:solidFill>
+                <a:latin typeface="Source Serif 4"/>
+              </a:rPr>
+              <a:t/>
+            </a:r>
+          </a:p>
+          <a:p>
+            <a:pPr algn="l">
+              <a:spcAft>
+                <a:spcPts val="585"/>
+              </a:spcAft>
+            </a:pPr>
+            <a:r>
+              <a:rPr sz="1500" b="1" i="0">
+                <a:solidFill>
+                  <a:srgbClr val="1C1B19"/>
+                </a:solidFill>
+                <a:latin typeface="Source Serif 4"/>
+              </a:rPr>
+              <a:t>Groups often form around money.</a:t>
+            </a:r>
+          </a:p>
+          <a:p>
+            <a:pPr algn="l">
+              <a:spcAft>
+                <a:spcPts val="585"/>
+              </a:spcAft>
+            </a:pPr>
+            <a:r>
+              <a:rPr sz="1300" b="0" i="0">
+                <a:solidFill>
+                  <a:srgbClr val="1C1B19"/>
+                </a:solidFill>
+                <a:latin typeface="Source Serif 4"/>
+              </a:rPr>
+              <a:t>Prom groups, formal tables, rides and weekend plans can quietly sort people by who has a car or spending money. "Keep more than one circle" includes a job, cousins, a youth group or online friends, so students who work or care for siblings hear their circles counted.</a:t>
+            </a:r>
+          </a:p>
+          <a:p>
+            <a:pPr algn="l">
+              <a:spcAft>
+                <a:spcPts val="585"/>
+              </a:spcAft>
+            </a:pPr>
+            <a:r>
+              <a:rPr sz="1300" b="0" i="0">
+                <a:solidFill>
+                  <a:srgbClr val="1C1B19"/>
+                </a:solidFill>
+                <a:latin typeface="Source Serif 4"/>
+              </a:rPr>
+              <a:t/>
+            </a:r>
+          </a:p>
+          <a:p>
+            <a:pPr algn="l">
+              <a:spcAft>
+                <a:spcPts val="585"/>
+              </a:spcAft>
+            </a:pPr>
+            <a:r>
+              <a:rPr sz="1500" b="1" i="0">
+                <a:solidFill>
+                  <a:srgbClr val="1C1B19"/>
+                </a:solidFill>
+                <a:latin typeface="Source Serif 4"/>
+              </a:rPr>
+              <a:t>The freeze-out is harder for some students to read.</a:t>
+            </a:r>
+          </a:p>
+          <a:p>
+            <a:pPr algn="l">
+              <a:spcAft>
+                <a:spcPts val="585"/>
+              </a:spcAft>
+            </a:pPr>
+            <a:r>
+              <a:rPr sz="1300" b="0" i="0">
+                <a:solidFill>
+                  <a:srgbClr val="1C1B19"/>
+                </a:solidFill>
+                <a:latin typeface="Source Serif 4"/>
+              </a:rPr>
+              <a:t>Autistic students and students with social anxiety may miss quiet cues, or read every silence as rejection. Say that asking the person directly ("Is something going on with us?") is a strong move for everyone. Let students show a thumbs vote at their desk, without having to speak.</a:t>
+            </a:r>
+          </a:p>
+          <a:p>
+            <a:pPr algn="l">
+              <a:spcAft>
+                <a:spcPts val="585"/>
+              </a:spcAft>
+            </a:pPr>
+            <a:r>
+              <a:rPr sz="1300" b="0" i="0">
+                <a:solidFill>
+                  <a:srgbClr val="1C1B19"/>
+                </a:solidFill>
+                <a:latin typeface="Source Serif 4"/>
+              </a:rPr>
+              <a:t/>
+            </a:r>
+          </a:p>
+        </p:txBody>
+      </p:sp>
+    </p:spTree>
+  </p:cSld>
+  <p:clrMapOvr>
+    <a:masterClrMapping/>
+  </p:clrMapOvr>
+</p:sld>
+</file>
+
+<file path=ppt/slides/slide13.xml><?xml version="1.0" encoding="utf-8"?>
+<p:sld xmlns:a="http://schemas.openxmlformats.org/drawingml/2006/main" xmlns:p="http://schemas.openxmlformats.org/presentationml/2006/main" xmlns:r="http://schemas.openxmlformats.org/officeDocument/2006/relationships" show="0">
+  <p:cSld>
+    <p:bg>
+      <p:bgPr>
+        <a:solidFill>
+          <a:srgbClr val="EEEBE4"/>
+        </a:solidFill>
+        <a:effectLst/>
+      </p:bgPr>
+    </p:bg>
+    <p:spTree>
+      <p:nvGrpSpPr>
+        <p:cNvPr id="1" name=""/>
+        <p:cNvGrpSpPr/>
+        <p:nvPr/>
+      </p:nvGrpSpPr>
+      <p:grpSpPr/>
+      <p:sp>
+        <p:nvSpPr>
+          <p:cNvPr id="2" name="Rectangle 1"/>
+          <p:cNvSpPr/>
+          <p:nvPr/>
+        </p:nvSpPr>
+        <p:spPr>
+          <a:xfrm>
+            <a:off x="0" y="0"/>
+            <a:ext cx="12191695" cy="384048"/>
+          </a:xfrm>
+          <a:prstGeom prst="rect">
+            <a:avLst/>
+          </a:prstGeom>
+          <a:solidFill>
+            <a:srgbClr val="0B2D5B"/>
+          </a:solidFill>
+          <a:ln>
+            <a:noFill/>
+          </a:ln>
+          <a:effectLst/>
+        </p:spPr>
+        <p:style>
+          <a:lnRef idx="1">
+            <a:schemeClr val="accent1"/>
+          </a:lnRef>
+          <a:fillRef idx="3">
+            <a:schemeClr val="accent1"/>
+          </a:fillRef>
+          <a:effectRef idx="2">
+            <a:schemeClr val="accent1"/>
+          </a:effectRef>
+          <a:fontRef idx="minor">
+            <a:schemeClr val="lt1"/>
+          </a:fontRef>
+        </p:style>
+        <p:txBody>
+          <a:bodyPr rtlCol="0" anchor="ctr"/>
+          <a:lstStyle/>
+          <a:p>
+            <a:pPr algn="ctr"/>
+          </a:p>
+        </p:txBody>
+      </p:sp>
+      <p:sp>
+        <p:nvSpPr>
+          <p:cNvPr id="3" name="TextBox 2"/>
+          <p:cNvSpPr txBox="1"/>
+          <p:nvPr/>
+        </p:nvSpPr>
+        <p:spPr>
+          <a:xfrm>
+            <a:off x="548640" y="100584"/>
+            <a:ext cx="10972800" cy="274320"/>
+          </a:xfrm>
+          <a:prstGeom prst="rect">
+            <a:avLst/>
+          </a:prstGeom>
+          <a:noFill/>
+        </p:spPr>
+        <p:txBody>
+          <a:bodyPr wrap="square" anchor="t" lIns="0" rIns="0" tIns="0" bIns="0">
+            <a:spAutoFit/>
+          </a:bodyPr>
+          <a:lstStyle/>
+          <a:p>
+            <a:pPr algn="l">
+              <a:spcAft>
+                <a:spcPts val="495"/>
+              </a:spcAft>
+            </a:pPr>
+            <a:r>
+              <a:rPr sz="1100" b="1" i="0">
+                <a:solidFill>
+                  <a:srgbClr val="FFFFFF"/>
+                </a:solidFill>
+                <a:latin typeface="Inter Tight"/>
+              </a:rPr>
+              <a:t>TEACHER PAGE  ·  skipped when you present  ·  Background</a:t>
+            </a:r>
+          </a:p>
+        </p:txBody>
+      </p:sp>
+      <p:sp>
+        <p:nvSpPr>
+          <p:cNvPr id="4" name="TextBox 3"/>
+          <p:cNvSpPr txBox="1"/>
+          <p:nvPr/>
+        </p:nvSpPr>
+        <p:spPr>
+          <a:xfrm>
+            <a:off x="548640" y="685800"/>
+            <a:ext cx="10972800" cy="640080"/>
+          </a:xfrm>
+          <a:prstGeom prst="rect">
+            <a:avLst/>
+          </a:prstGeom>
+          <a:noFill/>
+        </p:spPr>
+        <p:txBody>
+          <a:bodyPr wrap="square" anchor="t" lIns="0" rIns="0" tIns="0" bIns="0">
+            <a:spAutoFit/>
+          </a:bodyPr>
+          <a:lstStyle/>
+          <a:p>
+            <a:pPr algn="l">
+              <a:spcAft>
+                <a:spcPts val="1350"/>
+              </a:spcAft>
+            </a:pPr>
+            <a:r>
+              <a:rPr sz="3000" b="1" i="0">
+                <a:solidFill>
+                  <a:srgbClr val="1C1B19"/>
+                </a:solidFill>
+                <a:latin typeface="Source Serif 4"/>
+              </a:rPr>
+              <a:t>What the research says</a:t>
+            </a:r>
+          </a:p>
+        </p:txBody>
+      </p:sp>
+      <p:sp>
+        <p:nvSpPr>
+          <p:cNvPr id="5" name="TextBox 4"/>
+          <p:cNvSpPr txBox="1"/>
+          <p:nvPr/>
+        </p:nvSpPr>
+        <p:spPr>
+          <a:xfrm>
+            <a:off x="548640" y="1463040"/>
+            <a:ext cx="5394960" cy="4937760"/>
+          </a:xfrm>
+          <a:prstGeom prst="rect">
+            <a:avLst/>
+          </a:prstGeom>
+          <a:noFill/>
+        </p:spPr>
+        <p:txBody>
+          <a:bodyPr wrap="square" anchor="t" lIns="0" rIns="0" tIns="0" bIns="0">
+            <a:spAutoFit/>
+          </a:bodyPr>
+          <a:lstStyle/>
+          <a:p>
+            <a:pPr algn="l">
+              <a:spcAft>
+                <a:spcPts val="585"/>
+              </a:spcAft>
+            </a:pPr>
+            <a:r>
+              <a:rPr sz="1300" b="0" i="0">
+                <a:solidFill>
+                  <a:srgbClr val="1C1B19"/>
+                </a:solidFill>
+                <a:latin typeface="Source Serif 4"/>
+              </a:rPr>
+              <a:t>When students name who is popular and who they like, the lists overlap but don't match. Perceived popularity and being liked are two separate measures.</a:t>
+            </a:r>
+          </a:p>
+          <a:p>
+            <a:pPr algn="l">
+              <a:spcAft>
+                <a:spcPts val="585"/>
+              </a:spcAft>
+            </a:pPr>
+            <a:r>
+              <a:rPr sz="1050" b="0" i="0">
+                <a:solidFill>
+                  <a:srgbClr val="5D5A54"/>
+                </a:solidFill>
+                <a:latin typeface="Inter Tight"/>
+              </a:rPr>
+              <a:t>Parkhurst and Hopmeyer, Journal of Early Adolescence, 1998</a:t>
+            </a:r>
+          </a:p>
+          <a:p>
+            <a:pPr algn="l">
+              <a:spcAft>
+                <a:spcPts val="585"/>
+              </a:spcAft>
+            </a:pPr>
+            <a:r>
+              <a:rPr sz="1300" b="0" i="0">
+                <a:solidFill>
+                  <a:srgbClr val="1C1B19"/>
+                </a:solidFill>
+                <a:latin typeface="Source Serif 4"/>
+              </a:rPr>
+              <a:t>Following about 300 students every year from 5th to 12th grade, researchers found that leaving people out and spreading rumors raised how popular a student seemed and lowered how much they were liked. The trade-off was strongest for girls and peaked during the move to high school.</a:t>
+            </a:r>
+          </a:p>
+          <a:p>
+            <a:pPr algn="l">
+              <a:spcAft>
+                <a:spcPts val="585"/>
+              </a:spcAft>
+            </a:pPr>
+            <a:r>
+              <a:rPr sz="1050" b="0" i="0">
+                <a:solidFill>
+                  <a:srgbClr val="5D5A54"/>
+                </a:solidFill>
+                <a:latin typeface="Inter Tight"/>
+              </a:rPr>
+              <a:t>Cillessen and Borch, Journal of Adolescence, 2006</a:t>
+            </a:r>
+          </a:p>
+          <a:p>
+            <a:pPr algn="l">
+              <a:spcAft>
+                <a:spcPts val="585"/>
+              </a:spcAft>
+            </a:pPr>
+            <a:r>
+              <a:rPr sz="1300" b="0" i="0">
+                <a:solidFill>
+                  <a:srgbClr val="1C1B19"/>
+                </a:solidFill>
+                <a:latin typeface="Source Serif 4"/>
+              </a:rPr>
+              <a:t>Hurting someone through their relationships instead of with fists was named relational aggression in 1995.</a:t>
+            </a:r>
+          </a:p>
+          <a:p>
+            <a:pPr algn="l">
+              <a:spcAft>
+                <a:spcPts val="585"/>
+              </a:spcAft>
+            </a:pPr>
+            <a:r>
+              <a:rPr sz="1050" b="0" i="0">
+                <a:solidFill>
+                  <a:srgbClr val="5D5A54"/>
+                </a:solidFill>
+                <a:latin typeface="Inter Tight"/>
+              </a:rPr>
+              <a:t>Crick and Grotpeter, Child Development, 1995</a:t>
+            </a:r>
+          </a:p>
+          <a:p>
+            <a:pPr algn="l">
+              <a:spcAft>
+                <a:spcPts val="585"/>
+              </a:spcAft>
+            </a:pPr>
+            <a:r>
+              <a:rPr sz="1300" b="0" i="0">
+                <a:solidFill>
+                  <a:srgbClr val="1C1B19"/>
+                </a:solidFill>
+                <a:latin typeface="Source Serif 4"/>
+              </a:rPr>
+              <a:t>A review of 148 studies and about 74,000 kids found girls use relational aggression only slightly more than boys, a difference the authors called trivial. Boys also fight physically more.</a:t>
+            </a:r>
+          </a:p>
+          <a:p>
+            <a:pPr algn="l">
+              <a:spcAft>
+                <a:spcPts val="585"/>
+              </a:spcAft>
+            </a:pPr>
+            <a:r>
+              <a:rPr sz="1050" b="0" i="0">
+                <a:solidFill>
+                  <a:srgbClr val="5D5A54"/>
+                </a:solidFill>
+                <a:latin typeface="Inter Tight"/>
+              </a:rPr>
+              <a:t>Card, Stucky, Sawalani and Little, Child Development, 2008</a:t>
+            </a:r>
+          </a:p>
+        </p:txBody>
+      </p:sp>
+      <p:sp>
+        <p:nvSpPr>
+          <p:cNvPr id="6" name="TextBox 5"/>
+          <p:cNvSpPr txBox="1"/>
+          <p:nvPr/>
+        </p:nvSpPr>
+        <p:spPr>
+          <a:xfrm>
+            <a:off x="6217920" y="1463040"/>
+            <a:ext cx="5394960" cy="4937760"/>
+          </a:xfrm>
+          <a:prstGeom prst="rect">
+            <a:avLst/>
+          </a:prstGeom>
+          <a:noFill/>
+        </p:spPr>
+        <p:txBody>
+          <a:bodyPr wrap="square" anchor="t" lIns="0" rIns="0" tIns="0" bIns="0">
+            <a:spAutoFit/>
+          </a:bodyPr>
+          <a:lstStyle/>
+          <a:p>
+            <a:pPr algn="l">
+              <a:spcAft>
+                <a:spcPts val="585"/>
+              </a:spcAft>
+            </a:pPr>
+            <a:r>
+              <a:rPr sz="1300" b="0" i="0">
+                <a:solidFill>
+                  <a:srgbClr val="1C1B19"/>
+                </a:solidFill>
+                <a:latin typeface="Source Serif 4"/>
+              </a:rPr>
+              <a:t>In 18 months at a California high school, a sociologist found guys used anti-gay insults mostly to police who counted as a "real guy," whatever anyone's orientation.</a:t>
+            </a:r>
+          </a:p>
+          <a:p>
+            <a:pPr algn="l">
+              <a:spcAft>
+                <a:spcPts val="585"/>
+              </a:spcAft>
+            </a:pPr>
+            <a:r>
+              <a:rPr sz="1050" b="0" i="0">
+                <a:solidFill>
+                  <a:srgbClr val="5D5A54"/>
+                </a:solidFill>
+                <a:latin typeface="Inter Tight"/>
+              </a:rPr>
+              <a:t>Pascoe, Dude, You're a F*g, 2007</a:t>
+            </a:r>
+          </a:p>
+          <a:p>
+            <a:pPr algn="l">
+              <a:spcAft>
+                <a:spcPts val="585"/>
+              </a:spcAft>
+            </a:pPr>
+            <a:r>
+              <a:rPr sz="1300" b="0" i="0">
+                <a:solidFill>
+                  <a:srgbClr val="1C1B19"/>
+                </a:solidFill>
+                <a:latin typeface="Source Serif 4"/>
+              </a:rPr>
+              <a:t>Kids who chased status at 13 by acting older were seen as cool. By their early 20s they had more trouble in close relationships and more problems with alcohol, drugs and the law than their peers.</a:t>
+            </a:r>
+          </a:p>
+          <a:p>
+            <a:pPr algn="l">
+              <a:spcAft>
+                <a:spcPts val="585"/>
+              </a:spcAft>
+            </a:pPr>
+            <a:r>
+              <a:rPr sz="1050" b="0" i="0">
+                <a:solidFill>
+                  <a:srgbClr val="5D5A54"/>
+                </a:solidFill>
+                <a:latin typeface="Inter Tight"/>
+              </a:rPr>
+              <a:t>Allen, Schad, Oudekerk and Chango, Child Development, 2014</a:t>
+            </a:r>
+          </a:p>
+          <a:p>
+            <a:pPr algn="l">
+              <a:spcAft>
+                <a:spcPts val="585"/>
+              </a:spcAft>
+            </a:pPr>
+            <a:r>
+              <a:rPr sz="1300" b="0" i="0">
+                <a:solidFill>
+                  <a:srgbClr val="1C1B19"/>
+                </a:solidFill>
+                <a:latin typeface="Source Serif 4"/>
+              </a:rPr>
+              <a:t>When other players stopped throwing to them in an online game of catch, people showed activity in a brain area that also responds to physical pain, and it tracked how upset they felt. Scientists still debate how close the overlap is.</a:t>
+            </a:r>
+          </a:p>
+          <a:p>
+            <a:pPr algn="l">
+              <a:spcAft>
+                <a:spcPts val="585"/>
+              </a:spcAft>
+            </a:pPr>
+            <a:r>
+              <a:rPr sz="1050" b="0" i="0">
+                <a:solidFill>
+                  <a:srgbClr val="5D5A54"/>
+                </a:solidFill>
+                <a:latin typeface="Inter Tight"/>
+              </a:rPr>
+              <a:t>Eisenberger, Lieberman and Williams, Science, 2003</a:t>
+            </a:r>
+          </a:p>
+          <a:p>
+            <a:pPr algn="l">
+              <a:spcAft>
+                <a:spcPts val="585"/>
+              </a:spcAft>
+            </a:pPr>
+            <a:r>
+              <a:rPr sz="1300" b="0" i="0">
+                <a:solidFill>
+                  <a:srgbClr val="1C1B19"/>
+                </a:solidFill>
+                <a:latin typeface="Source Serif 4"/>
+              </a:rPr>
+              <a:t>In recorded recess observations, other kids were around for 88% of bullying episodes and stepped in during 19%. When someone stepped in, the bullying stopped 57% of the time.</a:t>
+            </a:r>
+          </a:p>
+          <a:p>
+            <a:pPr algn="l">
+              <a:spcAft>
+                <a:spcPts val="585"/>
+              </a:spcAft>
+            </a:pPr>
+            <a:r>
+              <a:rPr sz="1050" b="0" i="0">
+                <a:solidFill>
+                  <a:srgbClr val="5D5A54"/>
+                </a:solidFill>
+                <a:latin typeface="Inter Tight"/>
+              </a:rPr>
+              <a:t>Hawkins, Pepler and Craig, Social Development, 2001</a:t>
+            </a:r>
+          </a:p>
+        </p:txBody>
+      </p:sp>
+    </p:spTree>
+  </p:cSld>
+  <p:clrMapOvr>
+    <a:masterClrMapping/>
+  </p:clrMapOvr>
+</p:sld>
+</file>
+
+<file path=ppt/slides/slide2.xml><?xml version="1.0" encoding="utf-8"?>
+<p:sld xmlns:a="http://schemas.openxmlformats.org/drawingml/2006/main" xmlns:p="http://schemas.openxmlformats.org/presentationml/2006/main" xmlns:r="http://schemas.openxmlformats.org/officeDocument/2006/relationships">
+  <p:cSld>
+    <p:bg>
+      <p:bgPr>
+        <a:solidFill>
+          <a:srgbClr val="0B2D5B"/>
+        </a:solidFill>
+        <a:effectLst/>
+      </p:bgPr>
+    </p:bg>
+    <p:spTree>
+      <p:nvGrpSpPr>
+        <p:cNvPr id="1" name=""/>
+        <p:cNvGrpSpPr/>
+        <p:nvPr/>
+      </p:nvGrpSpPr>
+      <p:grpSpPr/>
+      <p:sp>
+        <p:nvSpPr>
+          <p:cNvPr id="2" name="Rectangle 1"/>
+          <p:cNvSpPr/>
+          <p:nvPr/>
+        </p:nvSpPr>
+        <p:spPr>
+          <a:xfrm>
+            <a:off x="548640" y="502920"/>
+            <a:ext cx="457200" cy="54864"/>
+          </a:xfrm>
+          <a:prstGeom prst="rect">
+            <a:avLst/>
+          </a:prstGeom>
+          <a:solidFill>
+            <a:srgbClr val="F47B20"/>
+          </a:solidFill>
+          <a:ln>
+            <a:noFill/>
+          </a:ln>
+          <a:effectLst/>
+        </p:spPr>
+        <p:style>
+          <a:lnRef idx="1">
+            <a:schemeClr val="accent1"/>
+          </a:lnRef>
+          <a:fillRef idx="3">
+            <a:schemeClr val="accent1"/>
+          </a:fillRef>
+          <a:effectRef idx="2">
+            <a:schemeClr val="accent1"/>
+          </a:effectRef>
+          <a:fontRef idx="minor">
+            <a:schemeClr val="lt1"/>
+          </a:fontRef>
+        </p:style>
+        <p:txBody>
+          <a:bodyPr rtlCol="0" anchor="ctr"/>
+          <a:lstStyle/>
+          <a:p>
+            <a:pPr algn="ctr"/>
+          </a:p>
+        </p:txBody>
+      </p:sp>
+      <p:sp>
+        <p:nvSpPr>
+          <p:cNvPr id="3" name="TextBox 2"/>
+          <p:cNvSpPr txBox="1"/>
+          <p:nvPr/>
+        </p:nvSpPr>
+        <p:spPr>
+          <a:xfrm>
+            <a:off x="1143000" y="393192"/>
+            <a:ext cx="8229600" cy="274320"/>
+          </a:xfrm>
+          <a:prstGeom prst="rect">
+            <a:avLst/>
+          </a:prstGeom>
+          <a:noFill/>
+        </p:spPr>
+        <p:txBody>
+          <a:bodyPr wrap="square" anchor="t" lIns="0" rIns="0" tIns="0" bIns="0">
+            <a:spAutoFit/>
+          </a:bodyPr>
+          <a:lstStyle/>
+          <a:p>
+            <a:pPr algn="l">
+              <a:spcAft>
+                <a:spcPts val="540"/>
+              </a:spcAft>
+            </a:pPr>
+            <a:r>
+              <a:rPr sz="1200" b="1" i="0">
+                <a:solidFill>
+                  <a:srgbClr val="5D5A54"/>
+                </a:solidFill>
+                <a:latin typeface="Inter Tight"/>
+              </a:rPr>
+              <a:t>INNER CIRCLE</a:t>
+            </a:r>
+          </a:p>
+        </p:txBody>
+      </p:sp>
+      <p:sp>
+        <p:nvSpPr>
+          <p:cNvPr id="4" name="TextBox 3"/>
+          <p:cNvSpPr txBox="1"/>
+          <p:nvPr/>
+        </p:nvSpPr>
+        <p:spPr>
+          <a:xfrm>
+            <a:off x="8229600" y="6400800"/>
+            <a:ext cx="3410712" cy="274320"/>
+          </a:xfrm>
+          <a:prstGeom prst="rect">
+            <a:avLst/>
+          </a:prstGeom>
+          <a:noFill/>
+        </p:spPr>
+        <p:txBody>
+          <a:bodyPr wrap="square" anchor="t" lIns="0" rIns="0" tIns="0" bIns="0">
+            <a:spAutoFit/>
+          </a:bodyPr>
+          <a:lstStyle/>
+          <a:p>
+            <a:pPr algn="r">
+              <a:spcAft>
+                <a:spcPts val="450"/>
+              </a:spcAft>
+            </a:pPr>
+            <a:r>
+              <a:rPr sz="1000" b="0" i="0">
+                <a:solidFill>
+                  <a:srgbClr val="5D5A54"/>
+                </a:solidFill>
+                <a:latin typeface="Inter Tight"/>
+              </a:rPr>
+              <a:t>Beaver Counseling</a:t>
+            </a:r>
+          </a:p>
+        </p:txBody>
+      </p:sp>
+      <p:sp>
+        <p:nvSpPr>
+          <p:cNvPr id="5" name="TextBox 4"/>
+          <p:cNvSpPr txBox="1"/>
+          <p:nvPr/>
+        </p:nvSpPr>
+        <p:spPr>
+          <a:xfrm>
+            <a:off x="822960" y="2011680"/>
+            <a:ext cx="10515600" cy="1463040"/>
+          </a:xfrm>
+          <a:prstGeom prst="rect">
+            <a:avLst/>
+          </a:prstGeom>
+          <a:noFill/>
+        </p:spPr>
+        <p:txBody>
+          <a:bodyPr wrap="square" anchor="b" lIns="0" rIns="0" tIns="0" bIns="0">
+            <a:spAutoFit/>
+          </a:bodyPr>
+          <a:lstStyle/>
+          <a:p>
+            <a:pPr algn="l">
+              <a:spcAft>
+                <a:spcPts val="2700"/>
+              </a:spcAft>
+            </a:pPr>
+            <a:r>
+              <a:rPr sz="6000" b="1" i="0">
+                <a:solidFill>
+                  <a:srgbClr val="FFFFFF"/>
+                </a:solidFill>
+                <a:latin typeface="Source Serif 4"/>
+              </a:rPr>
+              <a:t>Inner Circle</a:t>
+            </a:r>
+          </a:p>
+        </p:txBody>
+      </p:sp>
+      <p:sp>
+        <p:nvSpPr>
+          <p:cNvPr id="6" name="TextBox 5"/>
+          <p:cNvSpPr txBox="1"/>
+          <p:nvPr/>
+        </p:nvSpPr>
+        <p:spPr>
+          <a:xfrm>
+            <a:off x="822960" y="3611880"/>
+            <a:ext cx="10515600" cy="914400"/>
+          </a:xfrm>
+          <a:prstGeom prst="rect">
+            <a:avLst/>
+          </a:prstGeom>
+          <a:noFill/>
+        </p:spPr>
+        <p:txBody>
+          <a:bodyPr wrap="square" anchor="t" lIns="0" rIns="0" tIns="0" bIns="0">
+            <a:spAutoFit/>
+          </a:bodyPr>
+          <a:lstStyle/>
+          <a:p>
+            <a:pPr algn="l">
+              <a:spcAft>
+                <a:spcPts val="1080"/>
+              </a:spcAft>
+            </a:pPr>
+            <a:r>
+              <a:rPr sz="2400" b="0" i="1">
+                <a:solidFill>
+                  <a:srgbClr val="E8E4DA"/>
+                </a:solidFill>
+                <a:latin typeface="Source Serif 4"/>
+              </a:rPr>
+              <a:t>Nobody said anything. Everybody knew.</a:t>
+            </a:r>
+          </a:p>
+        </p:txBody>
+      </p:sp>
+      <p:sp>
+        <p:nvSpPr>
+          <p:cNvPr id="7" name="TextBox 6"/>
+          <p:cNvSpPr txBox="1"/>
+          <p:nvPr/>
+        </p:nvSpPr>
+        <p:spPr>
+          <a:xfrm>
+            <a:off x="822960" y="6035040"/>
+            <a:ext cx="7315200" cy="365760"/>
+          </a:xfrm>
+          <a:prstGeom prst="rect">
+            <a:avLst/>
+          </a:prstGeom>
+          <a:noFill/>
+        </p:spPr>
+        <p:txBody>
+          <a:bodyPr wrap="square" anchor="t" lIns="0" rIns="0" tIns="0" bIns="0">
+            <a:spAutoFit/>
+          </a:bodyPr>
+          <a:lstStyle/>
+          <a:p>
+            <a:pPr algn="l">
+              <a:spcAft>
+                <a:spcPts val="585"/>
+              </a:spcAft>
+            </a:pPr>
+            <a:r>
+              <a:rPr sz="1300" b="0" i="0">
+                <a:solidFill>
+                  <a:srgbClr val="E8E4DA"/>
+                </a:solidFill>
+                <a:latin typeface="Inter Tight"/>
+              </a:rPr>
+              <a:t>Beaver Upper School · Counseling</a:t>
+            </a:r>
+          </a:p>
+        </p:txBody>
+      </p:sp>
+    </p:spTree>
+  </p:cSld>
+  <p:clrMapOvr>
+    <a:masterClrMapping/>
+  </p:clrMapOvr>
+</p:sld>
+</file>
+
+<file path=ppt/slides/slide3.xml><?xml version="1.0" encoding="utf-8"?>
 <p:sld xmlns:a="http://schemas.openxmlformats.org/drawingml/2006/main" xmlns:p="http://schemas.openxmlformats.org/presentationml/2006/main" xmlns:r="http://schemas.openxmlformats.org/officeDocument/2006/relationships">
   <p:cSld>
     <p:bg>
@@ -4749,7 +6828,7 @@
                 </a:solidFill>
                 <a:latin typeface="Inter Tight"/>
               </a:rPr>
-              <a:t>NOT A DOORMAT. NOT A BULLY.</a:t>
+              <a:t>SOUND FAMILIAR?</a:t>
             </a:r>
           </a:p>
         </p:txBody>
@@ -4827,7 +6906,7 @@
                 </a:solidFill>
                 <a:latin typeface="Source Serif 4"/>
               </a:rPr>
-              <a:t>Assertive: stand up and still respect them</a:t>
+              <a:t>The quiet stuff that runs a group</a:t>
             </a:r>
           </a:p>
         </p:txBody>
@@ -4866,7 +6945,7 @@
                 </a:solidFill>
                 <a:latin typeface="Source Serif 4"/>
               </a:rPr>
-              <a:t>1</a:t>
+              <a:t>•</a:t>
             </a:r>
           </a:p>
         </p:txBody>
@@ -4905,7 +6984,7 @@
                 </a:solidFill>
                 <a:latin typeface="Source Serif 4"/>
               </a:rPr>
-              <a:t>Go to the person, not the group.</a:t>
+              <a:t>The chat got renamed.</a:t>
             </a:r>
           </a:p>
           <a:p>
@@ -4921,7 +7000,7 @@
                 </a:solidFill>
                 <a:latin typeface="Source Serif 4"/>
               </a:rPr>
-              <a:t>"I noticed I wasn't in the new chat. Is something up with us?"</a:t>
+              <a:t>You weren't added to the new one.</a:t>
             </a:r>
           </a:p>
         </p:txBody>
@@ -4960,7 +7039,7 @@
                 </a:solidFill>
                 <a:latin typeface="Source Serif 4"/>
               </a:rPr>
-              <a:t>2</a:t>
+              <a:t>•</a:t>
             </a:r>
           </a:p>
         </p:txBody>
@@ -4999,7 +7078,7 @@
                 </a:solidFill>
                 <a:latin typeface="Source Serif 4"/>
               </a:rPr>
-              <a:t>Let it stop with you.</a:t>
+              <a:t>Warm one on one, cold in the group.</a:t>
             </a:r>
           </a:p>
           <a:p>
@@ -5015,7 +7094,7 @@
                 </a:solidFill>
                 <a:latin typeface="Source Serif 4"/>
               </a:rPr>
-              <a:t>Rumors and screenshots need people to pass them on.</a:t>
+              <a:t>Same friend, different person.</a:t>
             </a:r>
           </a:p>
         </p:txBody>
@@ -5054,7 +7133,7 @@
                 </a:solidFill>
                 <a:latin typeface="Source Serif 4"/>
               </a:rPr>
-              <a:t>3</a:t>
+              <a:t>•</a:t>
             </a:r>
           </a:p>
         </p:txBody>
@@ -5093,23 +7172,7 @@
                 </a:solidFill>
                 <a:latin typeface="Source Serif 4"/>
               </a:rPr>
-              <a:t>Keep more than one circle.</a:t>
-            </a:r>
-          </a:p>
-          <a:p>
-            <a:pPr algn="l">
-              <a:spcAft>
-                <a:spcPts val="945"/>
-              </a:spcAft>
-            </a:pPr>
-            <a:r>
-              <a:rPr sz="1600" b="0" i="0">
-                <a:solidFill>
-                  <a:srgbClr val="5D5A54"/>
-                </a:solidFill>
-                <a:latin typeface="Source Serif 4"/>
-              </a:rPr>
-              <a:t>Team, job, club, cousins, online friends.</a:t>
+              <a:t>A private message came back as a screenshot.</a:t>
             </a:r>
           </a:p>
         </p:txBody>
@@ -5148,7 +7211,7 @@
                 </a:solidFill>
                 <a:latin typeface="Source Serif 4"/>
               </a:rPr>
-              <a:t>4</a:t>
+              <a:t>•</a:t>
             </a:r>
           </a:p>
         </p:txBody>
@@ -5187,7 +7250,7 @@
                 </a:solidFill>
                 <a:latin typeface="Source Serif 4"/>
               </a:rPr>
-              <a:t>Pull someone in.</a:t>
+              <a:t>The roast always lands on the same person.</a:t>
             </a:r>
           </a:p>
           <a:p>
@@ -5203,7 +7266,7 @@
                 </a:solidFill>
                 <a:latin typeface="Source Serif 4"/>
               </a:rPr>
-              <a:t>"Want to come with us?" The best use of social power.</a:t>
+              <a:t>Everyone knows who's at the bottom this week.</a:t>
             </a:r>
           </a:p>
         </p:txBody>
@@ -5216,7 +7279,7 @@
 </p:sld>
 </file>
 
-<file path=ppt/slides/slide11.xml><?xml version="1.0" encoding="utf-8"?>
+<file path=ppt/slides/slide4.xml><?xml version="1.0" encoding="utf-8"?>
 <p:sld xmlns:a="http://schemas.openxmlformats.org/drawingml/2006/main" xmlns:p="http://schemas.openxmlformats.org/presentationml/2006/main" xmlns:r="http://schemas.openxmlformats.org/officeDocument/2006/relationships">
   <p:cSld>
     <p:bg>
@@ -5312,7 +7375,7 @@
                 </a:solidFill>
                 <a:latin typeface="Inter Tight"/>
               </a:rPr>
-              <a:t>THREE MOMENTS</a:t>
+              <a:t>THUMBS VOTE</a:t>
             </a:r>
           </a:p>
         </p:txBody>
@@ -5358,64 +7421,23 @@
       </p:sp>
       <p:sp>
         <p:nvSpPr>
-          <p:cNvPr id="5" name="TextBox 4"/>
-          <p:cNvSpPr txBox="1"/>
-          <p:nvPr/>
-        </p:nvSpPr>
-        <p:spPr>
-          <a:xfrm>
-            <a:off x="822960" y="1005840"/>
-            <a:ext cx="10515600" cy="914400"/>
-          </a:xfrm>
-          <a:prstGeom prst="rect">
-            <a:avLst/>
-          </a:prstGeom>
-          <a:noFill/>
-        </p:spPr>
-        <p:txBody>
-          <a:bodyPr wrap="square" anchor="t" lIns="0" rIns="0" tIns="0" bIns="0">
-            <a:spAutoFit/>
-          </a:bodyPr>
-          <a:lstStyle/>
-          <a:p>
-            <a:pPr algn="l">
-              <a:spcAft>
-                <a:spcPts val="1530"/>
-              </a:spcAft>
-            </a:pPr>
-            <a:r>
-              <a:rPr sz="3400" b="1" i="0">
-                <a:solidFill>
-                  <a:srgbClr val="1C1B19"/>
-                </a:solidFill>
-                <a:latin typeface="Source Serif 4"/>
-              </a:rPr>
-              <a:t>What's your move?</a:t>
-            </a:r>
-          </a:p>
-        </p:txBody>
-      </p:sp>
-      <p:sp>
-        <p:nvSpPr>
-          <p:cNvPr id="6" name="Rectangle 5"/>
+          <p:cNvPr id="5" name="Rectangle 4"/>
           <p:cNvSpPr/>
           <p:nvPr/>
         </p:nvSpPr>
         <p:spPr>
           <a:xfrm>
-            <a:off x="822960" y="2103120"/>
-            <a:ext cx="3322320" cy="3840480"/>
+            <a:off x="822960" y="1371600"/>
+            <a:ext cx="73152" cy="3566160"/>
           </a:xfrm>
           <a:prstGeom prst="rect">
             <a:avLst/>
           </a:prstGeom>
           <a:solidFill>
-            <a:srgbClr val="FFFFFF"/>
+            <a:srgbClr val="F47B20"/>
           </a:solidFill>
-          <a:ln w="15875">
-            <a:solidFill>
-              <a:srgbClr val="D8D2C6"/>
-            </a:solidFill>
+          <a:ln>
+            <a:noFill/>
           </a:ln>
           <a:effectLst/>
         </p:spPr>
@@ -5443,14 +7465,53 @@
       </p:sp>
       <p:sp>
         <p:nvSpPr>
+          <p:cNvPr id="6" name="TextBox 5"/>
+          <p:cNvSpPr txBox="1"/>
+          <p:nvPr/>
+        </p:nvSpPr>
+        <p:spPr>
+          <a:xfrm>
+            <a:off x="1188720" y="1371600"/>
+            <a:ext cx="10058400" cy="3566160"/>
+          </a:xfrm>
+          <a:prstGeom prst="rect">
+            <a:avLst/>
+          </a:prstGeom>
+          <a:noFill/>
+        </p:spPr>
+        <p:txBody>
+          <a:bodyPr wrap="square" anchor="ctr" lIns="0" rIns="0" tIns="0" bIns="0">
+            <a:spAutoFit/>
+          </a:bodyPr>
+          <a:lstStyle/>
+          <a:p>
+            <a:pPr algn="l">
+              <a:spcAft>
+                <a:spcPts val="1800"/>
+              </a:spcAft>
+            </a:pPr>
+            <a:r>
+              <a:rPr sz="4000" b="0" i="1">
+                <a:solidFill>
+                  <a:srgbClr val="1C1B19"/>
+                </a:solidFill>
+                <a:latin typeface="Source Serif 4"/>
+              </a:rPr>
+              <a:t>"The most popular people are the most liked."</a:t>
+            </a:r>
+          </a:p>
+        </p:txBody>
+      </p:sp>
+      <p:sp>
+        <p:nvSpPr>
           <p:cNvPr id="7" name="TextBox 6"/>
           <p:cNvSpPr txBox="1"/>
           <p:nvPr/>
         </p:nvSpPr>
         <p:spPr>
           <a:xfrm>
-            <a:off x="1051560" y="2286000"/>
-            <a:ext cx="2865120" cy="365760"/>
+            <a:off x="1188720" y="5120640"/>
+            <a:ext cx="10058400" cy="914400"/>
           </a:xfrm>
           <a:prstGeom prst="rect">
             <a:avLst/>
@@ -5465,304 +7526,17 @@
           <a:p>
             <a:pPr algn="l">
               <a:spcAft>
-                <a:spcPts val="585"/>
-              </a:spcAft>
-            </a:pPr>
-            <a:r>
-              <a:rPr sz="1300" b="1" i="0">
-                <a:solidFill>
-                  <a:srgbClr val="0B2D5B"/>
+                <a:spcPts val="810"/>
+              </a:spcAft>
+            </a:pPr>
+            <a:r>
+              <a:rPr sz="1800" b="0" i="0">
+                <a:solidFill>
+                  <a:srgbClr val="5D5A54"/>
                 </a:solidFill>
                 <a:latin typeface="Inter Tight"/>
               </a:rPr>
-              <a:t>MAYA</a:t>
-            </a:r>
-          </a:p>
-        </p:txBody>
-      </p:sp>
-      <p:sp>
-        <p:nvSpPr>
-          <p:cNvPr id="8" name="TextBox 7"/>
-          <p:cNvSpPr txBox="1"/>
-          <p:nvPr/>
-        </p:nvSpPr>
-        <p:spPr>
-          <a:xfrm>
-            <a:off x="1051560" y="2743200"/>
-            <a:ext cx="2865120" cy="3017520"/>
-          </a:xfrm>
-          <a:prstGeom prst="rect">
-            <a:avLst/>
-          </a:prstGeom>
-          <a:noFill/>
-        </p:spPr>
-        <p:txBody>
-          <a:bodyPr wrap="square" anchor="t" lIns="0" rIns="0" tIns="0" bIns="0">
-            <a:spAutoFit/>
-          </a:bodyPr>
-          <a:lstStyle/>
-          <a:p>
-            <a:pPr algn="l">
-              <a:spcAft>
-                <a:spcPts val="810"/>
-              </a:spcAft>
-            </a:pPr>
-            <a:r>
-              <a:rPr sz="1800" b="0" i="0">
-                <a:solidFill>
-                  <a:srgbClr val="1C1B19"/>
-                </a:solidFill>
-                <a:latin typeface="Source Serif 4"/>
-              </a:rPr>
-              <a:t>The prom group has one spot too many. In a side chat, someone suggests "just not telling Maya" the plan changed.</a:t>
-            </a:r>
-          </a:p>
-        </p:txBody>
-      </p:sp>
-      <p:sp>
-        <p:nvSpPr>
-          <p:cNvPr id="9" name="Rectangle 8"/>
-          <p:cNvSpPr/>
-          <p:nvPr/>
-        </p:nvSpPr>
-        <p:spPr>
-          <a:xfrm>
-            <a:off x="4419600" y="2103120"/>
-            <a:ext cx="3322320" cy="3840480"/>
-          </a:xfrm>
-          <a:prstGeom prst="rect">
-            <a:avLst/>
-          </a:prstGeom>
-          <a:solidFill>
-            <a:srgbClr val="FFFFFF"/>
-          </a:solidFill>
-          <a:ln w="15875">
-            <a:solidFill>
-              <a:srgbClr val="D8D2C6"/>
-            </a:solidFill>
-          </a:ln>
-          <a:effectLst/>
-        </p:spPr>
-        <p:style>
-          <a:lnRef idx="1">
-            <a:schemeClr val="accent1"/>
-          </a:lnRef>
-          <a:fillRef idx="3">
-            <a:schemeClr val="accent1"/>
-          </a:fillRef>
-          <a:effectRef idx="2">
-            <a:schemeClr val="accent1"/>
-          </a:effectRef>
-          <a:fontRef idx="minor">
-            <a:schemeClr val="lt1"/>
-          </a:fontRef>
-        </p:style>
-        <p:txBody>
-          <a:bodyPr rtlCol="0" anchor="ctr"/>
-          <a:lstStyle/>
-          <a:p>
-            <a:pPr algn="ctr"/>
-          </a:p>
-        </p:txBody>
-      </p:sp>
-      <p:sp>
-        <p:nvSpPr>
-          <p:cNvPr id="10" name="TextBox 9"/>
-          <p:cNvSpPr txBox="1"/>
-          <p:nvPr/>
-        </p:nvSpPr>
-        <p:spPr>
-          <a:xfrm>
-            <a:off x="4648200" y="2286000"/>
-            <a:ext cx="2865120" cy="365760"/>
-          </a:xfrm>
-          <a:prstGeom prst="rect">
-            <a:avLst/>
-          </a:prstGeom>
-          <a:noFill/>
-        </p:spPr>
-        <p:txBody>
-          <a:bodyPr wrap="square" anchor="t" lIns="0" rIns="0" tIns="0" bIns="0">
-            <a:spAutoFit/>
-          </a:bodyPr>
-          <a:lstStyle/>
-          <a:p>
-            <a:pPr algn="l">
-              <a:spcAft>
-                <a:spcPts val="585"/>
-              </a:spcAft>
-            </a:pPr>
-            <a:r>
-              <a:rPr sz="1300" b="1" i="0">
-                <a:solidFill>
-                  <a:srgbClr val="0B2D5B"/>
-                </a:solidFill>
-                <a:latin typeface="Inter Tight"/>
-              </a:rPr>
-              <a:t>DEV</a:t>
-            </a:r>
-          </a:p>
-        </p:txBody>
-      </p:sp>
-      <p:sp>
-        <p:nvSpPr>
-          <p:cNvPr id="11" name="TextBox 10"/>
-          <p:cNvSpPr txBox="1"/>
-          <p:nvPr/>
-        </p:nvSpPr>
-        <p:spPr>
-          <a:xfrm>
-            <a:off x="4648200" y="2743200"/>
-            <a:ext cx="2865120" cy="3017520"/>
-          </a:xfrm>
-          <a:prstGeom prst="rect">
-            <a:avLst/>
-          </a:prstGeom>
-          <a:noFill/>
-        </p:spPr>
-        <p:txBody>
-          <a:bodyPr wrap="square" anchor="t" lIns="0" rIns="0" tIns="0" bIns="0">
-            <a:spAutoFit/>
-          </a:bodyPr>
-          <a:lstStyle/>
-          <a:p>
-            <a:pPr algn="l">
-              <a:spcAft>
-                <a:spcPts val="810"/>
-              </a:spcAft>
-            </a:pPr>
-            <a:r>
-              <a:rPr sz="1800" b="0" i="0">
-                <a:solidFill>
-                  <a:srgbClr val="1C1B19"/>
-                </a:solidFill>
-                <a:latin typeface="Source Serif 4"/>
-              </a:rPr>
-              <a:t>The guys' chat has a running bit about who's most "soft." This week it's Dev, and nobody told him about the pickup game.</a:t>
-            </a:r>
-          </a:p>
-        </p:txBody>
-      </p:sp>
-      <p:sp>
-        <p:nvSpPr>
-          <p:cNvPr id="12" name="Rectangle 11"/>
-          <p:cNvSpPr/>
-          <p:nvPr/>
-        </p:nvSpPr>
-        <p:spPr>
-          <a:xfrm>
-            <a:off x="8016239" y="2103120"/>
-            <a:ext cx="3322320" cy="3840480"/>
-          </a:xfrm>
-          <a:prstGeom prst="rect">
-            <a:avLst/>
-          </a:prstGeom>
-          <a:solidFill>
-            <a:srgbClr val="FFFFFF"/>
-          </a:solidFill>
-          <a:ln w="15875">
-            <a:solidFill>
-              <a:srgbClr val="D8D2C6"/>
-            </a:solidFill>
-          </a:ln>
-          <a:effectLst/>
-        </p:spPr>
-        <p:style>
-          <a:lnRef idx="1">
-            <a:schemeClr val="accent1"/>
-          </a:lnRef>
-          <a:fillRef idx="3">
-            <a:schemeClr val="accent1"/>
-          </a:fillRef>
-          <a:effectRef idx="2">
-            <a:schemeClr val="accent1"/>
-          </a:effectRef>
-          <a:fontRef idx="minor">
-            <a:schemeClr val="lt1"/>
-          </a:fontRef>
-        </p:style>
-        <p:txBody>
-          <a:bodyPr rtlCol="0" anchor="ctr"/>
-          <a:lstStyle/>
-          <a:p>
-            <a:pPr algn="ctr"/>
-          </a:p>
-        </p:txBody>
-      </p:sp>
-      <p:sp>
-        <p:nvSpPr>
-          <p:cNvPr id="13" name="TextBox 12"/>
-          <p:cNvSpPr txBox="1"/>
-          <p:nvPr/>
-        </p:nvSpPr>
-        <p:spPr>
-          <a:xfrm>
-            <a:off x="8244839" y="2286000"/>
-            <a:ext cx="2865120" cy="365760"/>
-          </a:xfrm>
-          <a:prstGeom prst="rect">
-            <a:avLst/>
-          </a:prstGeom>
-          <a:noFill/>
-        </p:spPr>
-        <p:txBody>
-          <a:bodyPr wrap="square" anchor="t" lIns="0" rIns="0" tIns="0" bIns="0">
-            <a:spAutoFit/>
-          </a:bodyPr>
-          <a:lstStyle/>
-          <a:p>
-            <a:pPr algn="l">
-              <a:spcAft>
-                <a:spcPts val="585"/>
-              </a:spcAft>
-            </a:pPr>
-            <a:r>
-              <a:rPr sz="1300" b="1" i="0">
-                <a:solidFill>
-                  <a:srgbClr val="0B2D5B"/>
-                </a:solidFill>
-                <a:latin typeface="Inter Tight"/>
-              </a:rPr>
-              <a:t>SOFIA</a:t>
-            </a:r>
-          </a:p>
-        </p:txBody>
-      </p:sp>
-      <p:sp>
-        <p:nvSpPr>
-          <p:cNvPr id="14" name="TextBox 13"/>
-          <p:cNvSpPr txBox="1"/>
-          <p:nvPr/>
-        </p:nvSpPr>
-        <p:spPr>
-          <a:xfrm>
-            <a:off x="8244839" y="2743200"/>
-            <a:ext cx="2865120" cy="3017520"/>
-          </a:xfrm>
-          <a:prstGeom prst="rect">
-            <a:avLst/>
-          </a:prstGeom>
-          <a:noFill/>
-        </p:spPr>
-        <p:txBody>
-          <a:bodyPr wrap="square" anchor="t" lIns="0" rIns="0" tIns="0" bIns="0">
-            <a:spAutoFit/>
-          </a:bodyPr>
-          <a:lstStyle/>
-          <a:p>
-            <a:pPr algn="l">
-              <a:spcAft>
-                <a:spcPts val="810"/>
-              </a:spcAft>
-            </a:pPr>
-            <a:r>
-              <a:rPr sz="1800" b="0" i="0">
-                <a:solidFill>
-                  <a:srgbClr val="1C1B19"/>
-                </a:solidFill>
-                <a:latin typeface="Source Serif 4"/>
-              </a:rPr>
-              <a:t>She's running for class president. Her group starts calling her "try-hard" and stops inviting her.</a:t>
+              <a:t>Thumbs up if true, down if false, sideways if it depends. Everyone at once.</a:t>
             </a:r>
           </a:p>
         </p:txBody>
@@ -5775,7 +7549,7 @@
 </p:sld>
 </file>
 
-<file path=ppt/slides/slide12.xml><?xml version="1.0" encoding="utf-8"?>
+<file path=ppt/slides/slide5.xml><?xml version="1.0" encoding="utf-8"?>
 <p:sld xmlns:a="http://schemas.openxmlformats.org/drawingml/2006/main" xmlns:p="http://schemas.openxmlformats.org/presentationml/2006/main" xmlns:r="http://schemas.openxmlformats.org/officeDocument/2006/relationships">
   <p:cSld>
     <p:bg>
@@ -5871,7 +7645,7 @@
                 </a:solidFill>
                 <a:latin typeface="Inter Tight"/>
               </a:rPr>
-              <a:t>BEFORE YOU GO</a:t>
+              <a:t>SAME GAME, DIFFERENT MOVES</a:t>
             </a:r>
           </a:p>
         </p:txBody>
@@ -5923,7 +7697,7 @@
         </p:nvSpPr>
         <p:spPr>
           <a:xfrm>
-            <a:off x="822960" y="1188720"/>
+            <a:off x="822960" y="1005840"/>
             <a:ext cx="10515600" cy="914400"/>
           </a:xfrm>
           <a:prstGeom prst="rect">
@@ -5939,70 +7713,31 @@
           <a:p>
             <a:pPr algn="l">
               <a:spcAft>
-                <a:spcPts val="1620"/>
-              </a:spcAft>
-            </a:pPr>
-            <a:r>
-              <a:rPr sz="3600" b="1" i="0">
+                <a:spcPts val="1530"/>
+              </a:spcAft>
+            </a:pPr>
+            <a:r>
+              <a:rPr sz="3400" b="1" i="0">
                 <a:solidFill>
                   <a:srgbClr val="1C1B19"/>
                 </a:solidFill>
                 <a:latin typeface="Source Serif 4"/>
               </a:rPr>
-              <a:t>One move</a:t>
-            </a:r>
-          </a:p>
-        </p:txBody>
-      </p:sp>
-      <p:sp>
-        <p:nvSpPr>
-          <p:cNvPr id="6" name="TextBox 5"/>
-          <p:cNvSpPr txBox="1"/>
-          <p:nvPr/>
-        </p:nvSpPr>
-        <p:spPr>
-          <a:xfrm>
-            <a:off x="822960" y="2286000"/>
-            <a:ext cx="10515600" cy="1463040"/>
-          </a:xfrm>
-          <a:prstGeom prst="rect">
-            <a:avLst/>
-          </a:prstGeom>
-          <a:noFill/>
-        </p:spPr>
-        <p:txBody>
-          <a:bodyPr wrap="square" anchor="t" lIns="0" rIns="0" tIns="0" bIns="0">
-            <a:spAutoFit/>
-          </a:bodyPr>
-          <a:lstStyle/>
-          <a:p>
-            <a:pPr algn="l">
-              <a:spcAft>
-                <a:spcPts val="1080"/>
-              </a:spcAft>
-            </a:pPr>
-            <a:r>
-              <a:rPr sz="2400" b="0" i="0">
-                <a:solidFill>
-                  <a:srgbClr val="1C1B19"/>
-                </a:solidFill>
-                <a:latin typeface="Source Serif 4"/>
-              </a:rPr>
-              <a:t>Privately: one thing you could do this week, for yourself or for someone on the outside.</a:t>
-            </a:r>
-          </a:p>
-        </p:txBody>
-      </p:sp>
-      <p:sp>
-        <p:nvSpPr>
-          <p:cNvPr id="7" name="Rectangle 6"/>
+              <a:t>Every gender plays. The moves just sound different.</a:t>
+            </a:r>
+          </a:p>
+        </p:txBody>
+      </p:sp>
+      <p:sp>
+        <p:nvSpPr>
+          <p:cNvPr id="6" name="Rectangle 5"/>
           <p:cNvSpPr/>
           <p:nvPr/>
         </p:nvSpPr>
         <p:spPr>
           <a:xfrm>
-            <a:off x="822960" y="4023360"/>
-            <a:ext cx="10515600" cy="1371600"/>
+            <a:off x="822960" y="2103120"/>
+            <a:ext cx="5120640" cy="3931920"/>
           </a:xfrm>
           <a:prstGeom prst="rect">
             <a:avLst/>
@@ -6012,7 +7747,7 @@
           </a:solidFill>
           <a:ln w="15875">
             <a:solidFill>
-              <a:srgbClr val="1C1B19"/>
+              <a:srgbClr val="D8D2C6"/>
             </a:solidFill>
           </a:ln>
           <a:effectLst/>
@@ -6041,14 +7776,53 @@
       </p:sp>
       <p:sp>
         <p:nvSpPr>
+          <p:cNvPr id="7" name="TextBox 6"/>
+          <p:cNvSpPr txBox="1"/>
+          <p:nvPr/>
+        </p:nvSpPr>
+        <p:spPr>
+          <a:xfrm>
+            <a:off x="1097280" y="2286000"/>
+            <a:ext cx="4572000" cy="457200"/>
+          </a:xfrm>
+          <a:prstGeom prst="rect">
+            <a:avLst/>
+          </a:prstGeom>
+          <a:noFill/>
+        </p:spPr>
+        <p:txBody>
+          <a:bodyPr wrap="square" anchor="t" lIns="0" rIns="0" tIns="0" bIns="0">
+            <a:spAutoFit/>
+          </a:bodyPr>
+          <a:lstStyle/>
+          <a:p>
+            <a:pPr algn="l">
+              <a:spcAft>
+                <a:spcPts val="585"/>
+              </a:spcAft>
+            </a:pPr>
+            <a:r>
+              <a:rPr sz="1300" b="1" i="0">
+                <a:solidFill>
+                  <a:srgbClr val="0B2D5B"/>
+                </a:solidFill>
+                <a:latin typeface="Inter Tight"/>
+              </a:rPr>
+              <a:t>QUIETER MOVES</a:t>
+            </a:r>
+          </a:p>
+        </p:txBody>
+      </p:sp>
+      <p:sp>
+        <p:nvSpPr>
           <p:cNvPr id="8" name="TextBox 7"/>
           <p:cNvSpPr txBox="1"/>
           <p:nvPr/>
         </p:nvSpPr>
         <p:spPr>
           <a:xfrm>
-            <a:off x="1097280" y="4206240"/>
-            <a:ext cx="10058400" cy="365760"/>
+            <a:off x="1097280" y="2788920"/>
+            <a:ext cx="4572000" cy="3108960"/>
           </a:xfrm>
           <a:prstGeom prst="rect">
             <a:avLst/>
@@ -6063,105 +7837,90 @@
           <a:p>
             <a:pPr algn="l">
               <a:spcAft>
-                <a:spcPts val="540"/>
-              </a:spcAft>
-            </a:pPr>
-            <a:r>
-              <a:rPr sz="1200" b="1" i="0">
-                <a:solidFill>
-                  <a:srgbClr val="0B2D5B"/>
-                </a:solidFill>
-                <a:latin typeface="Inter Tight"/>
-              </a:rPr>
-              <a:t>STUDENT PAGE</a:t>
-            </a:r>
-          </a:p>
-        </p:txBody>
-      </p:sp>
-      <p:sp>
-        <p:nvSpPr>
-          <p:cNvPr id="9" name="TextBox 8"/>
-          <p:cNvSpPr txBox="1"/>
-          <p:nvPr/>
-        </p:nvSpPr>
-        <p:spPr>
-          <a:xfrm>
-            <a:off x="1097280" y="4617720"/>
-            <a:ext cx="10058400" cy="640080"/>
-          </a:xfrm>
-          <a:prstGeom prst="rect">
-            <a:avLst/>
-          </a:prstGeom>
-          <a:noFill/>
-        </p:spPr>
-        <p:txBody>
-          <a:bodyPr wrap="square" anchor="t" lIns="0" rIns="0" tIns="0" bIns="0">
-            <a:spAutoFit/>
-          </a:bodyPr>
-          <a:lstStyle/>
-          <a:p>
-            <a:pPr algn="l">
-              <a:spcAft>
-                <a:spcPts val="900"/>
-              </a:spcAft>
-            </a:pPr>
-            <a:r>
-              <a:rPr sz="2000" b="0" i="0">
+                <a:spcPts val="855"/>
+              </a:spcAft>
+            </a:pPr>
+            <a:r>
+              <a:rPr sz="1900" b="0" i="0">
                 <a:solidFill>
                   <a:srgbClr val="1C1B19"/>
                 </a:solidFill>
-                <a:latin typeface="Inter Tight"/>
-              </a:rPr>
-              <a:t>https://rmwtoolkit.github.io/bcds-toolkit/inner-circle-high-school.html</a:t>
-            </a:r>
-          </a:p>
-        </p:txBody>
-      </p:sp>
-    </p:spTree>
-  </p:cSld>
-  <p:clrMapOvr>
-    <a:masterClrMapping/>
-  </p:clrMapOvr>
-</p:sld>
-</file>
-
-<file path=ppt/slides/slide2.xml><?xml version="1.0" encoding="utf-8"?>
-<p:sld xmlns:a="http://schemas.openxmlformats.org/drawingml/2006/main" xmlns:p="http://schemas.openxmlformats.org/presentationml/2006/main" xmlns:r="http://schemas.openxmlformats.org/officeDocument/2006/relationships" show="0">
-  <p:cSld>
-    <p:bg>
-      <p:bgPr>
-        <a:solidFill>
-          <a:srgbClr val="EEEBE4"/>
-        </a:solidFill>
-        <a:effectLst/>
-      </p:bgPr>
-    </p:bg>
-    <p:spTree>
-      <p:nvGrpSpPr>
-        <p:cNvPr id="1" name=""/>
-        <p:cNvGrpSpPr/>
-        <p:nvPr/>
-      </p:nvGrpSpPr>
-      <p:grpSpPr/>
-      <p:sp>
-        <p:nvSpPr>
-          <p:cNvPr id="2" name="Rectangle 1"/>
+                <a:latin typeface="Source Serif 4"/>
+              </a:rPr>
+              <a:t>Plans made where one person can see</a:t>
+            </a:r>
+          </a:p>
+          <a:p>
+            <a:pPr algn="l">
+              <a:spcAft>
+                <a:spcPts val="855"/>
+              </a:spcAft>
+            </a:pPr>
+            <a:r>
+              <a:rPr sz="1900" b="0" i="0">
+                <a:solidFill>
+                  <a:srgbClr val="1C1B19"/>
+                </a:solidFill>
+                <a:latin typeface="Source Serif 4"/>
+              </a:rPr>
+              <a:t>Secrets turned into screenshots</a:t>
+            </a:r>
+          </a:p>
+          <a:p>
+            <a:pPr algn="l">
+              <a:spcAft>
+                <a:spcPts val="855"/>
+              </a:spcAft>
+            </a:pPr>
+            <a:r>
+              <a:rPr sz="1900" b="0" i="0">
+                <a:solidFill>
+                  <a:srgbClr val="1C1B19"/>
+                </a:solidFill>
+                <a:latin typeface="Source Serif 4"/>
+              </a:rPr>
+              <a:t>The freeze-out: left on read</a:t>
+            </a:r>
+          </a:p>
+          <a:p>
+            <a:pPr algn="l">
+              <a:spcAft>
+                <a:spcPts val="855"/>
+              </a:spcAft>
+            </a:pPr>
+            <a:r>
+              <a:rPr sz="1900" b="0" i="0">
+                <a:solidFill>
+                  <a:srgbClr val="1C1B19"/>
+                </a:solidFill>
+                <a:latin typeface="Source Serif 4"/>
+              </a:rPr>
+              <a:t>"If you hang out with her, we're done"</a:t>
+            </a:r>
+          </a:p>
+        </p:txBody>
+      </p:sp>
+      <p:sp>
+        <p:nvSpPr>
+          <p:cNvPr id="9" name="Rectangle 8"/>
           <p:cNvSpPr/>
           <p:nvPr/>
         </p:nvSpPr>
         <p:spPr>
           <a:xfrm>
-            <a:off x="0" y="0"/>
-            <a:ext cx="12191695" cy="384048"/>
+            <a:off x="6309360" y="2103120"/>
+            <a:ext cx="5120640" cy="3931920"/>
           </a:xfrm>
           <a:prstGeom prst="rect">
             <a:avLst/>
           </a:prstGeom>
           <a:solidFill>
-            <a:srgbClr val="0B2D5B"/>
+            <a:srgbClr val="FFFFFF"/>
           </a:solidFill>
-          <a:ln>
-            <a:noFill/>
+          <a:ln w="15875">
+            <a:solidFill>
+              <a:srgbClr val="D8D2C6"/>
+            </a:solidFill>
           </a:ln>
           <a:effectLst/>
         </p:spPr>
@@ -6189,14 +7948,14 @@
       </p:sp>
       <p:sp>
         <p:nvSpPr>
-          <p:cNvPr id="3" name="TextBox 2"/>
+          <p:cNvPr id="10" name="TextBox 9"/>
           <p:cNvSpPr txBox="1"/>
           <p:nvPr/>
         </p:nvSpPr>
         <p:spPr>
           <a:xfrm>
-            <a:off x="548640" y="100584"/>
-            <a:ext cx="10972800" cy="274320"/>
+            <a:off x="6583680" y="2286000"/>
+            <a:ext cx="4572000" cy="457200"/>
           </a:xfrm>
           <a:prstGeom prst="rect">
             <a:avLst/>
@@ -6211,31 +7970,31 @@
           <a:p>
             <a:pPr algn="l">
               <a:spcAft>
-                <a:spcPts val="495"/>
-              </a:spcAft>
-            </a:pPr>
-            <a:r>
-              <a:rPr sz="1100" b="1" i="0">
-                <a:solidFill>
-                  <a:srgbClr val="FFFFFF"/>
+                <a:spcPts val="585"/>
+              </a:spcAft>
+            </a:pPr>
+            <a:r>
+              <a:rPr sz="1300" b="1" i="0">
+                <a:solidFill>
+                  <a:srgbClr val="0B2D5B"/>
                 </a:solidFill>
                 <a:latin typeface="Inter Tight"/>
               </a:rPr>
-              <a:t>TEACHER PAGE  ·  skipped when you present  ·  Before you teach</a:t>
-            </a:r>
-          </a:p>
-        </p:txBody>
-      </p:sp>
-      <p:sp>
-        <p:nvSpPr>
-          <p:cNvPr id="4" name="TextBox 3"/>
+              <a:t>LOUDER MOVES</a:t>
+            </a:r>
+          </a:p>
+        </p:txBody>
+      </p:sp>
+      <p:sp>
+        <p:nvSpPr>
+          <p:cNvPr id="11" name="TextBox 10"/>
           <p:cNvSpPr txBox="1"/>
           <p:nvPr/>
         </p:nvSpPr>
         <p:spPr>
           <a:xfrm>
-            <a:off x="548640" y="685800"/>
-            <a:ext cx="10972800" cy="640080"/>
+            <a:off x="6583680" y="2788920"/>
+            <a:ext cx="4572000" cy="3108960"/>
           </a:xfrm>
           <a:prstGeom prst="rect">
             <a:avLst/>
@@ -6250,1587 +8009,65 @@
           <a:p>
             <a:pPr algn="l">
               <a:spcAft>
-                <a:spcPts val="1350"/>
-              </a:spcAft>
-            </a:pPr>
-            <a:r>
-              <a:rPr sz="3000" b="1" i="0">
+                <a:spcPts val="855"/>
+              </a:spcAft>
+            </a:pPr>
+            <a:r>
+              <a:rPr sz="1900" b="0" i="0">
                 <a:solidFill>
                   <a:srgbClr val="1C1B19"/>
                 </a:solidFill>
                 <a:latin typeface="Source Serif 4"/>
               </a:rPr>
-              <a:t>Before you teach</a:t>
-            </a:r>
-          </a:p>
-        </p:txBody>
-      </p:sp>
-      <p:sp>
-        <p:nvSpPr>
-          <p:cNvPr id="5" name="TextBox 4"/>
-          <p:cNvSpPr txBox="1"/>
-          <p:nvPr/>
-        </p:nvSpPr>
-        <p:spPr>
-          <a:xfrm>
-            <a:off x="548640" y="1463040"/>
-            <a:ext cx="5394960" cy="4937760"/>
-          </a:xfrm>
-          <a:prstGeom prst="rect">
-            <a:avLst/>
-          </a:prstGeom>
-          <a:noFill/>
-        </p:spPr>
-        <p:txBody>
-          <a:bodyPr wrap="square" anchor="t" lIns="0" rIns="0" tIns="0" bIns="0">
-            <a:spAutoFit/>
-          </a:bodyPr>
-          <a:lstStyle/>
-          <a:p>
-            <a:pPr algn="l">
-              <a:spcAft>
-                <a:spcPts val="585"/>
-              </a:spcAft>
-            </a:pPr>
-            <a:r>
-              <a:rPr sz="1500" b="1" i="0">
+              <a:t>A roast that always picks one person</a:t>
+            </a:r>
+          </a:p>
+          <a:p>
+            <a:pPr algn="l">
+              <a:spcAft>
+                <a:spcPts val="855"/>
+              </a:spcAft>
+            </a:pPr>
+            <a:r>
+              <a:rPr sz="1900" b="0" i="0">
                 <a:solidFill>
                   <a:srgbClr val="1C1B19"/>
                 </a:solidFill>
                 <a:latin typeface="Source Serif 4"/>
               </a:rPr>
-              <a:t>Situations only, never names.</a:t>
-            </a:r>
-          </a:p>
-          <a:p>
-            <a:pPr algn="l">
-              <a:spcAft>
-                <a:spcPts val="585"/>
-              </a:spcAft>
-            </a:pPr>
-            <a:r>
-              <a:rPr sz="1300" b="0" i="0">
+              <a:t>Ranking who's in and who's out</a:t>
+            </a:r>
+          </a:p>
+          <a:p>
+            <a:pPr algn="l">
+              <a:spcAft>
+                <a:spcPts val="855"/>
+              </a:spcAft>
+            </a:pPr>
+            <a:r>
+              <a:rPr sz="1900" b="0" i="0">
                 <a:solidFill>
                   <a:srgbClr val="1C1B19"/>
                 </a:solidFill>
                 <a:latin typeface="Source Serif 4"/>
               </a:rPr>
-              <a:t>Keep every example about situations on the slides. Don't let students name classmates, groups or chats, and don't ask anyone where they sit or who they're with. Your advisory is a friend group too, and someone in the circle may be on the outside right now, maybe with the people doing it sitting across from them.</a:t>
-            </a:r>
-          </a:p>
-          <a:p>
-            <a:pPr algn="l">
-              <a:spcAft>
-                <a:spcPts val="585"/>
-              </a:spcAft>
-            </a:pPr>
-            <a:r>
-              <a:rPr sz="1300" b="0" i="0">
+              <a:t>Quietly dropped from the game or the lift</a:t>
+            </a:r>
+          </a:p>
+          <a:p>
+            <a:pPr algn="l">
+              <a:spcAft>
+                <a:spcPts val="855"/>
+              </a:spcAft>
+            </a:pPr>
+            <a:r>
+              <a:rPr sz="1900" b="0" i="0">
                 <a:solidFill>
                   <a:srgbClr val="1C1B19"/>
                 </a:solidFill>
                 <a:latin typeface="Source Serif 4"/>
               </a:rPr>
-              <a:t/>
-            </a:r>
-          </a:p>
-          <a:p>
-            <a:pPr algn="l">
-              <a:spcAft>
-                <a:spcPts val="585"/>
-              </a:spcAft>
-            </a:pPr>
-            <a:r>
-              <a:rPr sz="1500" b="1" i="0">
-                <a:solidFill>
-                  <a:srgbClr val="1C1B19"/>
-                </a:solidFill>
-                <a:latin typeface="Source Serif 4"/>
-              </a:rPr>
-              <a:t>Leave a way back for the one who's done it.</a:t>
-            </a:r>
-          </a:p>
-          <a:p>
-            <a:pPr algn="l">
-              <a:spcAft>
-                <a:spcPts val="585"/>
-              </a:spcAft>
-            </a:pPr>
-            <a:r>
-              <a:rPr sz="1300" b="0" i="0">
-                <a:solidFill>
-                  <a:srgbClr val="1C1B19"/>
-                </a:solidFill>
-                <a:latin typeface="Source Serif 4"/>
-              </a:rPr>
-              <a:t>Some students will recognize themselves as the one running the side chat. Keep shame out of it so they can use what they hear: change one thing, and keep the apology short. "I left you out, and that wasn't okay. I'm sorry."</a:t>
-            </a:r>
-          </a:p>
-          <a:p>
-            <a:pPr algn="l">
-              <a:spcAft>
-                <a:spcPts val="585"/>
-              </a:spcAft>
-            </a:pPr>
-            <a:r>
-              <a:rPr sz="1300" b="0" i="0">
-                <a:solidFill>
-                  <a:srgbClr val="1C1B19"/>
-                </a:solidFill>
-                <a:latin typeface="Source Serif 4"/>
-              </a:rPr>
-              <a:t/>
-            </a:r>
-          </a:p>
-          <a:p>
-            <a:pPr algn="l">
-              <a:spcAft>
-                <a:spcPts val="585"/>
-              </a:spcAft>
-            </a:pPr>
-            <a:r>
-              <a:rPr sz="1500" b="1" i="0">
-                <a:solidFill>
-                  <a:srgbClr val="1C1B19"/>
-                </a:solidFill>
-                <a:latin typeface="Source Serif 4"/>
-              </a:rPr>
-              <a:t>Know what goes to a counselor the same day.</a:t>
-            </a:r>
-          </a:p>
-          <a:p>
-            <a:pPr algn="l">
-              <a:spcAft>
-                <a:spcPts val="585"/>
-              </a:spcAft>
-            </a:pPr>
-            <a:r>
-              <a:rPr sz="1300" b="0" i="0">
-                <a:solidFill>
-                  <a:srgbClr val="1C1B19"/>
-                </a:solidFill>
-                <a:latin typeface="Source Serif 4"/>
-              </a:rPr>
-              <a:t>Someone being outed, photos of a person (real or AI-made) being shared, threats, or the same student targeted for weeks. Also a student who is dreading school, not eating or not sleeping because of a group. Don't ask about any of this in the circle. If a student brings up a real situation, thank them, say you'd like to help privately, and follow up with a counselor that day.</a:t>
-            </a:r>
-          </a:p>
-          <a:p>
-            <a:pPr algn="l">
-              <a:spcAft>
-                <a:spcPts val="585"/>
-              </a:spcAft>
-            </a:pPr>
-            <a:r>
-              <a:rPr sz="1300" b="0" i="0">
-                <a:solidFill>
-                  <a:srgbClr val="1C1B19"/>
-                </a:solidFill>
-                <a:latin typeface="Source Serif 4"/>
-              </a:rPr>
-              <a:t/>
-            </a:r>
-          </a:p>
-        </p:txBody>
-      </p:sp>
-      <p:sp>
-        <p:nvSpPr>
-          <p:cNvPr id="6" name="TextBox 5"/>
-          <p:cNvSpPr txBox="1"/>
-          <p:nvPr/>
-        </p:nvSpPr>
-        <p:spPr>
-          <a:xfrm>
-            <a:off x="6217920" y="1463040"/>
-            <a:ext cx="5394960" cy="4937760"/>
-          </a:xfrm>
-          <a:prstGeom prst="rect">
-            <a:avLst/>
-          </a:prstGeom>
-          <a:noFill/>
-        </p:spPr>
-        <p:txBody>
-          <a:bodyPr wrap="square" anchor="t" lIns="0" rIns="0" tIns="0" bIns="0">
-            <a:spAutoFit/>
-          </a:bodyPr>
-          <a:lstStyle/>
-          <a:p>
-            <a:pPr algn="l">
-              <a:spcAft>
-                <a:spcPts val="585"/>
-              </a:spcAft>
-            </a:pPr>
-            <a:r>
-              <a:rPr sz="1500" b="1" i="0">
-                <a:solidFill>
-                  <a:srgbClr val="1C1B19"/>
-                </a:solidFill>
-                <a:latin typeface="Source Serif 4"/>
-              </a:rPr>
-              <a:t>Outing is one of the most harmful moves there is.</a:t>
-            </a:r>
-          </a:p>
-          <a:p>
-            <a:pPr algn="l">
-              <a:spcAft>
-                <a:spcPts val="585"/>
-              </a:spcAft>
-            </a:pPr>
-            <a:r>
-              <a:rPr sz="1300" b="0" i="0">
-                <a:solidFill>
-                  <a:srgbClr val="1C1B19"/>
-                </a:solidFill>
-                <a:latin typeface="Source Serif 4"/>
-              </a:rPr>
-              <a:t>If a student's gender identity or orientation is being spread around, treat it as urgent and private, never a discussion topic. Know where to point students: a counselor, The Trevor Project (call 1-866-488-7386 or text START to 678-678), and Trans Lifeline (877-565-8860).</a:t>
-            </a:r>
-          </a:p>
-          <a:p>
-            <a:pPr algn="l">
-              <a:spcAft>
-                <a:spcPts val="585"/>
-              </a:spcAft>
-            </a:pPr>
-            <a:r>
-              <a:rPr sz="1300" b="0" i="0">
-                <a:solidFill>
-                  <a:srgbClr val="1C1B19"/>
-                </a:solidFill>
-                <a:latin typeface="Source Serif 4"/>
-              </a:rPr>
-              <a:t/>
-            </a:r>
-          </a:p>
-          <a:p>
-            <a:pPr algn="l">
-              <a:spcAft>
-                <a:spcPts val="585"/>
-              </a:spcAft>
-            </a:pPr>
-            <a:r>
-              <a:rPr sz="1500" b="1" i="0">
-                <a:solidFill>
-                  <a:srgbClr val="1C1B19"/>
-                </a:solidFill>
-                <a:latin typeface="Source Serif 4"/>
-              </a:rPr>
-              <a:t>When the talk turns to "girls are like this."</a:t>
-            </a:r>
-          </a:p>
-          <a:p>
-            <a:pPr algn="l">
-              <a:spcAft>
-                <a:spcPts val="585"/>
-              </a:spcAft>
-            </a:pPr>
-            <a:r>
-              <a:rPr sz="1300" b="0" i="0">
-                <a:solidFill>
-                  <a:srgbClr val="1C1B19"/>
-                </a:solidFill>
-                <a:latin typeface="Source Serif 4"/>
-              </a:rPr>
-              <a:t>Or "guys are like this." Bring in the research: across 148 studies the gender difference was trivial, and most people of every gender don't run their friendships this way. Students who hear their group mocked will stop talking.</a:t>
-            </a:r>
-          </a:p>
-          <a:p>
-            <a:pPr algn="l">
-              <a:spcAft>
-                <a:spcPts val="585"/>
-              </a:spcAft>
-            </a:pPr>
-            <a:r>
-              <a:rPr sz="1300" b="0" i="0">
-                <a:solidFill>
-                  <a:srgbClr val="1C1B19"/>
-                </a:solidFill>
-                <a:latin typeface="Source Serif 4"/>
-              </a:rPr>
-              <a:t/>
-            </a:r>
-          </a:p>
-          <a:p>
-            <a:pPr algn="l">
-              <a:spcAft>
-                <a:spcPts val="585"/>
-              </a:spcAft>
-            </a:pPr>
-            <a:r>
-              <a:rPr sz="1500" b="1" i="0">
-                <a:solidFill>
-                  <a:srgbClr val="1C1B19"/>
-                </a:solidFill>
-                <a:latin typeface="Source Serif 4"/>
-              </a:rPr>
-              <a:t>No self-harm questions in the circle.</a:t>
-            </a:r>
-          </a:p>
-          <a:p>
-            <a:pPr algn="l">
-              <a:spcAft>
-                <a:spcPts val="585"/>
-              </a:spcAft>
-            </a:pPr>
-            <a:r>
-              <a:rPr sz="1300" b="0" i="0">
-                <a:solidFill>
-                  <a:srgbClr val="1C1B19"/>
-                </a:solidFill>
-                <a:latin typeface="Source Serif 4"/>
-              </a:rPr>
-              <a:t>Being shut out can hit hard. If a student says something that worries you, check in privately after advisory and walk them to a counselor. Any disclosure goes to a counselor, and 988 (call or text) is open any time.</a:t>
-            </a:r>
-          </a:p>
-          <a:p>
-            <a:pPr algn="l">
-              <a:spcAft>
-                <a:spcPts val="585"/>
-              </a:spcAft>
-            </a:pPr>
-            <a:r>
-              <a:rPr sz="1300" b="0" i="0">
-                <a:solidFill>
-                  <a:srgbClr val="1C1B19"/>
-                </a:solidFill>
-                <a:latin typeface="Source Serif 4"/>
-              </a:rPr>
-              <a:t/>
-            </a:r>
-          </a:p>
-        </p:txBody>
-      </p:sp>
-    </p:spTree>
-  </p:cSld>
-  <p:clrMapOvr>
-    <a:masterClrMapping/>
-  </p:clrMapOvr>
-</p:sld>
-</file>
-
-<file path=ppt/slides/slide3.xml><?xml version="1.0" encoding="utf-8"?>
-<p:sld xmlns:a="http://schemas.openxmlformats.org/drawingml/2006/main" xmlns:p="http://schemas.openxmlformats.org/presentationml/2006/main" xmlns:r="http://schemas.openxmlformats.org/officeDocument/2006/relationships" show="0">
-  <p:cSld>
-    <p:bg>
-      <p:bgPr>
-        <a:solidFill>
-          <a:srgbClr val="EEEBE4"/>
-        </a:solidFill>
-        <a:effectLst/>
-      </p:bgPr>
-    </p:bg>
-    <p:spTree>
-      <p:nvGrpSpPr>
-        <p:cNvPr id="1" name=""/>
-        <p:cNvGrpSpPr/>
-        <p:nvPr/>
-      </p:nvGrpSpPr>
-      <p:grpSpPr/>
-      <p:sp>
-        <p:nvSpPr>
-          <p:cNvPr id="2" name="Rectangle 1"/>
-          <p:cNvSpPr/>
-          <p:nvPr/>
-        </p:nvSpPr>
-        <p:spPr>
-          <a:xfrm>
-            <a:off x="0" y="0"/>
-            <a:ext cx="12191695" cy="384048"/>
-          </a:xfrm>
-          <a:prstGeom prst="rect">
-            <a:avLst/>
-          </a:prstGeom>
-          <a:solidFill>
-            <a:srgbClr val="0B2D5B"/>
-          </a:solidFill>
-          <a:ln>
-            <a:noFill/>
-          </a:ln>
-          <a:effectLst/>
-        </p:spPr>
-        <p:style>
-          <a:lnRef idx="1">
-            <a:schemeClr val="accent1"/>
-          </a:lnRef>
-          <a:fillRef idx="3">
-            <a:schemeClr val="accent1"/>
-          </a:fillRef>
-          <a:effectRef idx="2">
-            <a:schemeClr val="accent1"/>
-          </a:effectRef>
-          <a:fontRef idx="minor">
-            <a:schemeClr val="lt1"/>
-          </a:fontRef>
-        </p:style>
-        <p:txBody>
-          <a:bodyPr rtlCol="0" anchor="ctr"/>
-          <a:lstStyle/>
-          <a:p>
-            <a:pPr algn="ctr"/>
-          </a:p>
-        </p:txBody>
-      </p:sp>
-      <p:sp>
-        <p:nvSpPr>
-          <p:cNvPr id="3" name="TextBox 2"/>
-          <p:cNvSpPr txBox="1"/>
-          <p:nvPr/>
-        </p:nvSpPr>
-        <p:spPr>
-          <a:xfrm>
-            <a:off x="548640" y="100584"/>
-            <a:ext cx="10972800" cy="274320"/>
-          </a:xfrm>
-          <a:prstGeom prst="rect">
-            <a:avLst/>
-          </a:prstGeom>
-          <a:noFill/>
-        </p:spPr>
-        <p:txBody>
-          <a:bodyPr wrap="square" anchor="t" lIns="0" rIns="0" tIns="0" bIns="0">
-            <a:spAutoFit/>
-          </a:bodyPr>
-          <a:lstStyle/>
-          <a:p>
-            <a:pPr algn="l">
-              <a:spcAft>
-                <a:spcPts val="495"/>
-              </a:spcAft>
-            </a:pPr>
-            <a:r>
-              <a:rPr sz="1100" b="1" i="0">
-                <a:solidFill>
-                  <a:srgbClr val="FFFFFF"/>
-                </a:solidFill>
-                <a:latin typeface="Inter Tight"/>
-              </a:rPr>
-              <a:t>TEACHER PAGE  ·  skipped when you present  ·  Every student in the room</a:t>
-            </a:r>
-          </a:p>
-        </p:txBody>
-      </p:sp>
-      <p:sp>
-        <p:nvSpPr>
-          <p:cNvPr id="4" name="TextBox 3"/>
-          <p:cNvSpPr txBox="1"/>
-          <p:nvPr/>
-        </p:nvSpPr>
-        <p:spPr>
-          <a:xfrm>
-            <a:off x="548640" y="685800"/>
-            <a:ext cx="10972800" cy="640080"/>
-          </a:xfrm>
-          <a:prstGeom prst="rect">
-            <a:avLst/>
-          </a:prstGeom>
-          <a:noFill/>
-        </p:spPr>
-        <p:txBody>
-          <a:bodyPr wrap="square" anchor="t" lIns="0" rIns="0" tIns="0" bIns="0">
-            <a:spAutoFit/>
-          </a:bodyPr>
-          <a:lstStyle/>
-          <a:p>
-            <a:pPr algn="l">
-              <a:spcAft>
-                <a:spcPts val="1350"/>
-              </a:spcAft>
-            </a:pPr>
-            <a:r>
-              <a:rPr sz="3000" b="1" i="0">
-                <a:solidFill>
-                  <a:srgbClr val="1C1B19"/>
-                </a:solidFill>
-                <a:latin typeface="Source Serif 4"/>
-              </a:rPr>
-              <a:t>Every student in the room</a:t>
-            </a:r>
-          </a:p>
-        </p:txBody>
-      </p:sp>
-      <p:sp>
-        <p:nvSpPr>
-          <p:cNvPr id="5" name="TextBox 4"/>
-          <p:cNvSpPr txBox="1"/>
-          <p:nvPr/>
-        </p:nvSpPr>
-        <p:spPr>
-          <a:xfrm>
-            <a:off x="548640" y="1325880"/>
-            <a:ext cx="10972800" cy="365760"/>
-          </a:xfrm>
-          <a:prstGeom prst="rect">
-            <a:avLst/>
-          </a:prstGeom>
-          <a:noFill/>
-        </p:spPr>
-        <p:txBody>
-          <a:bodyPr wrap="square" anchor="t" lIns="0" rIns="0" tIns="0" bIns="0">
-            <a:spAutoFit/>
-          </a:bodyPr>
-          <a:lstStyle/>
-          <a:p>
-            <a:pPr algn="l">
-              <a:spcAft>
-                <a:spcPts val="630"/>
-              </a:spcAft>
-            </a:pPr>
-            <a:r>
-              <a:rPr sz="1400" b="0" i="0">
-                <a:solidFill>
-                  <a:srgbClr val="5D5A54"/>
-                </a:solidFill>
-                <a:latin typeface="Inter Tight"/>
-              </a:rPr>
-              <a:t>Culture, family, identity, ability and money: what to keep in mind for this topic.</a:t>
-            </a:r>
-          </a:p>
-        </p:txBody>
-      </p:sp>
-      <p:sp>
-        <p:nvSpPr>
-          <p:cNvPr id="6" name="TextBox 5"/>
-          <p:cNvSpPr txBox="1"/>
-          <p:nvPr/>
-        </p:nvSpPr>
-        <p:spPr>
-          <a:xfrm>
-            <a:off x="548640" y="1828800"/>
-            <a:ext cx="5394960" cy="4572000"/>
-          </a:xfrm>
-          <a:prstGeom prst="rect">
-            <a:avLst/>
-          </a:prstGeom>
-          <a:noFill/>
-        </p:spPr>
-        <p:txBody>
-          <a:bodyPr wrap="square" anchor="t" lIns="0" rIns="0" tIns="0" bIns="0">
-            <a:spAutoFit/>
-          </a:bodyPr>
-          <a:lstStyle/>
-          <a:p>
-            <a:pPr algn="l">
-              <a:spcAft>
-                <a:spcPts val="585"/>
-              </a:spcAft>
-            </a:pPr>
-            <a:r>
-              <a:rPr sz="1500" b="1" i="0">
-                <a:solidFill>
-                  <a:srgbClr val="1C1B19"/>
-                </a:solidFill>
-                <a:latin typeface="Source Serif 4"/>
-              </a:rPr>
-              <a:t>Every gender plays, and none is the villain.</a:t>
-            </a:r>
-          </a:p>
-          <a:p>
-            <a:pPr algn="l">
-              <a:spcAft>
-                <a:spcPts val="585"/>
-              </a:spcAft>
-            </a:pPr>
-            <a:r>
-              <a:rPr sz="1300" b="0" i="0">
-                <a:solidFill>
-                  <a:srgbClr val="1C1B19"/>
-                </a:solidFill>
-                <a:latin typeface="Source Serif 4"/>
-              </a:rPr>
-              <a:t>Present the quiet moves and the loud moves as patterns that show up in any group. Girls can be loud, competitive and ambitious; guys can be gentle and close with their friends. If the circle starts sorting people into "mean girls" and "meathead guys," say so and point back to the 148 studies.</a:t>
-            </a:r>
-          </a:p>
-          <a:p>
-            <a:pPr algn="l">
-              <a:spcAft>
-                <a:spcPts val="585"/>
-              </a:spcAft>
-            </a:pPr>
-            <a:r>
-              <a:rPr sz="1300" b="0" i="0">
-                <a:solidFill>
-                  <a:srgbClr val="1C1B19"/>
-                </a:solidFill>
-                <a:latin typeface="Source Serif 4"/>
-              </a:rPr>
-              <a:t/>
-            </a:r>
-          </a:p>
-          <a:p>
-            <a:pPr algn="l">
-              <a:spcAft>
-                <a:spcPts val="585"/>
-              </a:spcAft>
-            </a:pPr>
-            <a:r>
-              <a:rPr sz="1500" b="1" i="0">
-                <a:solidFill>
-                  <a:srgbClr val="1C1B19"/>
-                </a:solidFill>
-                <a:latin typeface="Source Serif 4"/>
-              </a:rPr>
-              <a:t>Trans and nonbinary students can land outside both scripts.</a:t>
-            </a:r>
-          </a:p>
-          <a:p>
-            <a:pPr algn="l">
-              <a:spcAft>
-                <a:spcPts val="585"/>
-              </a:spcAft>
-            </a:pPr>
-            <a:r>
-              <a:rPr sz="1300" b="0" i="0">
-                <a:solidFill>
-                  <a:srgbClr val="1C1B19"/>
-                </a:solidFill>
-                <a:latin typeface="Source Serif 4"/>
-              </a:rPr>
-              <a:t>Many friend groups are quietly sorted by gender, so a trans or nonbinary student may feel the group deciding which "side" they belong on. Don't ask anyone to speak for that experience. Use the scenarios as written and keep identity talk general.</a:t>
-            </a:r>
-          </a:p>
-          <a:p>
-            <a:pPr algn="l">
-              <a:spcAft>
-                <a:spcPts val="585"/>
-              </a:spcAft>
-            </a:pPr>
-            <a:r>
-              <a:rPr sz="1300" b="0" i="0">
-                <a:solidFill>
-                  <a:srgbClr val="1C1B19"/>
-                </a:solidFill>
-                <a:latin typeface="Source Serif 4"/>
-              </a:rPr>
-              <a:t/>
-            </a:r>
-          </a:p>
-          <a:p>
-            <a:pPr algn="l">
-              <a:spcAft>
-                <a:spcPts val="585"/>
-              </a:spcAft>
-            </a:pPr>
-            <a:r>
-              <a:rPr sz="1500" b="1" i="0">
-                <a:solidFill>
-                  <a:srgbClr val="1C1B19"/>
-                </a:solidFill>
-                <a:latin typeface="Source Serif 4"/>
-              </a:rPr>
-              <a:t>"Soft" and anti-gay insults are power moves.</a:t>
-            </a:r>
-          </a:p>
-          <a:p>
-            <a:pPr algn="l">
-              <a:spcAft>
-                <a:spcPts val="585"/>
-              </a:spcAft>
-            </a:pPr>
-            <a:r>
-              <a:rPr sz="1300" b="0" i="0">
-                <a:solidFill>
-                  <a:srgbClr val="1C1B19"/>
-                </a:solidFill>
-                <a:latin typeface="Source Serif 4"/>
-              </a:rPr>
-              <a:t>Pascoe found these words were used mostly to police who counts as a "real guy," whatever anyone's orientation. Name that plainly so gay, bi and questioning students hear the adult in the room treat it as a power move.</a:t>
-            </a:r>
-          </a:p>
-          <a:p>
-            <a:pPr algn="l">
-              <a:spcAft>
-                <a:spcPts val="585"/>
-              </a:spcAft>
-            </a:pPr>
-            <a:r>
-              <a:rPr sz="1300" b="0" i="0">
-                <a:solidFill>
-                  <a:srgbClr val="1C1B19"/>
-                </a:solidFill>
-                <a:latin typeface="Source Serif 4"/>
-              </a:rPr>
-              <a:t/>
-            </a:r>
-          </a:p>
-        </p:txBody>
-      </p:sp>
-      <p:sp>
-        <p:nvSpPr>
-          <p:cNvPr id="7" name="TextBox 6"/>
-          <p:cNvSpPr txBox="1"/>
-          <p:nvPr/>
-        </p:nvSpPr>
-        <p:spPr>
-          <a:xfrm>
-            <a:off x="6217920" y="1828800"/>
-            <a:ext cx="5394960" cy="4572000"/>
-          </a:xfrm>
-          <a:prstGeom prst="rect">
-            <a:avLst/>
-          </a:prstGeom>
-          <a:noFill/>
-        </p:spPr>
-        <p:txBody>
-          <a:bodyPr wrap="square" anchor="t" lIns="0" rIns="0" tIns="0" bIns="0">
-            <a:spAutoFit/>
-          </a:bodyPr>
-          <a:lstStyle/>
-          <a:p>
-            <a:pPr algn="l">
-              <a:spcAft>
-                <a:spcPts val="585"/>
-              </a:spcAft>
-            </a:pPr>
-            <a:r>
-              <a:rPr sz="1500" b="1" i="0">
-                <a:solidFill>
-                  <a:srgbClr val="1C1B19"/>
-                </a:solidFill>
-                <a:latin typeface="Source Serif 4"/>
-              </a:rPr>
-              <a:t>Loyalty means different things in different families.</a:t>
-            </a:r>
-          </a:p>
-          <a:p>
-            <a:pPr algn="l">
-              <a:spcAft>
-                <a:spcPts val="585"/>
-              </a:spcAft>
-            </a:pPr>
-            <a:r>
-              <a:rPr sz="1300" b="0" i="0">
-                <a:solidFill>
-                  <a:srgbClr val="1C1B19"/>
-                </a:solidFill>
-                <a:latin typeface="Source Serif 4"/>
-              </a:rPr>
-              <a:t>In some families friends become family; in others private things stay private. Avoid "In X families" generalizations. Ask students what they were taught about loyalty, privately, and treat every answer as valid. Students of color in a mostly white grade, and students new to Beaver or new to the country, may carry extra pressure to fit the group's idea of how to act.</a:t>
-            </a:r>
-          </a:p>
-          <a:p>
-            <a:pPr algn="l">
-              <a:spcAft>
-                <a:spcPts val="585"/>
-              </a:spcAft>
-            </a:pPr>
-            <a:r>
-              <a:rPr sz="1300" b="0" i="0">
-                <a:solidFill>
-                  <a:srgbClr val="1C1B19"/>
-                </a:solidFill>
-                <a:latin typeface="Source Serif 4"/>
-              </a:rPr>
-              <a:t/>
-            </a:r>
-          </a:p>
-          <a:p>
-            <a:pPr algn="l">
-              <a:spcAft>
-                <a:spcPts val="585"/>
-              </a:spcAft>
-            </a:pPr>
-            <a:r>
-              <a:rPr sz="1500" b="1" i="0">
-                <a:solidFill>
-                  <a:srgbClr val="1C1B19"/>
-                </a:solidFill>
-                <a:latin typeface="Source Serif 4"/>
-              </a:rPr>
-              <a:t>Groups often form around money.</a:t>
-            </a:r>
-          </a:p>
-          <a:p>
-            <a:pPr algn="l">
-              <a:spcAft>
-                <a:spcPts val="585"/>
-              </a:spcAft>
-            </a:pPr>
-            <a:r>
-              <a:rPr sz="1300" b="0" i="0">
-                <a:solidFill>
-                  <a:srgbClr val="1C1B19"/>
-                </a:solidFill>
-                <a:latin typeface="Source Serif 4"/>
-              </a:rPr>
-              <a:t>Prom groups, formal tables, rides and weekend plans can quietly sort people by who has a car or spending money. "Keep more than one circle" includes a job, cousins, a youth group or online friends, so students who work or care for siblings hear their circles counted.</a:t>
-            </a:r>
-          </a:p>
-          <a:p>
-            <a:pPr algn="l">
-              <a:spcAft>
-                <a:spcPts val="585"/>
-              </a:spcAft>
-            </a:pPr>
-            <a:r>
-              <a:rPr sz="1300" b="0" i="0">
-                <a:solidFill>
-                  <a:srgbClr val="1C1B19"/>
-                </a:solidFill>
-                <a:latin typeface="Source Serif 4"/>
-              </a:rPr>
-              <a:t/>
-            </a:r>
-          </a:p>
-          <a:p>
-            <a:pPr algn="l">
-              <a:spcAft>
-                <a:spcPts val="585"/>
-              </a:spcAft>
-            </a:pPr>
-            <a:r>
-              <a:rPr sz="1500" b="1" i="0">
-                <a:solidFill>
-                  <a:srgbClr val="1C1B19"/>
-                </a:solidFill>
-                <a:latin typeface="Source Serif 4"/>
-              </a:rPr>
-              <a:t>The freeze-out is harder for some students to read.</a:t>
-            </a:r>
-          </a:p>
-          <a:p>
-            <a:pPr algn="l">
-              <a:spcAft>
-                <a:spcPts val="585"/>
-              </a:spcAft>
-            </a:pPr>
-            <a:r>
-              <a:rPr sz="1300" b="0" i="0">
-                <a:solidFill>
-                  <a:srgbClr val="1C1B19"/>
-                </a:solidFill>
-                <a:latin typeface="Source Serif 4"/>
-              </a:rPr>
-              <a:t>Autistic students and students with social anxiety may miss quiet cues, or read every silence as rejection. Say that asking the person directly ("Is something going on with us?") is a strong move for everyone. Let students show a thumbs vote at their desk, without having to speak.</a:t>
-            </a:r>
-          </a:p>
-          <a:p>
-            <a:pPr algn="l">
-              <a:spcAft>
-                <a:spcPts val="585"/>
-              </a:spcAft>
-            </a:pPr>
-            <a:r>
-              <a:rPr sz="1300" b="0" i="0">
-                <a:solidFill>
-                  <a:srgbClr val="1C1B19"/>
-                </a:solidFill>
-                <a:latin typeface="Source Serif 4"/>
-              </a:rPr>
-              <a:t/>
-            </a:r>
-          </a:p>
-        </p:txBody>
-      </p:sp>
-    </p:spTree>
-  </p:cSld>
-  <p:clrMapOvr>
-    <a:masterClrMapping/>
-  </p:clrMapOvr>
-</p:sld>
-</file>
-
-<file path=ppt/slides/slide4.xml><?xml version="1.0" encoding="utf-8"?>
-<p:sld xmlns:a="http://schemas.openxmlformats.org/drawingml/2006/main" xmlns:p="http://schemas.openxmlformats.org/presentationml/2006/main" xmlns:r="http://schemas.openxmlformats.org/officeDocument/2006/relationships" show="0">
-  <p:cSld>
-    <p:bg>
-      <p:bgPr>
-        <a:solidFill>
-          <a:srgbClr val="EEEBE4"/>
-        </a:solidFill>
-        <a:effectLst/>
-      </p:bgPr>
-    </p:bg>
-    <p:spTree>
-      <p:nvGrpSpPr>
-        <p:cNvPr id="1" name=""/>
-        <p:cNvGrpSpPr/>
-        <p:nvPr/>
-      </p:nvGrpSpPr>
-      <p:grpSpPr/>
-      <p:sp>
-        <p:nvSpPr>
-          <p:cNvPr id="2" name="Rectangle 1"/>
-          <p:cNvSpPr/>
-          <p:nvPr/>
-        </p:nvSpPr>
-        <p:spPr>
-          <a:xfrm>
-            <a:off x="0" y="0"/>
-            <a:ext cx="12191695" cy="384048"/>
-          </a:xfrm>
-          <a:prstGeom prst="rect">
-            <a:avLst/>
-          </a:prstGeom>
-          <a:solidFill>
-            <a:srgbClr val="0B2D5B"/>
-          </a:solidFill>
-          <a:ln>
-            <a:noFill/>
-          </a:ln>
-          <a:effectLst/>
-        </p:spPr>
-        <p:style>
-          <a:lnRef idx="1">
-            <a:schemeClr val="accent1"/>
-          </a:lnRef>
-          <a:fillRef idx="3">
-            <a:schemeClr val="accent1"/>
-          </a:fillRef>
-          <a:effectRef idx="2">
-            <a:schemeClr val="accent1"/>
-          </a:effectRef>
-          <a:fontRef idx="minor">
-            <a:schemeClr val="lt1"/>
-          </a:fontRef>
-        </p:style>
-        <p:txBody>
-          <a:bodyPr rtlCol="0" anchor="ctr"/>
-          <a:lstStyle/>
-          <a:p>
-            <a:pPr algn="ctr"/>
-          </a:p>
-        </p:txBody>
-      </p:sp>
-      <p:sp>
-        <p:nvSpPr>
-          <p:cNvPr id="3" name="TextBox 2"/>
-          <p:cNvSpPr txBox="1"/>
-          <p:nvPr/>
-        </p:nvSpPr>
-        <p:spPr>
-          <a:xfrm>
-            <a:off x="548640" y="100584"/>
-            <a:ext cx="10972800" cy="274320"/>
-          </a:xfrm>
-          <a:prstGeom prst="rect">
-            <a:avLst/>
-          </a:prstGeom>
-          <a:noFill/>
-        </p:spPr>
-        <p:txBody>
-          <a:bodyPr wrap="square" anchor="t" lIns="0" rIns="0" tIns="0" bIns="0">
-            <a:spAutoFit/>
-          </a:bodyPr>
-          <a:lstStyle/>
-          <a:p>
-            <a:pPr algn="l">
-              <a:spcAft>
-                <a:spcPts val="495"/>
-              </a:spcAft>
-            </a:pPr>
-            <a:r>
-              <a:rPr sz="1100" b="1" i="0">
-                <a:solidFill>
-                  <a:srgbClr val="FFFFFF"/>
-                </a:solidFill>
-                <a:latin typeface="Inter Tight"/>
-              </a:rPr>
-              <a:t>TEACHER PAGE  ·  skipped when you present  ·  Background</a:t>
-            </a:r>
-          </a:p>
-        </p:txBody>
-      </p:sp>
-      <p:sp>
-        <p:nvSpPr>
-          <p:cNvPr id="4" name="TextBox 3"/>
-          <p:cNvSpPr txBox="1"/>
-          <p:nvPr/>
-        </p:nvSpPr>
-        <p:spPr>
-          <a:xfrm>
-            <a:off x="548640" y="685800"/>
-            <a:ext cx="10972800" cy="640080"/>
-          </a:xfrm>
-          <a:prstGeom prst="rect">
-            <a:avLst/>
-          </a:prstGeom>
-          <a:noFill/>
-        </p:spPr>
-        <p:txBody>
-          <a:bodyPr wrap="square" anchor="t" lIns="0" rIns="0" tIns="0" bIns="0">
-            <a:spAutoFit/>
-          </a:bodyPr>
-          <a:lstStyle/>
-          <a:p>
-            <a:pPr algn="l">
-              <a:spcAft>
-                <a:spcPts val="1350"/>
-              </a:spcAft>
-            </a:pPr>
-            <a:r>
-              <a:rPr sz="3000" b="1" i="0">
-                <a:solidFill>
-                  <a:srgbClr val="1C1B19"/>
-                </a:solidFill>
-                <a:latin typeface="Source Serif 4"/>
-              </a:rPr>
-              <a:t>What the research says</a:t>
-            </a:r>
-          </a:p>
-        </p:txBody>
-      </p:sp>
-      <p:sp>
-        <p:nvSpPr>
-          <p:cNvPr id="5" name="TextBox 4"/>
-          <p:cNvSpPr txBox="1"/>
-          <p:nvPr/>
-        </p:nvSpPr>
-        <p:spPr>
-          <a:xfrm>
-            <a:off x="548640" y="1463040"/>
-            <a:ext cx="5394960" cy="4937760"/>
-          </a:xfrm>
-          <a:prstGeom prst="rect">
-            <a:avLst/>
-          </a:prstGeom>
-          <a:noFill/>
-        </p:spPr>
-        <p:txBody>
-          <a:bodyPr wrap="square" anchor="t" lIns="0" rIns="0" tIns="0" bIns="0">
-            <a:spAutoFit/>
-          </a:bodyPr>
-          <a:lstStyle/>
-          <a:p>
-            <a:pPr algn="l">
-              <a:spcAft>
-                <a:spcPts val="585"/>
-              </a:spcAft>
-            </a:pPr>
-            <a:r>
-              <a:rPr sz="1300" b="0" i="0">
-                <a:solidFill>
-                  <a:srgbClr val="1C1B19"/>
-                </a:solidFill>
-                <a:latin typeface="Source Serif 4"/>
-              </a:rPr>
-              <a:t>When students name who is popular and who they like, the lists overlap but don't match. Perceived popularity and being liked are two separate measures.</a:t>
-            </a:r>
-          </a:p>
-          <a:p>
-            <a:pPr algn="l">
-              <a:spcAft>
-                <a:spcPts val="585"/>
-              </a:spcAft>
-            </a:pPr>
-            <a:r>
-              <a:rPr sz="1050" b="0" i="0">
-                <a:solidFill>
-                  <a:srgbClr val="5D5A54"/>
-                </a:solidFill>
-                <a:latin typeface="Inter Tight"/>
-              </a:rPr>
-              <a:t>Parkhurst and Hopmeyer, Journal of Early Adolescence, 1998</a:t>
-            </a:r>
-          </a:p>
-          <a:p>
-            <a:pPr algn="l">
-              <a:spcAft>
-                <a:spcPts val="585"/>
-              </a:spcAft>
-            </a:pPr>
-            <a:r>
-              <a:rPr sz="1300" b="0" i="0">
-                <a:solidFill>
-                  <a:srgbClr val="1C1B19"/>
-                </a:solidFill>
-                <a:latin typeface="Source Serif 4"/>
-              </a:rPr>
-              <a:t>Following about 300 students every year from 5th to 12th grade, researchers found that leaving people out and spreading rumors raised how popular a student seemed and lowered how much they were liked. The trade-off was strongest for girls and peaked during the move to high school.</a:t>
-            </a:r>
-          </a:p>
-          <a:p>
-            <a:pPr algn="l">
-              <a:spcAft>
-                <a:spcPts val="585"/>
-              </a:spcAft>
-            </a:pPr>
-            <a:r>
-              <a:rPr sz="1050" b="0" i="0">
-                <a:solidFill>
-                  <a:srgbClr val="5D5A54"/>
-                </a:solidFill>
-                <a:latin typeface="Inter Tight"/>
-              </a:rPr>
-              <a:t>Cillessen and Borch, Journal of Adolescence, 2006</a:t>
-            </a:r>
-          </a:p>
-          <a:p>
-            <a:pPr algn="l">
-              <a:spcAft>
-                <a:spcPts val="585"/>
-              </a:spcAft>
-            </a:pPr>
-            <a:r>
-              <a:rPr sz="1300" b="0" i="0">
-                <a:solidFill>
-                  <a:srgbClr val="1C1B19"/>
-                </a:solidFill>
-                <a:latin typeface="Source Serif 4"/>
-              </a:rPr>
-              <a:t>Hurting someone through their relationships instead of with fists was named relational aggression in 1995.</a:t>
-            </a:r>
-          </a:p>
-          <a:p>
-            <a:pPr algn="l">
-              <a:spcAft>
-                <a:spcPts val="585"/>
-              </a:spcAft>
-            </a:pPr>
-            <a:r>
-              <a:rPr sz="1050" b="0" i="0">
-                <a:solidFill>
-                  <a:srgbClr val="5D5A54"/>
-                </a:solidFill>
-                <a:latin typeface="Inter Tight"/>
-              </a:rPr>
-              <a:t>Crick and Grotpeter, Child Development, 1995</a:t>
-            </a:r>
-          </a:p>
-          <a:p>
-            <a:pPr algn="l">
-              <a:spcAft>
-                <a:spcPts val="585"/>
-              </a:spcAft>
-            </a:pPr>
-            <a:r>
-              <a:rPr sz="1300" b="0" i="0">
-                <a:solidFill>
-                  <a:srgbClr val="1C1B19"/>
-                </a:solidFill>
-                <a:latin typeface="Source Serif 4"/>
-              </a:rPr>
-              <a:t>A review of 148 studies and about 74,000 kids found girls use relational aggression only slightly more than boys, a difference the authors called trivial. Boys also fight physically more.</a:t>
-            </a:r>
-          </a:p>
-          <a:p>
-            <a:pPr algn="l">
-              <a:spcAft>
-                <a:spcPts val="585"/>
-              </a:spcAft>
-            </a:pPr>
-            <a:r>
-              <a:rPr sz="1050" b="0" i="0">
-                <a:solidFill>
-                  <a:srgbClr val="5D5A54"/>
-                </a:solidFill>
-                <a:latin typeface="Inter Tight"/>
-              </a:rPr>
-              <a:t>Card, Stucky, Sawalani and Little, Child Development, 2008</a:t>
-            </a:r>
-          </a:p>
-        </p:txBody>
-      </p:sp>
-      <p:sp>
-        <p:nvSpPr>
-          <p:cNvPr id="6" name="TextBox 5"/>
-          <p:cNvSpPr txBox="1"/>
-          <p:nvPr/>
-        </p:nvSpPr>
-        <p:spPr>
-          <a:xfrm>
-            <a:off x="6217920" y="1463040"/>
-            <a:ext cx="5394960" cy="4937760"/>
-          </a:xfrm>
-          <a:prstGeom prst="rect">
-            <a:avLst/>
-          </a:prstGeom>
-          <a:noFill/>
-        </p:spPr>
-        <p:txBody>
-          <a:bodyPr wrap="square" anchor="t" lIns="0" rIns="0" tIns="0" bIns="0">
-            <a:spAutoFit/>
-          </a:bodyPr>
-          <a:lstStyle/>
-          <a:p>
-            <a:pPr algn="l">
-              <a:spcAft>
-                <a:spcPts val="585"/>
-              </a:spcAft>
-            </a:pPr>
-            <a:r>
-              <a:rPr sz="1300" b="0" i="0">
-                <a:solidFill>
-                  <a:srgbClr val="1C1B19"/>
-                </a:solidFill>
-                <a:latin typeface="Source Serif 4"/>
-              </a:rPr>
-              <a:t>In 18 months at a California high school, a sociologist found guys used anti-gay insults mostly to police who counted as a "real guy," whatever anyone's orientation.</a:t>
-            </a:r>
-          </a:p>
-          <a:p>
-            <a:pPr algn="l">
-              <a:spcAft>
-                <a:spcPts val="585"/>
-              </a:spcAft>
-            </a:pPr>
-            <a:r>
-              <a:rPr sz="1050" b="0" i="0">
-                <a:solidFill>
-                  <a:srgbClr val="5D5A54"/>
-                </a:solidFill>
-                <a:latin typeface="Inter Tight"/>
-              </a:rPr>
-              <a:t>Pascoe, Dude, You're a F*g, 2007</a:t>
-            </a:r>
-          </a:p>
-          <a:p>
-            <a:pPr algn="l">
-              <a:spcAft>
-                <a:spcPts val="585"/>
-              </a:spcAft>
-            </a:pPr>
-            <a:r>
-              <a:rPr sz="1300" b="0" i="0">
-                <a:solidFill>
-                  <a:srgbClr val="1C1B19"/>
-                </a:solidFill>
-                <a:latin typeface="Source Serif 4"/>
-              </a:rPr>
-              <a:t>Kids who chased status at 13 by acting older were seen as cool. By their early 20s they had more trouble in close relationships and more problems with alcohol, drugs and the law than their peers.</a:t>
-            </a:r>
-          </a:p>
-          <a:p>
-            <a:pPr algn="l">
-              <a:spcAft>
-                <a:spcPts val="585"/>
-              </a:spcAft>
-            </a:pPr>
-            <a:r>
-              <a:rPr sz="1050" b="0" i="0">
-                <a:solidFill>
-                  <a:srgbClr val="5D5A54"/>
-                </a:solidFill>
-                <a:latin typeface="Inter Tight"/>
-              </a:rPr>
-              <a:t>Allen, Schad, Oudekerk and Chango, Child Development, 2014</a:t>
-            </a:r>
-          </a:p>
-          <a:p>
-            <a:pPr algn="l">
-              <a:spcAft>
-                <a:spcPts val="585"/>
-              </a:spcAft>
-            </a:pPr>
-            <a:r>
-              <a:rPr sz="1300" b="0" i="0">
-                <a:solidFill>
-                  <a:srgbClr val="1C1B19"/>
-                </a:solidFill>
-                <a:latin typeface="Source Serif 4"/>
-              </a:rPr>
-              <a:t>When other players stopped throwing to them in an online game of catch, people showed activity in a brain area that also responds to physical pain, and it tracked how upset they felt. Scientists still debate how close the overlap is.</a:t>
-            </a:r>
-          </a:p>
-          <a:p>
-            <a:pPr algn="l">
-              <a:spcAft>
-                <a:spcPts val="585"/>
-              </a:spcAft>
-            </a:pPr>
-            <a:r>
-              <a:rPr sz="1050" b="0" i="0">
-                <a:solidFill>
-                  <a:srgbClr val="5D5A54"/>
-                </a:solidFill>
-                <a:latin typeface="Inter Tight"/>
-              </a:rPr>
-              <a:t>Eisenberger, Lieberman and Williams, Science, 2003</a:t>
-            </a:r>
-          </a:p>
-          <a:p>
-            <a:pPr algn="l">
-              <a:spcAft>
-                <a:spcPts val="585"/>
-              </a:spcAft>
-            </a:pPr>
-            <a:r>
-              <a:rPr sz="1300" b="0" i="0">
-                <a:solidFill>
-                  <a:srgbClr val="1C1B19"/>
-                </a:solidFill>
-                <a:latin typeface="Source Serif 4"/>
-              </a:rPr>
-              <a:t>In recorded recess observations, other kids were around for 88% of bullying episodes and stepped in during 19%. When someone stepped in, the bullying stopped 57% of the time.</a:t>
-            </a:r>
-          </a:p>
-          <a:p>
-            <a:pPr algn="l">
-              <a:spcAft>
-                <a:spcPts val="585"/>
-              </a:spcAft>
-            </a:pPr>
-            <a:r>
-              <a:rPr sz="1050" b="0" i="0">
-                <a:solidFill>
-                  <a:srgbClr val="5D5A54"/>
-                </a:solidFill>
-                <a:latin typeface="Inter Tight"/>
-              </a:rPr>
-              <a:t>Hawkins, Pepler and Craig, Social Development, 2001</a:t>
-            </a:r>
-          </a:p>
-        </p:txBody>
-      </p:sp>
-    </p:spTree>
-  </p:cSld>
-  <p:clrMapOvr>
-    <a:masterClrMapping/>
-  </p:clrMapOvr>
-</p:sld>
-</file>
-
-<file path=ppt/slides/slide5.xml><?xml version="1.0" encoding="utf-8"?>
-<p:sld xmlns:a="http://schemas.openxmlformats.org/drawingml/2006/main" xmlns:p="http://schemas.openxmlformats.org/presentationml/2006/main" xmlns:r="http://schemas.openxmlformats.org/officeDocument/2006/relationships">
-  <p:cSld>
-    <p:bg>
-      <p:bgPr>
-        <a:solidFill>
-          <a:srgbClr val="0B2D5B"/>
-        </a:solidFill>
-        <a:effectLst/>
-      </p:bgPr>
-    </p:bg>
-    <p:spTree>
-      <p:nvGrpSpPr>
-        <p:cNvPr id="1" name=""/>
-        <p:cNvGrpSpPr/>
-        <p:nvPr/>
-      </p:nvGrpSpPr>
-      <p:grpSpPr/>
-      <p:sp>
-        <p:nvSpPr>
-          <p:cNvPr id="2" name="Rectangle 1"/>
-          <p:cNvSpPr/>
-          <p:nvPr/>
-        </p:nvSpPr>
-        <p:spPr>
-          <a:xfrm>
-            <a:off x="548640" y="502920"/>
-            <a:ext cx="457200" cy="54864"/>
-          </a:xfrm>
-          <a:prstGeom prst="rect">
-            <a:avLst/>
-          </a:prstGeom>
-          <a:solidFill>
-            <a:srgbClr val="F47B20"/>
-          </a:solidFill>
-          <a:ln>
-            <a:noFill/>
-          </a:ln>
-          <a:effectLst/>
-        </p:spPr>
-        <p:style>
-          <a:lnRef idx="1">
-            <a:schemeClr val="accent1"/>
-          </a:lnRef>
-          <a:fillRef idx="3">
-            <a:schemeClr val="accent1"/>
-          </a:fillRef>
-          <a:effectRef idx="2">
-            <a:schemeClr val="accent1"/>
-          </a:effectRef>
-          <a:fontRef idx="minor">
-            <a:schemeClr val="lt1"/>
-          </a:fontRef>
-        </p:style>
-        <p:txBody>
-          <a:bodyPr rtlCol="0" anchor="ctr"/>
-          <a:lstStyle/>
-          <a:p>
-            <a:pPr algn="ctr"/>
-          </a:p>
-        </p:txBody>
-      </p:sp>
-      <p:sp>
-        <p:nvSpPr>
-          <p:cNvPr id="3" name="TextBox 2"/>
-          <p:cNvSpPr txBox="1"/>
-          <p:nvPr/>
-        </p:nvSpPr>
-        <p:spPr>
-          <a:xfrm>
-            <a:off x="1143000" y="393192"/>
-            <a:ext cx="8229600" cy="274320"/>
-          </a:xfrm>
-          <a:prstGeom prst="rect">
-            <a:avLst/>
-          </a:prstGeom>
-          <a:noFill/>
-        </p:spPr>
-        <p:txBody>
-          <a:bodyPr wrap="square" anchor="t" lIns="0" rIns="0" tIns="0" bIns="0">
-            <a:spAutoFit/>
-          </a:bodyPr>
-          <a:lstStyle/>
-          <a:p>
-            <a:pPr algn="l">
-              <a:spcAft>
-                <a:spcPts val="540"/>
-              </a:spcAft>
-            </a:pPr>
-            <a:r>
-              <a:rPr sz="1200" b="1" i="0">
-                <a:solidFill>
-                  <a:srgbClr val="5D5A54"/>
-                </a:solidFill>
-                <a:latin typeface="Inter Tight"/>
-              </a:rPr>
-              <a:t>INNER CIRCLE</a:t>
-            </a:r>
-          </a:p>
-        </p:txBody>
-      </p:sp>
-      <p:sp>
-        <p:nvSpPr>
-          <p:cNvPr id="4" name="TextBox 3"/>
-          <p:cNvSpPr txBox="1"/>
-          <p:nvPr/>
-        </p:nvSpPr>
-        <p:spPr>
-          <a:xfrm>
-            <a:off x="8229600" y="6400800"/>
-            <a:ext cx="3410712" cy="274320"/>
-          </a:xfrm>
-          <a:prstGeom prst="rect">
-            <a:avLst/>
-          </a:prstGeom>
-          <a:noFill/>
-        </p:spPr>
-        <p:txBody>
-          <a:bodyPr wrap="square" anchor="t" lIns="0" rIns="0" tIns="0" bIns="0">
-            <a:spAutoFit/>
-          </a:bodyPr>
-          <a:lstStyle/>
-          <a:p>
-            <a:pPr algn="r">
-              <a:spcAft>
-                <a:spcPts val="450"/>
-              </a:spcAft>
-            </a:pPr>
-            <a:r>
-              <a:rPr sz="1000" b="0" i="0">
-                <a:solidFill>
-                  <a:srgbClr val="5D5A54"/>
-                </a:solidFill>
-                <a:latin typeface="Inter Tight"/>
-              </a:rPr>
-              <a:t>Beaver Counseling</a:t>
-            </a:r>
-          </a:p>
-        </p:txBody>
-      </p:sp>
-      <p:sp>
-        <p:nvSpPr>
-          <p:cNvPr id="5" name="TextBox 4"/>
-          <p:cNvSpPr txBox="1"/>
-          <p:nvPr/>
-        </p:nvSpPr>
-        <p:spPr>
-          <a:xfrm>
-            <a:off x="822960" y="2011680"/>
-            <a:ext cx="10515600" cy="1463040"/>
-          </a:xfrm>
-          <a:prstGeom prst="rect">
-            <a:avLst/>
-          </a:prstGeom>
-          <a:noFill/>
-        </p:spPr>
-        <p:txBody>
-          <a:bodyPr wrap="square" anchor="b" lIns="0" rIns="0" tIns="0" bIns="0">
-            <a:spAutoFit/>
-          </a:bodyPr>
-          <a:lstStyle/>
-          <a:p>
-            <a:pPr algn="l">
-              <a:spcAft>
-                <a:spcPts val="2700"/>
-              </a:spcAft>
-            </a:pPr>
-            <a:r>
-              <a:rPr sz="6000" b="1" i="0">
-                <a:solidFill>
-                  <a:srgbClr val="FFFFFF"/>
-                </a:solidFill>
-                <a:latin typeface="Source Serif 4"/>
-              </a:rPr>
-              <a:t>Inner Circle</a:t>
-            </a:r>
-          </a:p>
-        </p:txBody>
-      </p:sp>
-      <p:sp>
-        <p:nvSpPr>
-          <p:cNvPr id="6" name="TextBox 5"/>
-          <p:cNvSpPr txBox="1"/>
-          <p:nvPr/>
-        </p:nvSpPr>
-        <p:spPr>
-          <a:xfrm>
-            <a:off x="822960" y="3611880"/>
-            <a:ext cx="10515600" cy="914400"/>
-          </a:xfrm>
-          <a:prstGeom prst="rect">
-            <a:avLst/>
-          </a:prstGeom>
-          <a:noFill/>
-        </p:spPr>
-        <p:txBody>
-          <a:bodyPr wrap="square" anchor="t" lIns="0" rIns="0" tIns="0" bIns="0">
-            <a:spAutoFit/>
-          </a:bodyPr>
-          <a:lstStyle/>
-          <a:p>
-            <a:pPr algn="l">
-              <a:spcAft>
-                <a:spcPts val="1080"/>
-              </a:spcAft>
-            </a:pPr>
-            <a:r>
-              <a:rPr sz="2400" b="0" i="1">
-                <a:solidFill>
-                  <a:srgbClr val="E8E4DA"/>
-                </a:solidFill>
-                <a:latin typeface="Source Serif 4"/>
-              </a:rPr>
-              <a:t>Nobody said anything. Everybody knew.</a:t>
-            </a:r>
-          </a:p>
-        </p:txBody>
-      </p:sp>
-      <p:sp>
-        <p:nvSpPr>
-          <p:cNvPr id="7" name="TextBox 6"/>
-          <p:cNvSpPr txBox="1"/>
-          <p:nvPr/>
-        </p:nvSpPr>
-        <p:spPr>
-          <a:xfrm>
-            <a:off x="822960" y="6035040"/>
-            <a:ext cx="7315200" cy="365760"/>
-          </a:xfrm>
-          <a:prstGeom prst="rect">
-            <a:avLst/>
-          </a:prstGeom>
-          <a:noFill/>
-        </p:spPr>
-        <p:txBody>
-          <a:bodyPr wrap="square" anchor="t" lIns="0" rIns="0" tIns="0" bIns="0">
-            <a:spAutoFit/>
-          </a:bodyPr>
-          <a:lstStyle/>
-          <a:p>
-            <a:pPr algn="l">
-              <a:spcAft>
-                <a:spcPts val="585"/>
-              </a:spcAft>
-            </a:pPr>
-            <a:r>
-              <a:rPr sz="1300" b="0" i="0">
-                <a:solidFill>
-                  <a:srgbClr val="E8E4DA"/>
-                </a:solidFill>
-                <a:latin typeface="Inter Tight"/>
-              </a:rPr>
-              <a:t>Beaver Upper School · Counseling</a:t>
+              <a:t>Calling someone "soft" to keep him in line</a:t>
             </a:r>
           </a:p>
         </p:txBody>
@@ -7939,7 +8176,7 @@
                 </a:solidFill>
                 <a:latin typeface="Inter Tight"/>
               </a:rPr>
-              <a:t>SOUND FAMILIAR?</a:t>
+              <a:t>ANONYMOUS CARDS</a:t>
             </a:r>
           </a:p>
         </p:txBody>
@@ -7985,14 +8222,97 @@
       </p:sp>
       <p:sp>
         <p:nvSpPr>
-          <p:cNvPr id="5" name="TextBox 4"/>
+          <p:cNvPr id="5" name="Rectangle 4"/>
+          <p:cNvSpPr/>
+          <p:nvPr/>
+        </p:nvSpPr>
+        <p:spPr>
+          <a:xfrm>
+            <a:off x="822960" y="1371600"/>
+            <a:ext cx="73152" cy="3566160"/>
+          </a:xfrm>
+          <a:prstGeom prst="rect">
+            <a:avLst/>
+          </a:prstGeom>
+          <a:solidFill>
+            <a:srgbClr val="F47B20"/>
+          </a:solidFill>
+          <a:ln>
+            <a:noFill/>
+          </a:ln>
+          <a:effectLst/>
+        </p:spPr>
+        <p:style>
+          <a:lnRef idx="1">
+            <a:schemeClr val="accent1"/>
+          </a:lnRef>
+          <a:fillRef idx="3">
+            <a:schemeClr val="accent1"/>
+          </a:fillRef>
+          <a:effectRef idx="2">
+            <a:schemeClr val="accent1"/>
+          </a:effectRef>
+          <a:fontRef idx="minor">
+            <a:schemeClr val="lt1"/>
+          </a:fontRef>
+        </p:style>
+        <p:txBody>
+          <a:bodyPr rtlCol="0" anchor="ctr"/>
+          <a:lstStyle/>
+          <a:p>
+            <a:pPr algn="ctr"/>
+          </a:p>
+        </p:txBody>
+      </p:sp>
+      <p:sp>
+        <p:nvSpPr>
+          <p:cNvPr id="6" name="TextBox 5"/>
           <p:cNvSpPr txBox="1"/>
           <p:nvPr/>
         </p:nvSpPr>
         <p:spPr>
           <a:xfrm>
-            <a:off x="822960" y="1005840"/>
-            <a:ext cx="10515600" cy="1097280"/>
+            <a:off x="1188720" y="1371600"/>
+            <a:ext cx="10058400" cy="3566160"/>
+          </a:xfrm>
+          <a:prstGeom prst="rect">
+            <a:avLst/>
+          </a:prstGeom>
+          <a:noFill/>
+        </p:spPr>
+        <p:txBody>
+          <a:bodyPr wrap="square" anchor="ctr" lIns="0" rIns="0" tIns="0" bIns="0">
+            <a:spAutoFit/>
+          </a:bodyPr>
+          <a:lstStyle/>
+          <a:p>
+            <a:pPr algn="l">
+              <a:spcAft>
+                <a:spcPts val="1800"/>
+              </a:spcAft>
+            </a:pPr>
+            <a:r>
+              <a:rPr sz="4000" b="0" i="1">
+                <a:solidFill>
+                  <a:srgbClr val="1C1B19"/>
+                </a:solidFill>
+                <a:latin typeface="Source Serif 4"/>
+              </a:rPr>
+              <a:t>Have you ever thought something a group did was wrong, and said nothing?</a:t>
+            </a:r>
+          </a:p>
+        </p:txBody>
+      </p:sp>
+      <p:sp>
+        <p:nvSpPr>
+          <p:cNvPr id="7" name="TextBox 6"/>
+          <p:cNvSpPr txBox="1"/>
+          <p:nvPr/>
+        </p:nvSpPr>
+        <p:spPr>
+          <a:xfrm>
+            <a:off x="1188720" y="5120640"/>
+            <a:ext cx="10058400" cy="914400"/>
           </a:xfrm>
           <a:prstGeom prst="rect">
             <a:avLst/>
@@ -8007,377 +8327,17 @@
           <a:p>
             <a:pPr algn="l">
               <a:spcAft>
-                <a:spcPts val="1620"/>
-              </a:spcAft>
-            </a:pPr>
-            <a:r>
-              <a:rPr sz="3600" b="1" i="0">
-                <a:solidFill>
-                  <a:srgbClr val="1C1B19"/>
-                </a:solidFill>
-                <a:latin typeface="Source Serif 4"/>
-              </a:rPr>
-              <a:t>The quiet stuff that runs a group</a:t>
-            </a:r>
-          </a:p>
-        </p:txBody>
-      </p:sp>
-      <p:sp>
-        <p:nvSpPr>
-          <p:cNvPr id="6" name="TextBox 5"/>
-          <p:cNvSpPr txBox="1"/>
-          <p:nvPr/>
-        </p:nvSpPr>
-        <p:spPr>
-          <a:xfrm>
-            <a:off x="822960" y="2194560"/>
-            <a:ext cx="548640" cy="1005840"/>
-          </a:xfrm>
-          <a:prstGeom prst="rect">
-            <a:avLst/>
-          </a:prstGeom>
-          <a:noFill/>
-        </p:spPr>
-        <p:txBody>
-          <a:bodyPr wrap="square" anchor="t" lIns="0" rIns="0" tIns="0" bIns="0">
-            <a:spAutoFit/>
-          </a:bodyPr>
-          <a:lstStyle/>
-          <a:p>
-            <a:pPr algn="l">
-              <a:spcAft>
-                <a:spcPts val="1170"/>
-              </a:spcAft>
-            </a:pPr>
-            <a:r>
-              <a:rPr sz="2600" b="1" i="0">
-                <a:solidFill>
-                  <a:srgbClr val="F47B20"/>
-                </a:solidFill>
-                <a:latin typeface="Source Serif 4"/>
-              </a:rPr>
-              <a:t>•</a:t>
-            </a:r>
-          </a:p>
-        </p:txBody>
-      </p:sp>
-      <p:sp>
-        <p:nvSpPr>
-          <p:cNvPr id="7" name="TextBox 6"/>
-          <p:cNvSpPr txBox="1"/>
-          <p:nvPr/>
-        </p:nvSpPr>
-        <p:spPr>
-          <a:xfrm>
-            <a:off x="1463040" y="2231136"/>
-            <a:ext cx="9875520" cy="1005840"/>
-          </a:xfrm>
-          <a:prstGeom prst="rect">
-            <a:avLst/>
-          </a:prstGeom>
-          <a:noFill/>
-        </p:spPr>
-        <p:txBody>
-          <a:bodyPr wrap="square" anchor="t" lIns="0" rIns="0" tIns="0" bIns="0">
-            <a:spAutoFit/>
-          </a:bodyPr>
-          <a:lstStyle/>
-          <a:p>
-            <a:pPr algn="l">
-              <a:spcAft>
-                <a:spcPts val="945"/>
-              </a:spcAft>
-            </a:pPr>
-            <a:r>
-              <a:rPr sz="2100" b="1" i="0">
-                <a:solidFill>
-                  <a:srgbClr val="1C1B19"/>
-                </a:solidFill>
-                <a:latin typeface="Source Serif 4"/>
-              </a:rPr>
-              <a:t>The chat got renamed.</a:t>
-            </a:r>
-          </a:p>
-          <a:p>
-            <a:pPr algn="l">
-              <a:spcAft>
-                <a:spcPts val="945"/>
-              </a:spcAft>
-            </a:pPr>
-            <a:r>
-              <a:rPr sz="1600" b="0" i="0">
+                <a:spcPts val="810"/>
+              </a:spcAft>
+            </a:pPr>
+            <a:r>
+              <a:rPr sz="1800" b="0" i="0">
                 <a:solidFill>
                   <a:srgbClr val="5D5A54"/>
                 </a:solidFill>
-                <a:latin typeface="Source Serif 4"/>
-              </a:rPr>
-              <a:t>You weren't added to the new one.</a:t>
-            </a:r>
-          </a:p>
-        </p:txBody>
-      </p:sp>
-      <p:sp>
-        <p:nvSpPr>
-          <p:cNvPr id="8" name="TextBox 7"/>
-          <p:cNvSpPr txBox="1"/>
-          <p:nvPr/>
-        </p:nvSpPr>
-        <p:spPr>
-          <a:xfrm>
-            <a:off x="822960" y="3200400"/>
-            <a:ext cx="548640" cy="1005840"/>
-          </a:xfrm>
-          <a:prstGeom prst="rect">
-            <a:avLst/>
-          </a:prstGeom>
-          <a:noFill/>
-        </p:spPr>
-        <p:txBody>
-          <a:bodyPr wrap="square" anchor="t" lIns="0" rIns="0" tIns="0" bIns="0">
-            <a:spAutoFit/>
-          </a:bodyPr>
-          <a:lstStyle/>
-          <a:p>
-            <a:pPr algn="l">
-              <a:spcAft>
-                <a:spcPts val="1170"/>
-              </a:spcAft>
-            </a:pPr>
-            <a:r>
-              <a:rPr sz="2600" b="1" i="0">
-                <a:solidFill>
-                  <a:srgbClr val="F47B20"/>
-                </a:solidFill>
-                <a:latin typeface="Source Serif 4"/>
-              </a:rPr>
-              <a:t>•</a:t>
-            </a:r>
-          </a:p>
-        </p:txBody>
-      </p:sp>
-      <p:sp>
-        <p:nvSpPr>
-          <p:cNvPr id="9" name="TextBox 8"/>
-          <p:cNvSpPr txBox="1"/>
-          <p:nvPr/>
-        </p:nvSpPr>
-        <p:spPr>
-          <a:xfrm>
-            <a:off x="1463040" y="3236976"/>
-            <a:ext cx="9875520" cy="1005840"/>
-          </a:xfrm>
-          <a:prstGeom prst="rect">
-            <a:avLst/>
-          </a:prstGeom>
-          <a:noFill/>
-        </p:spPr>
-        <p:txBody>
-          <a:bodyPr wrap="square" anchor="t" lIns="0" rIns="0" tIns="0" bIns="0">
-            <a:spAutoFit/>
-          </a:bodyPr>
-          <a:lstStyle/>
-          <a:p>
-            <a:pPr algn="l">
-              <a:spcAft>
-                <a:spcPts val="945"/>
-              </a:spcAft>
-            </a:pPr>
-            <a:r>
-              <a:rPr sz="2100" b="1" i="0">
-                <a:solidFill>
-                  <a:srgbClr val="1C1B19"/>
-                </a:solidFill>
-                <a:latin typeface="Source Serif 4"/>
-              </a:rPr>
-              <a:t>Warm one on one, cold in the group.</a:t>
-            </a:r>
-          </a:p>
-          <a:p>
-            <a:pPr algn="l">
-              <a:spcAft>
-                <a:spcPts val="945"/>
-              </a:spcAft>
-            </a:pPr>
-            <a:r>
-              <a:rPr sz="1600" b="0" i="0">
-                <a:solidFill>
-                  <a:srgbClr val="5D5A54"/>
-                </a:solidFill>
-                <a:latin typeface="Source Serif 4"/>
-              </a:rPr>
-              <a:t>Same friend, different person.</a:t>
-            </a:r>
-          </a:p>
-        </p:txBody>
-      </p:sp>
-      <p:sp>
-        <p:nvSpPr>
-          <p:cNvPr id="10" name="TextBox 9"/>
-          <p:cNvSpPr txBox="1"/>
-          <p:nvPr/>
-        </p:nvSpPr>
-        <p:spPr>
-          <a:xfrm>
-            <a:off x="822960" y="4206240"/>
-            <a:ext cx="548640" cy="1005840"/>
-          </a:xfrm>
-          <a:prstGeom prst="rect">
-            <a:avLst/>
-          </a:prstGeom>
-          <a:noFill/>
-        </p:spPr>
-        <p:txBody>
-          <a:bodyPr wrap="square" anchor="t" lIns="0" rIns="0" tIns="0" bIns="0">
-            <a:spAutoFit/>
-          </a:bodyPr>
-          <a:lstStyle/>
-          <a:p>
-            <a:pPr algn="l">
-              <a:spcAft>
-                <a:spcPts val="1170"/>
-              </a:spcAft>
-            </a:pPr>
-            <a:r>
-              <a:rPr sz="2600" b="1" i="0">
-                <a:solidFill>
-                  <a:srgbClr val="F47B20"/>
-                </a:solidFill>
-                <a:latin typeface="Source Serif 4"/>
-              </a:rPr>
-              <a:t>•</a:t>
-            </a:r>
-          </a:p>
-        </p:txBody>
-      </p:sp>
-      <p:sp>
-        <p:nvSpPr>
-          <p:cNvPr id="11" name="TextBox 10"/>
-          <p:cNvSpPr txBox="1"/>
-          <p:nvPr/>
-        </p:nvSpPr>
-        <p:spPr>
-          <a:xfrm>
-            <a:off x="1463040" y="4242816"/>
-            <a:ext cx="9875520" cy="1005840"/>
-          </a:xfrm>
-          <a:prstGeom prst="rect">
-            <a:avLst/>
-          </a:prstGeom>
-          <a:noFill/>
-        </p:spPr>
-        <p:txBody>
-          <a:bodyPr wrap="square" anchor="t" lIns="0" rIns="0" tIns="0" bIns="0">
-            <a:spAutoFit/>
-          </a:bodyPr>
-          <a:lstStyle/>
-          <a:p>
-            <a:pPr algn="l">
-              <a:spcAft>
-                <a:spcPts val="945"/>
-              </a:spcAft>
-            </a:pPr>
-            <a:r>
-              <a:rPr sz="2100" b="1" i="0">
-                <a:solidFill>
-                  <a:srgbClr val="1C1B19"/>
-                </a:solidFill>
-                <a:latin typeface="Source Serif 4"/>
-              </a:rPr>
-              <a:t>A private message came back as a screenshot.</a:t>
-            </a:r>
-          </a:p>
-        </p:txBody>
-      </p:sp>
-      <p:sp>
-        <p:nvSpPr>
-          <p:cNvPr id="12" name="TextBox 11"/>
-          <p:cNvSpPr txBox="1"/>
-          <p:nvPr/>
-        </p:nvSpPr>
-        <p:spPr>
-          <a:xfrm>
-            <a:off x="822960" y="5212080"/>
-            <a:ext cx="548640" cy="1005840"/>
-          </a:xfrm>
-          <a:prstGeom prst="rect">
-            <a:avLst/>
-          </a:prstGeom>
-          <a:noFill/>
-        </p:spPr>
-        <p:txBody>
-          <a:bodyPr wrap="square" anchor="t" lIns="0" rIns="0" tIns="0" bIns="0">
-            <a:spAutoFit/>
-          </a:bodyPr>
-          <a:lstStyle/>
-          <a:p>
-            <a:pPr algn="l">
-              <a:spcAft>
-                <a:spcPts val="1170"/>
-              </a:spcAft>
-            </a:pPr>
-            <a:r>
-              <a:rPr sz="2600" b="1" i="0">
-                <a:solidFill>
-                  <a:srgbClr val="F47B20"/>
-                </a:solidFill>
-                <a:latin typeface="Source Serif 4"/>
-              </a:rPr>
-              <a:t>•</a:t>
-            </a:r>
-          </a:p>
-        </p:txBody>
-      </p:sp>
-      <p:sp>
-        <p:nvSpPr>
-          <p:cNvPr id="13" name="TextBox 12"/>
-          <p:cNvSpPr txBox="1"/>
-          <p:nvPr/>
-        </p:nvSpPr>
-        <p:spPr>
-          <a:xfrm>
-            <a:off x="1463040" y="5248656"/>
-            <a:ext cx="9875520" cy="1005840"/>
-          </a:xfrm>
-          <a:prstGeom prst="rect">
-            <a:avLst/>
-          </a:prstGeom>
-          <a:noFill/>
-        </p:spPr>
-        <p:txBody>
-          <a:bodyPr wrap="square" anchor="t" lIns="0" rIns="0" tIns="0" bIns="0">
-            <a:spAutoFit/>
-          </a:bodyPr>
-          <a:lstStyle/>
-          <a:p>
-            <a:pPr algn="l">
-              <a:spcAft>
-                <a:spcPts val="945"/>
-              </a:spcAft>
-            </a:pPr>
-            <a:r>
-              <a:rPr sz="2100" b="1" i="0">
-                <a:solidFill>
-                  <a:srgbClr val="1C1B19"/>
-                </a:solidFill>
-                <a:latin typeface="Source Serif 4"/>
-              </a:rPr>
-              <a:t>The roast always lands on the same person.</a:t>
-            </a:r>
-          </a:p>
-          <a:p>
-            <a:pPr algn="l">
-              <a:spcAft>
-                <a:spcPts val="945"/>
-              </a:spcAft>
-            </a:pPr>
-            <a:r>
-              <a:rPr sz="1600" b="0" i="0">
-                <a:solidFill>
-                  <a:srgbClr val="5D5A54"/>
-                </a:solidFill>
-                <a:latin typeface="Source Serif 4"/>
-              </a:rPr>
-              <a:t>Everyone knows who's at the bottom this week.</a:t>
+                <a:latin typeface="Inter Tight"/>
+              </a:rPr>
+              <a:t>Yes or no on a scrap. Fold it. No names.</a:t>
             </a:r>
           </a:p>
         </p:txBody>
@@ -8486,7 +8446,7 @@
                 </a:solidFill>
                 <a:latin typeface="Inter Tight"/>
               </a:rPr>
-              <a:t>THUMBS VOTE</a:t>
+              <a:t>NOT A DOORMAT. NOT A BULLY.</a:t>
             </a:r>
           </a:p>
         </p:txBody>
@@ -8532,45 +8492,40 @@
       </p:sp>
       <p:sp>
         <p:nvSpPr>
-          <p:cNvPr id="5" name="Rectangle 4"/>
-          <p:cNvSpPr/>
+          <p:cNvPr id="5" name="TextBox 4"/>
+          <p:cNvSpPr txBox="1"/>
           <p:nvPr/>
         </p:nvSpPr>
         <p:spPr>
           <a:xfrm>
-            <a:off x="822960" y="1371600"/>
-            <a:ext cx="73152" cy="3566160"/>
-          </a:xfrm>
-          <a:prstGeom prst="rect">
-            <a:avLst/>
-          </a:prstGeom>
-          <a:solidFill>
-            <a:srgbClr val="F47B20"/>
-          </a:solidFill>
-          <a:ln>
-            <a:noFill/>
-          </a:ln>
-          <a:effectLst/>
-        </p:spPr>
-        <p:style>
-          <a:lnRef idx="1">
-            <a:schemeClr val="accent1"/>
-          </a:lnRef>
-          <a:fillRef idx="3">
-            <a:schemeClr val="accent1"/>
-          </a:fillRef>
-          <a:effectRef idx="2">
-            <a:schemeClr val="accent1"/>
-          </a:effectRef>
-          <a:fontRef idx="minor">
-            <a:schemeClr val="lt1"/>
-          </a:fontRef>
-        </p:style>
-        <p:txBody>
-          <a:bodyPr rtlCol="0" anchor="ctr"/>
-          <a:lstStyle/>
-          <a:p>
-            <a:pPr algn="ctr"/>
+            <a:off x="822960" y="1005840"/>
+            <a:ext cx="10515600" cy="1097280"/>
+          </a:xfrm>
+          <a:prstGeom prst="rect">
+            <a:avLst/>
+          </a:prstGeom>
+          <a:noFill/>
+        </p:spPr>
+        <p:txBody>
+          <a:bodyPr wrap="square" anchor="t" lIns="0" rIns="0" tIns="0" bIns="0">
+            <a:spAutoFit/>
+          </a:bodyPr>
+          <a:lstStyle/>
+          <a:p>
+            <a:pPr algn="l">
+              <a:spcAft>
+                <a:spcPts val="1620"/>
+              </a:spcAft>
+            </a:pPr>
+            <a:r>
+              <a:rPr sz="3600" b="1" i="0">
+                <a:solidFill>
+                  <a:srgbClr val="1C1B19"/>
+                </a:solidFill>
+                <a:latin typeface="Source Serif 4"/>
+              </a:rPr>
+              <a:t>Assertive: stand up and still respect them</a:t>
+            </a:r>
           </a:p>
         </p:txBody>
       </p:sp>
@@ -8582,8 +8537,8 @@
         </p:nvSpPr>
         <p:spPr>
           <a:xfrm>
-            <a:off x="1188720" y="1371600"/>
-            <a:ext cx="10058400" cy="3566160"/>
+            <a:off x="822960" y="2194560"/>
+            <a:ext cx="548640" cy="1005840"/>
           </a:xfrm>
           <a:prstGeom prst="rect">
             <a:avLst/>
@@ -8591,24 +8546,24 @@
           <a:noFill/>
         </p:spPr>
         <p:txBody>
-          <a:bodyPr wrap="square" anchor="ctr" lIns="0" rIns="0" tIns="0" bIns="0">
+          <a:bodyPr wrap="square" anchor="t" lIns="0" rIns="0" tIns="0" bIns="0">
             <a:spAutoFit/>
           </a:bodyPr>
           <a:lstStyle/>
           <a:p>
             <a:pPr algn="l">
               <a:spcAft>
-                <a:spcPts val="1800"/>
-              </a:spcAft>
-            </a:pPr>
-            <a:r>
-              <a:rPr sz="4000" b="0" i="1">
-                <a:solidFill>
-                  <a:srgbClr val="1C1B19"/>
-                </a:solidFill>
-                <a:latin typeface="Source Serif 4"/>
-              </a:rPr>
-              <a:t>"The most popular people are the most liked."</a:t>
+                <a:spcPts val="1170"/>
+              </a:spcAft>
+            </a:pPr>
+            <a:r>
+              <a:rPr sz="2600" b="1" i="0">
+                <a:solidFill>
+                  <a:srgbClr val="F47B20"/>
+                </a:solidFill>
+                <a:latin typeface="Source Serif 4"/>
+              </a:rPr>
+              <a:t>1</a:t>
             </a:r>
           </a:p>
         </p:txBody>
@@ -8621,8 +8576,8 @@
         </p:nvSpPr>
         <p:spPr>
           <a:xfrm>
-            <a:off x="1188720" y="5120640"/>
-            <a:ext cx="10058400" cy="914400"/>
+            <a:off x="1463040" y="2231136"/>
+            <a:ext cx="9875520" cy="1005840"/>
           </a:xfrm>
           <a:prstGeom prst="rect">
             <a:avLst/>
@@ -8637,17 +8592,315 @@
           <a:p>
             <a:pPr algn="l">
               <a:spcAft>
-                <a:spcPts val="810"/>
-              </a:spcAft>
-            </a:pPr>
-            <a:r>
-              <a:rPr sz="1800" b="0" i="0">
+                <a:spcPts val="945"/>
+              </a:spcAft>
+            </a:pPr>
+            <a:r>
+              <a:rPr sz="2100" b="1" i="0">
+                <a:solidFill>
+                  <a:srgbClr val="1C1B19"/>
+                </a:solidFill>
+                <a:latin typeface="Source Serif 4"/>
+              </a:rPr>
+              <a:t>Go to the person, not the group.</a:t>
+            </a:r>
+          </a:p>
+          <a:p>
+            <a:pPr algn="l">
+              <a:spcAft>
+                <a:spcPts val="945"/>
+              </a:spcAft>
+            </a:pPr>
+            <a:r>
+              <a:rPr sz="1600" b="0" i="0">
                 <a:solidFill>
                   <a:srgbClr val="5D5A54"/>
                 </a:solidFill>
-                <a:latin typeface="Inter Tight"/>
-              </a:rPr>
-              <a:t>Thumbs up if true, down if false, sideways if it depends. Everyone at once.</a:t>
+                <a:latin typeface="Source Serif 4"/>
+              </a:rPr>
+              <a:t>"I noticed I wasn't in the new chat. Is something up with us?"</a:t>
+            </a:r>
+          </a:p>
+        </p:txBody>
+      </p:sp>
+      <p:sp>
+        <p:nvSpPr>
+          <p:cNvPr id="8" name="TextBox 7"/>
+          <p:cNvSpPr txBox="1"/>
+          <p:nvPr/>
+        </p:nvSpPr>
+        <p:spPr>
+          <a:xfrm>
+            <a:off x="822960" y="3200400"/>
+            <a:ext cx="548640" cy="1005840"/>
+          </a:xfrm>
+          <a:prstGeom prst="rect">
+            <a:avLst/>
+          </a:prstGeom>
+          <a:noFill/>
+        </p:spPr>
+        <p:txBody>
+          <a:bodyPr wrap="square" anchor="t" lIns="0" rIns="0" tIns="0" bIns="0">
+            <a:spAutoFit/>
+          </a:bodyPr>
+          <a:lstStyle/>
+          <a:p>
+            <a:pPr algn="l">
+              <a:spcAft>
+                <a:spcPts val="1170"/>
+              </a:spcAft>
+            </a:pPr>
+            <a:r>
+              <a:rPr sz="2600" b="1" i="0">
+                <a:solidFill>
+                  <a:srgbClr val="F47B20"/>
+                </a:solidFill>
+                <a:latin typeface="Source Serif 4"/>
+              </a:rPr>
+              <a:t>2</a:t>
+            </a:r>
+          </a:p>
+        </p:txBody>
+      </p:sp>
+      <p:sp>
+        <p:nvSpPr>
+          <p:cNvPr id="9" name="TextBox 8"/>
+          <p:cNvSpPr txBox="1"/>
+          <p:nvPr/>
+        </p:nvSpPr>
+        <p:spPr>
+          <a:xfrm>
+            <a:off x="1463040" y="3236976"/>
+            <a:ext cx="9875520" cy="1005840"/>
+          </a:xfrm>
+          <a:prstGeom prst="rect">
+            <a:avLst/>
+          </a:prstGeom>
+          <a:noFill/>
+        </p:spPr>
+        <p:txBody>
+          <a:bodyPr wrap="square" anchor="t" lIns="0" rIns="0" tIns="0" bIns="0">
+            <a:spAutoFit/>
+          </a:bodyPr>
+          <a:lstStyle/>
+          <a:p>
+            <a:pPr algn="l">
+              <a:spcAft>
+                <a:spcPts val="945"/>
+              </a:spcAft>
+            </a:pPr>
+            <a:r>
+              <a:rPr sz="2100" b="1" i="0">
+                <a:solidFill>
+                  <a:srgbClr val="1C1B19"/>
+                </a:solidFill>
+                <a:latin typeface="Source Serif 4"/>
+              </a:rPr>
+              <a:t>Let it stop with you.</a:t>
+            </a:r>
+          </a:p>
+          <a:p>
+            <a:pPr algn="l">
+              <a:spcAft>
+                <a:spcPts val="945"/>
+              </a:spcAft>
+            </a:pPr>
+            <a:r>
+              <a:rPr sz="1600" b="0" i="0">
+                <a:solidFill>
+                  <a:srgbClr val="5D5A54"/>
+                </a:solidFill>
+                <a:latin typeface="Source Serif 4"/>
+              </a:rPr>
+              <a:t>Rumors and screenshots need people to pass them on.</a:t>
+            </a:r>
+          </a:p>
+        </p:txBody>
+      </p:sp>
+      <p:sp>
+        <p:nvSpPr>
+          <p:cNvPr id="10" name="TextBox 9"/>
+          <p:cNvSpPr txBox="1"/>
+          <p:nvPr/>
+        </p:nvSpPr>
+        <p:spPr>
+          <a:xfrm>
+            <a:off x="822960" y="4206240"/>
+            <a:ext cx="548640" cy="1005840"/>
+          </a:xfrm>
+          <a:prstGeom prst="rect">
+            <a:avLst/>
+          </a:prstGeom>
+          <a:noFill/>
+        </p:spPr>
+        <p:txBody>
+          <a:bodyPr wrap="square" anchor="t" lIns="0" rIns="0" tIns="0" bIns="0">
+            <a:spAutoFit/>
+          </a:bodyPr>
+          <a:lstStyle/>
+          <a:p>
+            <a:pPr algn="l">
+              <a:spcAft>
+                <a:spcPts val="1170"/>
+              </a:spcAft>
+            </a:pPr>
+            <a:r>
+              <a:rPr sz="2600" b="1" i="0">
+                <a:solidFill>
+                  <a:srgbClr val="F47B20"/>
+                </a:solidFill>
+                <a:latin typeface="Source Serif 4"/>
+              </a:rPr>
+              <a:t>3</a:t>
+            </a:r>
+          </a:p>
+        </p:txBody>
+      </p:sp>
+      <p:sp>
+        <p:nvSpPr>
+          <p:cNvPr id="11" name="TextBox 10"/>
+          <p:cNvSpPr txBox="1"/>
+          <p:nvPr/>
+        </p:nvSpPr>
+        <p:spPr>
+          <a:xfrm>
+            <a:off x="1463040" y="4242816"/>
+            <a:ext cx="9875520" cy="1005840"/>
+          </a:xfrm>
+          <a:prstGeom prst="rect">
+            <a:avLst/>
+          </a:prstGeom>
+          <a:noFill/>
+        </p:spPr>
+        <p:txBody>
+          <a:bodyPr wrap="square" anchor="t" lIns="0" rIns="0" tIns="0" bIns="0">
+            <a:spAutoFit/>
+          </a:bodyPr>
+          <a:lstStyle/>
+          <a:p>
+            <a:pPr algn="l">
+              <a:spcAft>
+                <a:spcPts val="945"/>
+              </a:spcAft>
+            </a:pPr>
+            <a:r>
+              <a:rPr sz="2100" b="1" i="0">
+                <a:solidFill>
+                  <a:srgbClr val="1C1B19"/>
+                </a:solidFill>
+                <a:latin typeface="Source Serif 4"/>
+              </a:rPr>
+              <a:t>Keep more than one circle.</a:t>
+            </a:r>
+          </a:p>
+          <a:p>
+            <a:pPr algn="l">
+              <a:spcAft>
+                <a:spcPts val="945"/>
+              </a:spcAft>
+            </a:pPr>
+            <a:r>
+              <a:rPr sz="1600" b="0" i="0">
+                <a:solidFill>
+                  <a:srgbClr val="5D5A54"/>
+                </a:solidFill>
+                <a:latin typeface="Source Serif 4"/>
+              </a:rPr>
+              <a:t>Team, job, club, cousins, online friends.</a:t>
+            </a:r>
+          </a:p>
+        </p:txBody>
+      </p:sp>
+      <p:sp>
+        <p:nvSpPr>
+          <p:cNvPr id="12" name="TextBox 11"/>
+          <p:cNvSpPr txBox="1"/>
+          <p:nvPr/>
+        </p:nvSpPr>
+        <p:spPr>
+          <a:xfrm>
+            <a:off x="822960" y="5212080"/>
+            <a:ext cx="548640" cy="1005840"/>
+          </a:xfrm>
+          <a:prstGeom prst="rect">
+            <a:avLst/>
+          </a:prstGeom>
+          <a:noFill/>
+        </p:spPr>
+        <p:txBody>
+          <a:bodyPr wrap="square" anchor="t" lIns="0" rIns="0" tIns="0" bIns="0">
+            <a:spAutoFit/>
+          </a:bodyPr>
+          <a:lstStyle/>
+          <a:p>
+            <a:pPr algn="l">
+              <a:spcAft>
+                <a:spcPts val="1170"/>
+              </a:spcAft>
+            </a:pPr>
+            <a:r>
+              <a:rPr sz="2600" b="1" i="0">
+                <a:solidFill>
+                  <a:srgbClr val="F47B20"/>
+                </a:solidFill>
+                <a:latin typeface="Source Serif 4"/>
+              </a:rPr>
+              <a:t>4</a:t>
+            </a:r>
+          </a:p>
+        </p:txBody>
+      </p:sp>
+      <p:sp>
+        <p:nvSpPr>
+          <p:cNvPr id="13" name="TextBox 12"/>
+          <p:cNvSpPr txBox="1"/>
+          <p:nvPr/>
+        </p:nvSpPr>
+        <p:spPr>
+          <a:xfrm>
+            <a:off x="1463040" y="5248656"/>
+            <a:ext cx="9875520" cy="1005840"/>
+          </a:xfrm>
+          <a:prstGeom prst="rect">
+            <a:avLst/>
+          </a:prstGeom>
+          <a:noFill/>
+        </p:spPr>
+        <p:txBody>
+          <a:bodyPr wrap="square" anchor="t" lIns="0" rIns="0" tIns="0" bIns="0">
+            <a:spAutoFit/>
+          </a:bodyPr>
+          <a:lstStyle/>
+          <a:p>
+            <a:pPr algn="l">
+              <a:spcAft>
+                <a:spcPts val="945"/>
+              </a:spcAft>
+            </a:pPr>
+            <a:r>
+              <a:rPr sz="2100" b="1" i="0">
+                <a:solidFill>
+                  <a:srgbClr val="1C1B19"/>
+                </a:solidFill>
+                <a:latin typeface="Source Serif 4"/>
+              </a:rPr>
+              <a:t>Pull someone in.</a:t>
+            </a:r>
+          </a:p>
+          <a:p>
+            <a:pPr algn="l">
+              <a:spcAft>
+                <a:spcPts val="945"/>
+              </a:spcAft>
+            </a:pPr>
+            <a:r>
+              <a:rPr sz="1600" b="0" i="0">
+                <a:solidFill>
+                  <a:srgbClr val="5D5A54"/>
+                </a:solidFill>
+                <a:latin typeface="Source Serif 4"/>
+              </a:rPr>
+              <a:t>"Want to come with us?" The best use of social power.</a:t>
             </a:r>
           </a:p>
         </p:txBody>
@@ -8756,7 +9009,7 @@
                 </a:solidFill>
                 <a:latin typeface="Inter Tight"/>
               </a:rPr>
-              <a:t>SAME GAME, DIFFERENT MOVES</a:t>
+              <a:t>THREE MOMENTS</a:t>
             </a:r>
           </a:p>
         </p:txBody>
@@ -8834,7 +9087,7 @@
                 </a:solidFill>
                 <a:latin typeface="Source Serif 4"/>
               </a:rPr>
-              <a:t>Every gender plays. The moves just sound different.</a:t>
+              <a:t>What's your move?</a:t>
             </a:r>
           </a:p>
         </p:txBody>
@@ -8848,7 +9101,7 @@
         <p:spPr>
           <a:xfrm>
             <a:off x="822960" y="2103120"/>
-            <a:ext cx="5120640" cy="3931920"/>
+            <a:ext cx="3322320" cy="3840480"/>
           </a:xfrm>
           <a:prstGeom prst="rect">
             <a:avLst/>
@@ -8893,8 +9146,8 @@
         </p:nvSpPr>
         <p:spPr>
           <a:xfrm>
-            <a:off x="1097280" y="2286000"/>
-            <a:ext cx="4572000" cy="457200"/>
+            <a:off x="1051560" y="2286000"/>
+            <a:ext cx="2865120" cy="365760"/>
           </a:xfrm>
           <a:prstGeom prst="rect">
             <a:avLst/>
@@ -8919,7 +9172,7 @@
                 </a:solidFill>
                 <a:latin typeface="Inter Tight"/>
               </a:rPr>
-              <a:t>QUIETER MOVES</a:t>
+              <a:t>MAYA</a:t>
             </a:r>
           </a:p>
         </p:txBody>
@@ -8932,8 +9185,8 @@
         </p:nvSpPr>
         <p:spPr>
           <a:xfrm>
-            <a:off x="1097280" y="2788920"/>
-            <a:ext cx="4572000" cy="3108960"/>
+            <a:off x="1051560" y="2743200"/>
+            <a:ext cx="2865120" cy="3017520"/>
           </a:xfrm>
           <a:prstGeom prst="rect">
             <a:avLst/>
@@ -8948,65 +9201,17 @@
           <a:p>
             <a:pPr algn="l">
               <a:spcAft>
-                <a:spcPts val="855"/>
-              </a:spcAft>
-            </a:pPr>
-            <a:r>
-              <a:rPr sz="1900" b="0" i="0">
+                <a:spcPts val="810"/>
+              </a:spcAft>
+            </a:pPr>
+            <a:r>
+              <a:rPr sz="1800" b="0" i="0">
                 <a:solidFill>
                   <a:srgbClr val="1C1B19"/>
                 </a:solidFill>
                 <a:latin typeface="Source Serif 4"/>
               </a:rPr>
-              <a:t>Plans made where one person can see</a:t>
-            </a:r>
-          </a:p>
-          <a:p>
-            <a:pPr algn="l">
-              <a:spcAft>
-                <a:spcPts val="855"/>
-              </a:spcAft>
-            </a:pPr>
-            <a:r>
-              <a:rPr sz="1900" b="0" i="0">
-                <a:solidFill>
-                  <a:srgbClr val="1C1B19"/>
-                </a:solidFill>
-                <a:latin typeface="Source Serif 4"/>
-              </a:rPr>
-              <a:t>Secrets turned into screenshots</a:t>
-            </a:r>
-          </a:p>
-          <a:p>
-            <a:pPr algn="l">
-              <a:spcAft>
-                <a:spcPts val="855"/>
-              </a:spcAft>
-            </a:pPr>
-            <a:r>
-              <a:rPr sz="1900" b="0" i="0">
-                <a:solidFill>
-                  <a:srgbClr val="1C1B19"/>
-                </a:solidFill>
-                <a:latin typeface="Source Serif 4"/>
-              </a:rPr>
-              <a:t>The freeze-out: left on read</a:t>
-            </a:r>
-          </a:p>
-          <a:p>
-            <a:pPr algn="l">
-              <a:spcAft>
-                <a:spcPts val="855"/>
-              </a:spcAft>
-            </a:pPr>
-            <a:r>
-              <a:rPr sz="1900" b="0" i="0">
-                <a:solidFill>
-                  <a:srgbClr val="1C1B19"/>
-                </a:solidFill>
-                <a:latin typeface="Source Serif 4"/>
-              </a:rPr>
-              <a:t>"If you hang out with her, we're done"</a:t>
+              <a:t>The prom group has one spot too many. In a side chat, someone suggests "just not telling Maya" the plan changed.</a:t>
             </a:r>
           </a:p>
         </p:txBody>
@@ -9019,8 +9224,8 @@
         </p:nvSpPr>
         <p:spPr>
           <a:xfrm>
-            <a:off x="6309360" y="2103120"/>
-            <a:ext cx="5120640" cy="3931920"/>
+            <a:off x="4419600" y="2103120"/>
+            <a:ext cx="3322320" cy="3840480"/>
           </a:xfrm>
           <a:prstGeom prst="rect">
             <a:avLst/>
@@ -9065,8 +9270,8 @@
         </p:nvSpPr>
         <p:spPr>
           <a:xfrm>
-            <a:off x="6583680" y="2286000"/>
-            <a:ext cx="4572000" cy="457200"/>
+            <a:off x="4648200" y="2286000"/>
+            <a:ext cx="2865120" cy="365760"/>
           </a:xfrm>
           <a:prstGeom prst="rect">
             <a:avLst/>
@@ -9091,7 +9296,7 @@
                 </a:solidFill>
                 <a:latin typeface="Inter Tight"/>
               </a:rPr>
-              <a:t>LOUDER MOVES</a:t>
+              <a:t>DEV</a:t>
             </a:r>
           </a:p>
         </p:txBody>
@@ -9104,8 +9309,8 @@
         </p:nvSpPr>
         <p:spPr>
           <a:xfrm>
-            <a:off x="6583680" y="2788920"/>
-            <a:ext cx="4572000" cy="3108960"/>
+            <a:off x="4648200" y="2743200"/>
+            <a:ext cx="2865120" cy="3017520"/>
           </a:xfrm>
           <a:prstGeom prst="rect">
             <a:avLst/>
@@ -9120,65 +9325,141 @@
           <a:p>
             <a:pPr algn="l">
               <a:spcAft>
-                <a:spcPts val="855"/>
-              </a:spcAft>
-            </a:pPr>
-            <a:r>
-              <a:rPr sz="1900" b="0" i="0">
+                <a:spcPts val="810"/>
+              </a:spcAft>
+            </a:pPr>
+            <a:r>
+              <a:rPr sz="1800" b="0" i="0">
                 <a:solidFill>
                   <a:srgbClr val="1C1B19"/>
                 </a:solidFill>
                 <a:latin typeface="Source Serif 4"/>
               </a:rPr>
-              <a:t>A roast that always picks one person</a:t>
-            </a:r>
-          </a:p>
-          <a:p>
-            <a:pPr algn="l">
-              <a:spcAft>
-                <a:spcPts val="855"/>
-              </a:spcAft>
-            </a:pPr>
-            <a:r>
-              <a:rPr sz="1900" b="0" i="0">
+              <a:t>The guys' chat has a running bit about who's most "soft." This week it's Dev, and nobody told him about the pickup game.</a:t>
+            </a:r>
+          </a:p>
+        </p:txBody>
+      </p:sp>
+      <p:sp>
+        <p:nvSpPr>
+          <p:cNvPr id="12" name="Rectangle 11"/>
+          <p:cNvSpPr/>
+          <p:nvPr/>
+        </p:nvSpPr>
+        <p:spPr>
+          <a:xfrm>
+            <a:off x="8016239" y="2103120"/>
+            <a:ext cx="3322320" cy="3840480"/>
+          </a:xfrm>
+          <a:prstGeom prst="rect">
+            <a:avLst/>
+          </a:prstGeom>
+          <a:solidFill>
+            <a:srgbClr val="FFFFFF"/>
+          </a:solidFill>
+          <a:ln w="15875">
+            <a:solidFill>
+              <a:srgbClr val="D8D2C6"/>
+            </a:solidFill>
+          </a:ln>
+          <a:effectLst/>
+        </p:spPr>
+        <p:style>
+          <a:lnRef idx="1">
+            <a:schemeClr val="accent1"/>
+          </a:lnRef>
+          <a:fillRef idx="3">
+            <a:schemeClr val="accent1"/>
+          </a:fillRef>
+          <a:effectRef idx="2">
+            <a:schemeClr val="accent1"/>
+          </a:effectRef>
+          <a:fontRef idx="minor">
+            <a:schemeClr val="lt1"/>
+          </a:fontRef>
+        </p:style>
+        <p:txBody>
+          <a:bodyPr rtlCol="0" anchor="ctr"/>
+          <a:lstStyle/>
+          <a:p>
+            <a:pPr algn="ctr"/>
+          </a:p>
+        </p:txBody>
+      </p:sp>
+      <p:sp>
+        <p:nvSpPr>
+          <p:cNvPr id="13" name="TextBox 12"/>
+          <p:cNvSpPr txBox="1"/>
+          <p:nvPr/>
+        </p:nvSpPr>
+        <p:spPr>
+          <a:xfrm>
+            <a:off x="8244839" y="2286000"/>
+            <a:ext cx="2865120" cy="365760"/>
+          </a:xfrm>
+          <a:prstGeom prst="rect">
+            <a:avLst/>
+          </a:prstGeom>
+          <a:noFill/>
+        </p:spPr>
+        <p:txBody>
+          <a:bodyPr wrap="square" anchor="t" lIns="0" rIns="0" tIns="0" bIns="0">
+            <a:spAutoFit/>
+          </a:bodyPr>
+          <a:lstStyle/>
+          <a:p>
+            <a:pPr algn="l">
+              <a:spcAft>
+                <a:spcPts val="585"/>
+              </a:spcAft>
+            </a:pPr>
+            <a:r>
+              <a:rPr sz="1300" b="1" i="0">
+                <a:solidFill>
+                  <a:srgbClr val="0B2D5B"/>
+                </a:solidFill>
+                <a:latin typeface="Inter Tight"/>
+              </a:rPr>
+              <a:t>SOFIA</a:t>
+            </a:r>
+          </a:p>
+        </p:txBody>
+      </p:sp>
+      <p:sp>
+        <p:nvSpPr>
+          <p:cNvPr id="14" name="TextBox 13"/>
+          <p:cNvSpPr txBox="1"/>
+          <p:nvPr/>
+        </p:nvSpPr>
+        <p:spPr>
+          <a:xfrm>
+            <a:off x="8244839" y="2743200"/>
+            <a:ext cx="2865120" cy="3017520"/>
+          </a:xfrm>
+          <a:prstGeom prst="rect">
+            <a:avLst/>
+          </a:prstGeom>
+          <a:noFill/>
+        </p:spPr>
+        <p:txBody>
+          <a:bodyPr wrap="square" anchor="t" lIns="0" rIns="0" tIns="0" bIns="0">
+            <a:spAutoFit/>
+          </a:bodyPr>
+          <a:lstStyle/>
+          <a:p>
+            <a:pPr algn="l">
+              <a:spcAft>
+                <a:spcPts val="810"/>
+              </a:spcAft>
+            </a:pPr>
+            <a:r>
+              <a:rPr sz="1800" b="0" i="0">
                 <a:solidFill>
                   <a:srgbClr val="1C1B19"/>
                 </a:solidFill>
                 <a:latin typeface="Source Serif 4"/>
               </a:rPr>
-              <a:t>Ranking who's in and who's out</a:t>
-            </a:r>
-          </a:p>
-          <a:p>
-            <a:pPr algn="l">
-              <a:spcAft>
-                <a:spcPts val="855"/>
-              </a:spcAft>
-            </a:pPr>
-            <a:r>
-              <a:rPr sz="1900" b="0" i="0">
-                <a:solidFill>
-                  <a:srgbClr val="1C1B19"/>
-                </a:solidFill>
-                <a:latin typeface="Source Serif 4"/>
-              </a:rPr>
-              <a:t>Quietly dropped from the game or the lift</a:t>
-            </a:r>
-          </a:p>
-          <a:p>
-            <a:pPr algn="l">
-              <a:spcAft>
-                <a:spcPts val="855"/>
-              </a:spcAft>
-            </a:pPr>
-            <a:r>
-              <a:rPr sz="1900" b="0" i="0">
-                <a:solidFill>
-                  <a:srgbClr val="1C1B19"/>
-                </a:solidFill>
-                <a:latin typeface="Source Serif 4"/>
-              </a:rPr>
-              <a:t>Calling someone "soft" to keep him in line</a:t>
+              <a:t>She's running for class president. Her group starts calling her "try-hard" and stops inviting her.</a:t>
             </a:r>
           </a:p>
         </p:txBody>
@@ -9287,7 +9568,7 @@
                 </a:solidFill>
                 <a:latin typeface="Inter Tight"/>
               </a:rPr>
-              <a:t>ANONYMOUS CARDS</a:t>
+              <a:t>BEFORE YOU GO</a:t>
             </a:r>
           </a:p>
         </p:txBody>
@@ -9333,23 +9614,103 @@
       </p:sp>
       <p:sp>
         <p:nvSpPr>
-          <p:cNvPr id="5" name="Rectangle 4"/>
+          <p:cNvPr id="5" name="TextBox 4"/>
+          <p:cNvSpPr txBox="1"/>
+          <p:nvPr/>
+        </p:nvSpPr>
+        <p:spPr>
+          <a:xfrm>
+            <a:off x="822960" y="1188720"/>
+            <a:ext cx="10515600" cy="914400"/>
+          </a:xfrm>
+          <a:prstGeom prst="rect">
+            <a:avLst/>
+          </a:prstGeom>
+          <a:noFill/>
+        </p:spPr>
+        <p:txBody>
+          <a:bodyPr wrap="square" anchor="t" lIns="0" rIns="0" tIns="0" bIns="0">
+            <a:spAutoFit/>
+          </a:bodyPr>
+          <a:lstStyle/>
+          <a:p>
+            <a:pPr algn="l">
+              <a:spcAft>
+                <a:spcPts val="1620"/>
+              </a:spcAft>
+            </a:pPr>
+            <a:r>
+              <a:rPr sz="3600" b="1" i="0">
+                <a:solidFill>
+                  <a:srgbClr val="1C1B19"/>
+                </a:solidFill>
+                <a:latin typeface="Source Serif 4"/>
+              </a:rPr>
+              <a:t>One move</a:t>
+            </a:r>
+          </a:p>
+        </p:txBody>
+      </p:sp>
+      <p:sp>
+        <p:nvSpPr>
+          <p:cNvPr id="6" name="TextBox 5"/>
+          <p:cNvSpPr txBox="1"/>
+          <p:nvPr/>
+        </p:nvSpPr>
+        <p:spPr>
+          <a:xfrm>
+            <a:off x="822960" y="2286000"/>
+            <a:ext cx="10515600" cy="1463040"/>
+          </a:xfrm>
+          <a:prstGeom prst="rect">
+            <a:avLst/>
+          </a:prstGeom>
+          <a:noFill/>
+        </p:spPr>
+        <p:txBody>
+          <a:bodyPr wrap="square" anchor="t" lIns="0" rIns="0" tIns="0" bIns="0">
+            <a:spAutoFit/>
+          </a:bodyPr>
+          <a:lstStyle/>
+          <a:p>
+            <a:pPr algn="l">
+              <a:spcAft>
+                <a:spcPts val="1080"/>
+              </a:spcAft>
+            </a:pPr>
+            <a:r>
+              <a:rPr sz="2400" b="0" i="0">
+                <a:solidFill>
+                  <a:srgbClr val="1C1B19"/>
+                </a:solidFill>
+                <a:latin typeface="Source Serif 4"/>
+              </a:rPr>
+              <a:t>Privately: one thing you could do this week, for yourself or for someone on the outside.</a:t>
+            </a:r>
+          </a:p>
+        </p:txBody>
+      </p:sp>
+      <p:sp>
+        <p:nvSpPr>
+          <p:cNvPr id="7" name="Rectangle 6"/>
           <p:cNvSpPr/>
           <p:nvPr/>
         </p:nvSpPr>
         <p:spPr>
           <a:xfrm>
-            <a:off x="822960" y="1371600"/>
-            <a:ext cx="73152" cy="3566160"/>
+            <a:off x="822960" y="4023360"/>
+            <a:ext cx="10515600" cy="1371600"/>
           </a:xfrm>
           <a:prstGeom prst="rect">
             <a:avLst/>
           </a:prstGeom>
           <a:solidFill>
-            <a:srgbClr val="F47B20"/>
+            <a:srgbClr val="FFFFFF"/>
           </a:solidFill>
-          <a:ln>
-            <a:noFill/>
+          <a:ln w="15875">
+            <a:solidFill>
+              <a:srgbClr val="1C1B19"/>
+            </a:solidFill>
           </a:ln>
           <a:effectLst/>
         </p:spPr>
@@ -9377,53 +9738,14 @@
       </p:sp>
       <p:sp>
         <p:nvSpPr>
-          <p:cNvPr id="6" name="TextBox 5"/>
+          <p:cNvPr id="8" name="TextBox 7"/>
           <p:cNvSpPr txBox="1"/>
           <p:nvPr/>
         </p:nvSpPr>
         <p:spPr>
           <a:xfrm>
-            <a:off x="1188720" y="1371600"/>
-            <a:ext cx="10058400" cy="3566160"/>
-          </a:xfrm>
-          <a:prstGeom prst="rect">
-            <a:avLst/>
-          </a:prstGeom>
-          <a:noFill/>
-        </p:spPr>
-        <p:txBody>
-          <a:bodyPr wrap="square" anchor="ctr" lIns="0" rIns="0" tIns="0" bIns="0">
-            <a:spAutoFit/>
-          </a:bodyPr>
-          <a:lstStyle/>
-          <a:p>
-            <a:pPr algn="l">
-              <a:spcAft>
-                <a:spcPts val="1800"/>
-              </a:spcAft>
-            </a:pPr>
-            <a:r>
-              <a:rPr sz="4000" b="0" i="1">
-                <a:solidFill>
-                  <a:srgbClr val="1C1B19"/>
-                </a:solidFill>
-                <a:latin typeface="Source Serif 4"/>
-              </a:rPr>
-              <a:t>Have you ever thought something a group did was wrong, and said nothing?</a:t>
-            </a:r>
-          </a:p>
-        </p:txBody>
-      </p:sp>
-      <p:sp>
-        <p:nvSpPr>
-          <p:cNvPr id="7" name="TextBox 6"/>
-          <p:cNvSpPr txBox="1"/>
-          <p:nvPr/>
-        </p:nvSpPr>
-        <p:spPr>
-          <a:xfrm>
-            <a:off x="1188720" y="5120640"/>
-            <a:ext cx="10058400" cy="914400"/>
+            <a:off x="1097280" y="4206240"/>
+            <a:ext cx="10058400" cy="365760"/>
           </a:xfrm>
           <a:prstGeom prst="rect">
             <a:avLst/>
@@ -9438,17 +9760,56 @@
           <a:p>
             <a:pPr algn="l">
               <a:spcAft>
-                <a:spcPts val="810"/>
-              </a:spcAft>
-            </a:pPr>
-            <a:r>
-              <a:rPr sz="1800" b="0" i="0">
-                <a:solidFill>
-                  <a:srgbClr val="5D5A54"/>
+                <a:spcPts val="540"/>
+              </a:spcAft>
+            </a:pPr>
+            <a:r>
+              <a:rPr sz="1200" b="1" i="0">
+                <a:solidFill>
+                  <a:srgbClr val="0B2D5B"/>
                 </a:solidFill>
                 <a:latin typeface="Inter Tight"/>
               </a:rPr>
-              <a:t>Yes or no on a scrap. Fold it. No names.</a:t>
+              <a:t>STUDENT PAGE</a:t>
+            </a:r>
+          </a:p>
+        </p:txBody>
+      </p:sp>
+      <p:sp>
+        <p:nvSpPr>
+          <p:cNvPr id="9" name="TextBox 8"/>
+          <p:cNvSpPr txBox="1"/>
+          <p:nvPr/>
+        </p:nvSpPr>
+        <p:spPr>
+          <a:xfrm>
+            <a:off x="1097280" y="4617720"/>
+            <a:ext cx="10058400" cy="640080"/>
+          </a:xfrm>
+          <a:prstGeom prst="rect">
+            <a:avLst/>
+          </a:prstGeom>
+          <a:noFill/>
+        </p:spPr>
+        <p:txBody>
+          <a:bodyPr wrap="square" anchor="t" lIns="0" rIns="0" tIns="0" bIns="0">
+            <a:spAutoFit/>
+          </a:bodyPr>
+          <a:lstStyle/>
+          <a:p>
+            <a:pPr algn="l">
+              <a:spcAft>
+                <a:spcPts val="900"/>
+              </a:spcAft>
+            </a:pPr>
+            <a:r>
+              <a:rPr sz="2000" b="0" i="0">
+                <a:solidFill>
+                  <a:srgbClr val="1C1B19"/>
+                </a:solidFill>
+                <a:latin typeface="Inter Tight"/>
+              </a:rPr>
+              <a:t>https://rmwtoolkit.github.io/bcds-toolkit/inner-circle-high-school.html</a:t>
             </a:r>
           </a:p>
         </p:txBody>

--- a/decks/inner-circle-lesson-v2.pptx
+++ b/decks/inner-circle-lesson-v2.pptx
@@ -6720,6 +6720,45 @@
                 <a:latin typeface="Inter Tight"/>
               </a:rPr>
               <a:t>Beaver Upper School · Counseling</a:t>
+            </a:r>
+          </a:p>
+        </p:txBody>
+      </p:sp>
+      <p:sp>
+        <p:nvSpPr>
+          <p:cNvPr id="8" name="TextBox 7"/>
+          <p:cNvSpPr txBox="1"/>
+          <p:nvPr/>
+        </p:nvSpPr>
+        <p:spPr>
+          <a:xfrm>
+            <a:off x="6766560" y="5897880"/>
+            <a:ext cx="4846320" cy="640080"/>
+          </a:xfrm>
+          <a:prstGeom prst="rect">
+            <a:avLst/>
+          </a:prstGeom>
+          <a:noFill/>
+        </p:spPr>
+        <p:txBody>
+          <a:bodyPr wrap="square" anchor="t" lIns="0" rIns="0" tIns="0" bIns="0">
+            <a:spAutoFit/>
+          </a:bodyPr>
+          <a:lstStyle/>
+          <a:p>
+            <a:pPr algn="r">
+              <a:spcAft>
+                <a:spcPts val="495"/>
+              </a:spcAft>
+            </a:pPr>
+            <a:r>
+              <a:rPr sz="1100" b="0" i="0">
+                <a:solidFill>
+                  <a:srgbClr val="E8E4DA"/>
+                </a:solidFill>
+                <a:latin typeface="Inter Tight"/>
+              </a:rPr>
+              <a:t>Written by Dr. Rick Wilson, with AI-assisted drafting. Every lesson is reviewed and edited by Dr. Wilson.</a:t>
             </a:r>
           </a:p>
         </p:txBody>
